--- a/docs/report/Enterprise Energy Data Platform Progress 1.pptx
+++ b/docs/report/Enterprise Energy Data Platform Progress 1.pptx
@@ -15,8 +15,14 @@
     <p:sldId id="263" r:id="rId9"/>
     <p:sldId id="264" r:id="rId10"/>
     <p:sldId id="265" r:id="rId11"/>
-    <p:sldId id="266" r:id="rId12"/>
-    <p:sldId id="267" r:id="rId13"/>
+    <p:sldId id="268" r:id="rId12"/>
+    <p:sldId id="274" r:id="rId13"/>
+    <p:sldId id="275" r:id="rId14"/>
+    <p:sldId id="276" r:id="rId15"/>
+    <p:sldId id="277" r:id="rId16"/>
+    <p:sldId id="278" r:id="rId17"/>
+    <p:sldId id="266" r:id="rId18"/>
+    <p:sldId id="267" r:id="rId19"/>
   </p:sldIdLst>
   <p:sldSz cx="12192000" cy="6858000"/>
   <p:notesSz cx="6858000" cy="9144000"/>
@@ -313,7 +319,7 @@
           <a:p>
             <a:fld id="{5BCAD085-E8A6-8845-BD4E-CB4CCA059FC4}" type="datetimeFigureOut">
               <a:rPr lang="en-US" smtClean="0"/>
-              <a:t>8/20/2026</a:t>
+              <a:t>10/9/2026</a:t>
             </a:fld>
             <a:endParaRPr lang="en-US"/>
           </a:p>
@@ -481,7 +487,7 @@
           <a:p>
             <a:fld id="{5BCAD085-E8A6-8845-BD4E-CB4CCA059FC4}" type="datetimeFigureOut">
               <a:rPr lang="en-US" smtClean="0"/>
-              <a:t>8/20/2026</a:t>
+              <a:t>10/9/2026</a:t>
             </a:fld>
             <a:endParaRPr lang="en-US"/>
           </a:p>
@@ -659,7 +665,7 @@
           <a:p>
             <a:fld id="{5BCAD085-E8A6-8845-BD4E-CB4CCA059FC4}" type="datetimeFigureOut">
               <a:rPr lang="en-US" smtClean="0"/>
-              <a:t>8/20/2026</a:t>
+              <a:t>10/9/2026</a:t>
             </a:fld>
             <a:endParaRPr lang="en-US"/>
           </a:p>
@@ -827,7 +833,7 @@
           <a:p>
             <a:fld id="{5BCAD085-E8A6-8845-BD4E-CB4CCA059FC4}" type="datetimeFigureOut">
               <a:rPr lang="en-US" smtClean="0"/>
-              <a:t>8/20/2026</a:t>
+              <a:t>10/9/2026</a:t>
             </a:fld>
             <a:endParaRPr lang="en-US"/>
           </a:p>
@@ -1072,7 +1078,7 @@
           <a:p>
             <a:fld id="{5BCAD085-E8A6-8845-BD4E-CB4CCA059FC4}" type="datetimeFigureOut">
               <a:rPr lang="en-US" smtClean="0"/>
-              <a:t>8/20/2026</a:t>
+              <a:t>10/9/2026</a:t>
             </a:fld>
             <a:endParaRPr lang="en-US"/>
           </a:p>
@@ -1357,7 +1363,7 @@
           <a:p>
             <a:fld id="{5BCAD085-E8A6-8845-BD4E-CB4CCA059FC4}" type="datetimeFigureOut">
               <a:rPr lang="en-US" smtClean="0"/>
-              <a:t>8/20/2026</a:t>
+              <a:t>10/9/2026</a:t>
             </a:fld>
             <a:endParaRPr lang="en-US"/>
           </a:p>
@@ -1776,7 +1782,7 @@
           <a:p>
             <a:fld id="{5BCAD085-E8A6-8845-BD4E-CB4CCA059FC4}" type="datetimeFigureOut">
               <a:rPr lang="en-US" smtClean="0"/>
-              <a:t>8/20/2026</a:t>
+              <a:t>10/9/2026</a:t>
             </a:fld>
             <a:endParaRPr lang="en-US"/>
           </a:p>
@@ -1893,7 +1899,7 @@
           <a:p>
             <a:fld id="{5BCAD085-E8A6-8845-BD4E-CB4CCA059FC4}" type="datetimeFigureOut">
               <a:rPr lang="en-US" smtClean="0"/>
-              <a:t>8/20/2026</a:t>
+              <a:t>10/9/2026</a:t>
             </a:fld>
             <a:endParaRPr lang="en-US"/>
           </a:p>
@@ -1988,7 +1994,7 @@
           <a:p>
             <a:fld id="{5BCAD085-E8A6-8845-BD4E-CB4CCA059FC4}" type="datetimeFigureOut">
               <a:rPr lang="en-US" smtClean="0"/>
-              <a:t>8/20/2026</a:t>
+              <a:t>10/9/2026</a:t>
             </a:fld>
             <a:endParaRPr lang="en-US"/>
           </a:p>
@@ -2263,7 +2269,7 @@
           <a:p>
             <a:fld id="{5BCAD085-E8A6-8845-BD4E-CB4CCA059FC4}" type="datetimeFigureOut">
               <a:rPr lang="en-US" smtClean="0"/>
-              <a:t>8/20/2026</a:t>
+              <a:t>10/9/2026</a:t>
             </a:fld>
             <a:endParaRPr lang="en-US"/>
           </a:p>
@@ -2515,7 +2521,7 @@
           <a:p>
             <a:fld id="{5BCAD085-E8A6-8845-BD4E-CB4CCA059FC4}" type="datetimeFigureOut">
               <a:rPr lang="en-US" smtClean="0"/>
-              <a:t>8/20/2026</a:t>
+              <a:t>10/9/2026</a:t>
             </a:fld>
             <a:endParaRPr lang="en-US"/>
           </a:p>
@@ -2726,7 +2732,7 @@
           <a:p>
             <a:fld id="{5BCAD085-E8A6-8845-BD4E-CB4CCA059FC4}" type="datetimeFigureOut">
               <a:rPr lang="en-US" smtClean="0"/>
-              <a:t>8/20/2026</a:t>
+              <a:t>10/9/2026</a:t>
             </a:fld>
             <a:endParaRPr lang="en-US"/>
           </a:p>
@@ -4644,7 +4650,13 @@
       </p:grpSpPr>
       <p:pic>
         <p:nvPicPr>
-          <p:cNvPr id="2" name="Picture 1" descr="image.png"/>
+          <p:cNvPr id="5" name="Picture 4" descr="image.png">
+            <a:extLst>
+              <a:ext uri="{FF2B5EF4-FFF2-40B4-BE49-F238E27FC236}">
+                <a16:creationId xmlns:a16="http://schemas.microsoft.com/office/drawing/2014/main" id="{08AE217E-6246-63B1-6943-F0A14198A801}"/>
+              </a:ext>
+            </a:extLst>
+          </p:cNvPr>
           <p:cNvPicPr>
             <a:picLocks noChangeAspect="1"/>
           </p:cNvPicPr>
@@ -4666,6 +4678,103 @@
           </a:prstGeom>
         </p:spPr>
       </p:pic>
+      <p:sp>
+        <p:nvSpPr>
+          <p:cNvPr id="3" name="TextBox 2">
+            <a:extLst>
+              <a:ext uri="{FF2B5EF4-FFF2-40B4-BE49-F238E27FC236}">
+                <a16:creationId xmlns:a16="http://schemas.microsoft.com/office/drawing/2014/main" id="{033FCF51-6402-B00C-1885-03E0837F5520}"/>
+              </a:ext>
+            </a:extLst>
+          </p:cNvPr>
+          <p:cNvSpPr txBox="1"/>
+          <p:nvPr/>
+        </p:nvSpPr>
+        <p:spPr>
+          <a:xfrm>
+            <a:off x="4233813" y="3039614"/>
+            <a:ext cx="3724373" cy="769441"/>
+          </a:xfrm>
+          <a:prstGeom prst="rect">
+            <a:avLst/>
+          </a:prstGeom>
+          <a:noFill/>
+        </p:spPr>
+        <p:txBody>
+          <a:bodyPr wrap="square">
+            <a:spAutoFit/>
+          </a:bodyPr>
+          <a:lstStyle/>
+          <a:p>
+            <a:pPr algn="ctr">
+              <a:buNone/>
+            </a:pPr>
+            <a:r>
+              <a:rPr lang="en-IN" sz="4400" b="1" dirty="0">
+                <a:solidFill>
+                  <a:srgbClr val="F8FAFC"/>
+                </a:solidFill>
+                <a:latin typeface="Inter"/>
+              </a:rPr>
+              <a:t>Sprint 2</a:t>
+            </a:r>
+          </a:p>
+        </p:txBody>
+      </p:sp>
+    </p:spTree>
+    <p:extLst>
+      <p:ext uri="{BB962C8B-B14F-4D97-AF65-F5344CB8AC3E}">
+        <p14:creationId xmlns:p14="http://schemas.microsoft.com/office/powerpoint/2010/main" val="382217140"/>
+      </p:ext>
+    </p:extLst>
+  </p:cSld>
+  <p:clrMapOvr>
+    <a:masterClrMapping/>
+  </p:clrMapOvr>
+</p:sld>
+</file>
+
+<file path=ppt/slides/slide12.xml><?xml version="1.0" encoding="utf-8"?>
+<p:sld xmlns:a="http://schemas.openxmlformats.org/drawingml/2006/main" xmlns:r="http://schemas.openxmlformats.org/officeDocument/2006/relationships" xmlns:p="http://schemas.openxmlformats.org/presentationml/2006/main">
+  <p:cSld>
+    <p:spTree>
+      <p:nvGrpSpPr>
+        <p:cNvPr id="1" name=""/>
+        <p:cNvGrpSpPr/>
+        <p:nvPr/>
+      </p:nvGrpSpPr>
+      <p:grpSpPr>
+        <a:xfrm>
+          <a:off x="0" y="0"/>
+          <a:ext cx="0" cy="0"/>
+          <a:chOff x="0" y="0"/>
+          <a:chExt cx="0" cy="0"/>
+        </a:xfrm>
+      </p:grpSpPr>
+      <p:pic>
+        <p:nvPicPr>
+          <p:cNvPr id="2" name="Picture 1" descr="image.png"/>
+          <p:cNvPicPr>
+            <a:picLocks noChangeAspect="1"/>
+          </p:cNvPicPr>
+          <p:nvPr/>
+        </p:nvPicPr>
+        <p:blipFill>
+          <a:blip r:embed="rId2"/>
+          <a:stretch>
+            <a:fillRect/>
+          </a:stretch>
+        </p:blipFill>
+        <p:spPr>
+          <a:xfrm>
+            <a:off x="0" y="0"/>
+            <a:ext cx="12192000" cy="6858000"/>
+          </a:xfrm>
+          <a:prstGeom prst="rect">
+            <a:avLst/>
+          </a:prstGeom>
+        </p:spPr>
+      </p:pic>
       <p:pic>
         <p:nvPicPr>
           <p:cNvPr id="3" name="Picture 2" descr="image.png"/>
@@ -4682,8 +4791,8 @@
         </p:blipFill>
         <p:spPr>
           <a:xfrm>
-            <a:off x="571500" y="1950839"/>
-            <a:ext cx="3492400" cy="3840212"/>
+            <a:off x="571500" y="2775495"/>
+            <a:ext cx="114300" cy="200025"/>
           </a:xfrm>
           <a:prstGeom prst="rect">
             <a:avLst/>
@@ -4699,15 +4808,15 @@
           <p:nvPr/>
         </p:nvPicPr>
         <p:blipFill>
-          <a:blip r:embed="rId4"/>
+          <a:blip r:embed="rId3"/>
           <a:stretch>
             <a:fillRect/>
           </a:stretch>
         </p:blipFill>
         <p:spPr>
           <a:xfrm>
-            <a:off x="4349650" y="1950839"/>
-            <a:ext cx="3492549" cy="3840212"/>
+            <a:off x="571500" y="3280197"/>
+            <a:ext cx="114300" cy="200025"/>
           </a:xfrm>
           <a:prstGeom prst="rect">
             <a:avLst/>
@@ -4723,15 +4832,15 @@
           <p:nvPr/>
         </p:nvPicPr>
         <p:blipFill>
-          <a:blip r:embed="rId5"/>
+          <a:blip r:embed="rId3"/>
           <a:stretch>
             <a:fillRect/>
           </a:stretch>
         </p:blipFill>
         <p:spPr>
           <a:xfrm>
-            <a:off x="8127950" y="1950839"/>
-            <a:ext cx="3492400" cy="3840212"/>
+            <a:off x="571500" y="3746117"/>
+            <a:ext cx="114300" cy="200025"/>
           </a:xfrm>
           <a:prstGeom prst="rect">
             <a:avLst/>
@@ -4747,99 +4856,69 @@
           <p:nvPr/>
         </p:nvPicPr>
         <p:blipFill>
-          <a:blip r:embed="rId6"/>
+          <a:blip r:embed="rId3"/>
           <a:stretch>
             <a:fillRect/>
           </a:stretch>
         </p:blipFill>
         <p:spPr>
           <a:xfrm>
-            <a:off x="1936700" y="2341364"/>
-            <a:ext cx="762000" cy="762000"/>
+            <a:off x="571500" y="4210907"/>
+            <a:ext cx="114300" cy="200025"/>
           </a:xfrm>
           <a:prstGeom prst="rect">
             <a:avLst/>
           </a:prstGeom>
         </p:spPr>
       </p:pic>
-      <p:sp>
-        <p:nvSpPr>
-          <p:cNvPr id="7" name="TextBox 6"/>
-          <p:cNvSpPr txBox="1"/>
-          <p:nvPr/>
-        </p:nvSpPr>
-        <p:spPr>
-          <a:xfrm>
-            <a:off x="794228" y="3293864"/>
-            <a:ext cx="3046943" cy="319980"/>
-          </a:xfrm>
-          <a:prstGeom prst="rect">
-            <a:avLst/>
-          </a:prstGeom>
-          <a:noFill/>
-        </p:spPr>
-        <p:txBody>
-          <a:bodyPr wrap="square" lIns="0" tIns="0" rIns="0" bIns="0" anchor="ctr">
-            <a:spAutoFit/>
-          </a:bodyPr>
-          <a:lstStyle/>
-          <a:p>
-            <a:pPr algn="ctr">
-              <a:lnSpc>
-                <a:spcPts val="2520"/>
-              </a:lnSpc>
-            </a:pPr>
-            <a:r>
-              <a:rPr sz="2100" b="0" i="0" u="none" dirty="0">
-                <a:solidFill>
-                  <a:srgbClr val="F8FAFC"/>
-                </a:solidFill>
-                <a:latin typeface="Inter SemiBold"/>
-              </a:rPr>
-              <a:t>Perseus Mistry</a:t>
-            </a:r>
-          </a:p>
-        </p:txBody>
-      </p:sp>
-      <p:sp>
-        <p:nvSpPr>
-          <p:cNvPr id="8" name="TextBox 7"/>
-          <p:cNvSpPr txBox="1"/>
-          <p:nvPr/>
-        </p:nvSpPr>
-        <p:spPr>
-          <a:xfrm>
-            <a:off x="866775" y="3661469"/>
-            <a:ext cx="2901850" cy="213270"/>
-          </a:xfrm>
-          <a:prstGeom prst="rect">
-            <a:avLst/>
-          </a:prstGeom>
-          <a:noFill/>
-        </p:spPr>
-        <p:txBody>
-          <a:bodyPr wrap="square" lIns="0" tIns="0" rIns="0" bIns="0" anchor="t">
-            <a:spAutoFit/>
-          </a:bodyPr>
-          <a:lstStyle/>
-          <a:p>
-            <a:pPr algn="ctr">
-              <a:lnSpc>
-                <a:spcPts val="1679"/>
-              </a:lnSpc>
-            </a:pPr>
-            <a:r>
-              <a:rPr sz="1050" b="0" i="0" u="none" dirty="0">
-                <a:solidFill>
-                  <a:srgbClr val="0EA5E9"/>
-                </a:solidFill>
-                <a:latin typeface="Inter"/>
-              </a:rPr>
-              <a:t>26MML1027</a:t>
-            </a:r>
-          </a:p>
-        </p:txBody>
-      </p:sp>
+      <p:pic>
+        <p:nvPicPr>
+          <p:cNvPr id="7" name="Picture 6" descr="image.png"/>
+          <p:cNvPicPr>
+            <a:picLocks noChangeAspect="1"/>
+          </p:cNvPicPr>
+          <p:nvPr/>
+        </p:nvPicPr>
+        <p:blipFill>
+          <a:blip r:embed="rId3"/>
+          <a:stretch>
+            <a:fillRect/>
+          </a:stretch>
+        </p:blipFill>
+        <p:spPr>
+          <a:xfrm>
+            <a:off x="571500" y="4675697"/>
+            <a:ext cx="114300" cy="200025"/>
+          </a:xfrm>
+          <a:prstGeom prst="rect">
+            <a:avLst/>
+          </a:prstGeom>
+        </p:spPr>
+      </p:pic>
+      <p:pic>
+        <p:nvPicPr>
+          <p:cNvPr id="8" name="Picture 7" descr="image.png"/>
+          <p:cNvPicPr>
+            <a:picLocks noChangeAspect="1"/>
+          </p:cNvPicPr>
+          <p:nvPr/>
+        </p:nvPicPr>
+        <p:blipFill>
+          <a:blip r:embed="rId3"/>
+          <a:stretch>
+            <a:fillRect/>
+          </a:stretch>
+        </p:blipFill>
+        <p:spPr>
+          <a:xfrm>
+            <a:off x="571500" y="5140488"/>
+            <a:ext cx="114300" cy="200025"/>
+          </a:xfrm>
+          <a:prstGeom prst="rect">
+            <a:avLst/>
+          </a:prstGeom>
+        </p:spPr>
+      </p:pic>
       <p:pic>
         <p:nvPicPr>
           <p:cNvPr id="9" name="Picture 8" descr="image.png"/>
@@ -4849,15 +4928,15 @@
           <p:nvPr/>
         </p:nvPicPr>
         <p:blipFill>
-          <a:blip r:embed="rId7"/>
+          <a:blip r:embed="rId3"/>
           <a:stretch>
             <a:fillRect/>
           </a:stretch>
         </p:blipFill>
         <p:spPr>
           <a:xfrm>
-            <a:off x="5714851" y="2341364"/>
-            <a:ext cx="762000" cy="762000"/>
+            <a:off x="571500" y="5551923"/>
+            <a:ext cx="114300" cy="200025"/>
           </a:xfrm>
           <a:prstGeom prst="rect">
             <a:avLst/>
@@ -4866,865 +4945,7 @@
       </p:pic>
       <p:sp>
         <p:nvSpPr>
-          <p:cNvPr id="10" name="TextBox 9"/>
-          <p:cNvSpPr txBox="1"/>
-          <p:nvPr/>
-        </p:nvSpPr>
-        <p:spPr>
-          <a:xfrm>
-            <a:off x="4572375" y="3293864"/>
-            <a:ext cx="3047099" cy="319980"/>
-          </a:xfrm>
-          <a:prstGeom prst="rect">
-            <a:avLst/>
-          </a:prstGeom>
-          <a:noFill/>
-        </p:spPr>
-        <p:txBody>
-          <a:bodyPr wrap="square" lIns="0" tIns="0" rIns="0" bIns="0" anchor="ctr">
-            <a:spAutoFit/>
-          </a:bodyPr>
-          <a:lstStyle/>
-          <a:p>
-            <a:pPr algn="ctr">
-              <a:lnSpc>
-                <a:spcPts val="2520"/>
-              </a:lnSpc>
-            </a:pPr>
-            <a:r>
-              <a:rPr sz="2100" b="0" i="0" u="none">
-                <a:solidFill>
-                  <a:srgbClr val="F8FAFC"/>
-                </a:solidFill>
-                <a:latin typeface="Inter SemiBold"/>
-              </a:rPr>
-              <a:t>Sai Skanda U</a:t>
-            </a:r>
-          </a:p>
-        </p:txBody>
-      </p:sp>
-      <p:sp>
-        <p:nvSpPr>
-          <p:cNvPr id="11" name="TextBox 10"/>
-          <p:cNvSpPr txBox="1"/>
-          <p:nvPr/>
-        </p:nvSpPr>
-        <p:spPr>
-          <a:xfrm>
-            <a:off x="4644925" y="3661469"/>
-            <a:ext cx="2901999" cy="213270"/>
-          </a:xfrm>
-          <a:prstGeom prst="rect">
-            <a:avLst/>
-          </a:prstGeom>
-          <a:noFill/>
-        </p:spPr>
-        <p:txBody>
-          <a:bodyPr wrap="square" lIns="0" tIns="0" rIns="0" bIns="0" anchor="t">
-            <a:spAutoFit/>
-          </a:bodyPr>
-          <a:lstStyle/>
-          <a:p>
-            <a:pPr algn="ctr">
-              <a:lnSpc>
-                <a:spcPts val="1679"/>
-              </a:lnSpc>
-            </a:pPr>
-            <a:r>
-              <a:rPr sz="1050" b="0" i="0" u="none">
-                <a:solidFill>
-                  <a:srgbClr val="10B981"/>
-                </a:solidFill>
-                <a:latin typeface="Inter"/>
-              </a:rPr>
-              <a:t>26MML1014</a:t>
-            </a:r>
-          </a:p>
-        </p:txBody>
-      </p:sp>
-      <p:pic>
-        <p:nvPicPr>
-          <p:cNvPr id="12" name="Picture 11" descr="image.png"/>
-          <p:cNvPicPr>
-            <a:picLocks noChangeAspect="1"/>
-          </p:cNvPicPr>
-          <p:nvPr/>
-        </p:nvPicPr>
-        <p:blipFill>
-          <a:blip r:embed="rId8"/>
-          <a:stretch>
-            <a:fillRect/>
-          </a:stretch>
-        </p:blipFill>
-        <p:spPr>
-          <a:xfrm>
-            <a:off x="9493150" y="2341364"/>
-            <a:ext cx="762000" cy="762000"/>
-          </a:xfrm>
-          <a:prstGeom prst="rect">
-            <a:avLst/>
-          </a:prstGeom>
-        </p:spPr>
-      </p:pic>
-      <p:sp>
-        <p:nvSpPr>
-          <p:cNvPr id="13" name="TextBox 12"/>
-          <p:cNvSpPr txBox="1"/>
-          <p:nvPr/>
-        </p:nvSpPr>
-        <p:spPr>
-          <a:xfrm>
-            <a:off x="8350679" y="3293864"/>
-            <a:ext cx="3046943" cy="319980"/>
-          </a:xfrm>
-          <a:prstGeom prst="rect">
-            <a:avLst/>
-          </a:prstGeom>
-          <a:noFill/>
-        </p:spPr>
-        <p:txBody>
-          <a:bodyPr wrap="square" lIns="0" tIns="0" rIns="0" bIns="0" anchor="ctr">
-            <a:spAutoFit/>
-          </a:bodyPr>
-          <a:lstStyle/>
-          <a:p>
-            <a:pPr algn="ctr">
-              <a:lnSpc>
-                <a:spcPts val="2520"/>
-              </a:lnSpc>
-            </a:pPr>
-            <a:r>
-              <a:rPr sz="2100" b="0" i="0" u="none">
-                <a:solidFill>
-                  <a:srgbClr val="F8FAFC"/>
-                </a:solidFill>
-                <a:latin typeface="Inter SemiBold"/>
-              </a:rPr>
-              <a:t>Jaikrishna</a:t>
-            </a:r>
-          </a:p>
-        </p:txBody>
-      </p:sp>
-      <p:sp>
-        <p:nvSpPr>
-          <p:cNvPr id="14" name="TextBox 13"/>
-          <p:cNvSpPr txBox="1"/>
-          <p:nvPr/>
-        </p:nvSpPr>
-        <p:spPr>
-          <a:xfrm>
-            <a:off x="8423225" y="3661469"/>
-            <a:ext cx="2901850" cy="213270"/>
-          </a:xfrm>
-          <a:prstGeom prst="rect">
-            <a:avLst/>
-          </a:prstGeom>
-          <a:noFill/>
-        </p:spPr>
-        <p:txBody>
-          <a:bodyPr wrap="square" lIns="0" tIns="0" rIns="0" bIns="0" anchor="t">
-            <a:spAutoFit/>
-          </a:bodyPr>
-          <a:lstStyle/>
-          <a:p>
-            <a:pPr algn="ctr">
-              <a:lnSpc>
-                <a:spcPts val="1679"/>
-              </a:lnSpc>
-            </a:pPr>
-            <a:r>
-              <a:rPr sz="1050" b="0" i="0" u="none">
-                <a:solidFill>
-                  <a:srgbClr val="0EA5E9"/>
-                </a:solidFill>
-                <a:latin typeface="Inter"/>
-              </a:rPr>
-              <a:t>26MML1003</a:t>
-            </a:r>
-          </a:p>
-        </p:txBody>
-      </p:sp>
-      <p:pic>
-        <p:nvPicPr>
-          <p:cNvPr id="15" name="Picture 14" descr="image.png"/>
-          <p:cNvPicPr>
-            <a:picLocks noChangeAspect="1"/>
-          </p:cNvPicPr>
-          <p:nvPr/>
-        </p:nvPicPr>
-        <p:blipFill>
-          <a:blip r:embed="rId9"/>
-          <a:stretch>
-            <a:fillRect/>
-          </a:stretch>
-        </p:blipFill>
-        <p:spPr>
-          <a:xfrm>
-            <a:off x="2165300" y="2550914"/>
-            <a:ext cx="304800" cy="342900"/>
-          </a:xfrm>
-          <a:prstGeom prst="rect">
-            <a:avLst/>
-          </a:prstGeom>
-        </p:spPr>
-      </p:pic>
-      <p:sp>
-        <p:nvSpPr>
-          <p:cNvPr id="16" name="TextBox 15"/>
-          <p:cNvSpPr txBox="1"/>
-          <p:nvPr/>
-        </p:nvSpPr>
-        <p:spPr>
-          <a:xfrm>
-            <a:off x="866775" y="4112865"/>
-            <a:ext cx="2901850" cy="274290"/>
-          </a:xfrm>
-          <a:prstGeom prst="rect">
-            <a:avLst/>
-          </a:prstGeom>
-          <a:noFill/>
-        </p:spPr>
-        <p:txBody>
-          <a:bodyPr wrap="square" lIns="161925" tIns="0" rIns="0" bIns="0" anchor="t">
-            <a:spAutoFit/>
-          </a:bodyPr>
-          <a:lstStyle/>
-          <a:p>
-            <a:pPr algn="l">
-              <a:lnSpc>
-                <a:spcPts val="2160"/>
-              </a:lnSpc>
-            </a:pPr>
-            <a:r>
-              <a:rPr sz="1350" b="0" i="0" u="none">
-                <a:solidFill>
-                  <a:srgbClr val="94A3B8"/>
-                </a:solidFill>
-                <a:latin typeface="Inter"/>
-              </a:rPr>
-              <a:t>Handling Documentation</a:t>
-            </a:r>
-          </a:p>
-        </p:txBody>
-      </p:sp>
-      <p:sp>
-        <p:nvSpPr>
-          <p:cNvPr id="17" name="TextBox 16"/>
-          <p:cNvSpPr txBox="1"/>
-          <p:nvPr/>
-        </p:nvSpPr>
-        <p:spPr>
-          <a:xfrm>
-            <a:off x="866775" y="4482405"/>
-            <a:ext cx="2901850" cy="274290"/>
-          </a:xfrm>
-          <a:prstGeom prst="rect">
-            <a:avLst/>
-          </a:prstGeom>
-          <a:noFill/>
-        </p:spPr>
-        <p:txBody>
-          <a:bodyPr wrap="square" lIns="161925" tIns="0" rIns="0" bIns="0" anchor="t">
-            <a:spAutoFit/>
-          </a:bodyPr>
-          <a:lstStyle/>
-          <a:p>
-            <a:pPr algn="l">
-              <a:lnSpc>
-                <a:spcPts val="2160"/>
-              </a:lnSpc>
-            </a:pPr>
-            <a:r>
-              <a:rPr sz="1350" b="0" i="0" u="none">
-                <a:solidFill>
-                  <a:srgbClr val="94A3B8"/>
-                </a:solidFill>
-                <a:latin typeface="Inter"/>
-              </a:rPr>
-              <a:t>GitHub Repository Mgmt</a:t>
-            </a:r>
-          </a:p>
-        </p:txBody>
-      </p:sp>
-      <p:sp>
-        <p:nvSpPr>
-          <p:cNvPr id="18" name="TextBox 17"/>
-          <p:cNvSpPr txBox="1"/>
-          <p:nvPr/>
-        </p:nvSpPr>
-        <p:spPr>
-          <a:xfrm>
-            <a:off x="866775" y="4851945"/>
-            <a:ext cx="2901850" cy="548580"/>
-          </a:xfrm>
-          <a:prstGeom prst="rect">
-            <a:avLst/>
-          </a:prstGeom>
-          <a:noFill/>
-        </p:spPr>
-        <p:txBody>
-          <a:bodyPr wrap="square" lIns="161925" tIns="0" rIns="0" bIns="0" anchor="t">
-            <a:spAutoFit/>
-          </a:bodyPr>
-          <a:lstStyle/>
-          <a:p>
-            <a:pPr algn="l">
-              <a:lnSpc>
-                <a:spcPts val="2160"/>
-              </a:lnSpc>
-            </a:pPr>
-            <a:r>
-              <a:rPr sz="1350" b="0" i="0" u="none">
-                <a:solidFill>
-                  <a:srgbClr val="94A3B8"/>
-                </a:solidFill>
-                <a:latin typeface="Inter"/>
-              </a:rPr>
-              <a:t>Pentaho Transformation Debugging/Supervising</a:t>
-            </a:r>
-          </a:p>
-        </p:txBody>
-      </p:sp>
-      <p:pic>
-        <p:nvPicPr>
-          <p:cNvPr id="19" name="Picture 18" descr="image.png"/>
-          <p:cNvPicPr>
-            <a:picLocks noChangeAspect="1"/>
-          </p:cNvPicPr>
-          <p:nvPr/>
-        </p:nvPicPr>
-        <p:blipFill>
-          <a:blip r:embed="rId10"/>
-          <a:stretch>
-            <a:fillRect/>
-          </a:stretch>
-        </p:blipFill>
-        <p:spPr>
-          <a:xfrm>
-            <a:off x="5881538" y="2550914"/>
-            <a:ext cx="428625" cy="342900"/>
-          </a:xfrm>
-          <a:prstGeom prst="rect">
-            <a:avLst/>
-          </a:prstGeom>
-        </p:spPr>
-      </p:pic>
-      <p:sp>
-        <p:nvSpPr>
-          <p:cNvPr id="20" name="TextBox 19"/>
-          <p:cNvSpPr txBox="1"/>
-          <p:nvPr/>
-        </p:nvSpPr>
-        <p:spPr>
-          <a:xfrm>
-            <a:off x="4644925" y="4112865"/>
-            <a:ext cx="2901999" cy="274290"/>
-          </a:xfrm>
-          <a:prstGeom prst="rect">
-            <a:avLst/>
-          </a:prstGeom>
-          <a:noFill/>
-        </p:spPr>
-        <p:txBody>
-          <a:bodyPr wrap="square" lIns="161925" tIns="0" rIns="0" bIns="0" anchor="t">
-            <a:spAutoFit/>
-          </a:bodyPr>
-          <a:lstStyle/>
-          <a:p>
-            <a:pPr algn="l">
-              <a:lnSpc>
-                <a:spcPts val="2160"/>
-              </a:lnSpc>
-            </a:pPr>
-            <a:r>
-              <a:rPr sz="1350" b="0" i="0" u="none">
-                <a:solidFill>
-                  <a:srgbClr val="94A3B8"/>
-                </a:solidFill>
-                <a:latin typeface="Inter"/>
-              </a:rPr>
-              <a:t>Finding Datasets</a:t>
-            </a:r>
-          </a:p>
-        </p:txBody>
-      </p:sp>
-      <p:sp>
-        <p:nvSpPr>
-          <p:cNvPr id="21" name="TextBox 20"/>
-          <p:cNvSpPr txBox="1"/>
-          <p:nvPr/>
-        </p:nvSpPr>
-        <p:spPr>
-          <a:xfrm>
-            <a:off x="4644925" y="4482405"/>
-            <a:ext cx="2901999" cy="274290"/>
-          </a:xfrm>
-          <a:prstGeom prst="rect">
-            <a:avLst/>
-          </a:prstGeom>
-          <a:noFill/>
-        </p:spPr>
-        <p:txBody>
-          <a:bodyPr wrap="square" lIns="161925" tIns="0" rIns="0" bIns="0" anchor="t">
-            <a:spAutoFit/>
-          </a:bodyPr>
-          <a:lstStyle/>
-          <a:p>
-            <a:pPr algn="l">
-              <a:lnSpc>
-                <a:spcPts val="2160"/>
-              </a:lnSpc>
-            </a:pPr>
-            <a:r>
-              <a:rPr sz="1350" b="0" i="0" u="none">
-                <a:solidFill>
-                  <a:srgbClr val="94A3B8"/>
-                </a:solidFill>
-                <a:latin typeface="Inter"/>
-              </a:rPr>
-              <a:t>Pentaho Transformations</a:t>
-            </a:r>
-          </a:p>
-        </p:txBody>
-      </p:sp>
-      <p:sp>
-        <p:nvSpPr>
-          <p:cNvPr id="22" name="TextBox 21"/>
-          <p:cNvSpPr txBox="1"/>
-          <p:nvPr/>
-        </p:nvSpPr>
-        <p:spPr>
-          <a:xfrm>
-            <a:off x="4644925" y="4851945"/>
-            <a:ext cx="2901999" cy="548580"/>
-          </a:xfrm>
-          <a:prstGeom prst="rect">
-            <a:avLst/>
-          </a:prstGeom>
-          <a:noFill/>
-        </p:spPr>
-        <p:txBody>
-          <a:bodyPr wrap="square" lIns="161925" tIns="0" rIns="0" bIns="0" anchor="t">
-            <a:spAutoFit/>
-          </a:bodyPr>
-          <a:lstStyle/>
-          <a:p>
-            <a:pPr algn="l">
-              <a:lnSpc>
-                <a:spcPts val="2160"/>
-              </a:lnSpc>
-            </a:pPr>
-            <a:r>
-              <a:rPr sz="1350" b="0" i="0" u="none">
-                <a:solidFill>
-                  <a:srgbClr val="94A3B8"/>
-                </a:solidFill>
-                <a:latin typeface="Inter"/>
-              </a:rPr>
-              <a:t>Mapping Data Sources (Documentation)</a:t>
-            </a:r>
-          </a:p>
-        </p:txBody>
-      </p:sp>
-      <p:pic>
-        <p:nvPicPr>
-          <p:cNvPr id="23" name="Picture 22" descr="image.png"/>
-          <p:cNvPicPr>
-            <a:picLocks noChangeAspect="1"/>
-          </p:cNvPicPr>
-          <p:nvPr/>
-        </p:nvPicPr>
-        <p:blipFill>
-          <a:blip r:embed="rId11"/>
-          <a:stretch>
-            <a:fillRect/>
-          </a:stretch>
-        </p:blipFill>
-        <p:spPr>
-          <a:xfrm>
-            <a:off x="9721750" y="2550914"/>
-            <a:ext cx="304800" cy="342900"/>
-          </a:xfrm>
-          <a:prstGeom prst="rect">
-            <a:avLst/>
-          </a:prstGeom>
-        </p:spPr>
-      </p:pic>
-      <p:sp>
-        <p:nvSpPr>
-          <p:cNvPr id="24" name="TextBox 23"/>
-          <p:cNvSpPr txBox="1"/>
-          <p:nvPr/>
-        </p:nvSpPr>
-        <p:spPr>
-          <a:xfrm>
-            <a:off x="8423225" y="4112865"/>
-            <a:ext cx="2901850" cy="274290"/>
-          </a:xfrm>
-          <a:prstGeom prst="rect">
-            <a:avLst/>
-          </a:prstGeom>
-          <a:noFill/>
-        </p:spPr>
-        <p:txBody>
-          <a:bodyPr wrap="square" lIns="161925" tIns="0" rIns="0" bIns="0" anchor="t">
-            <a:spAutoFit/>
-          </a:bodyPr>
-          <a:lstStyle/>
-          <a:p>
-            <a:pPr algn="l">
-              <a:lnSpc>
-                <a:spcPts val="2160"/>
-              </a:lnSpc>
-            </a:pPr>
-            <a:r>
-              <a:rPr sz="1350" b="0" i="0" u="none">
-                <a:solidFill>
-                  <a:srgbClr val="94A3B8"/>
-                </a:solidFill>
-                <a:latin typeface="Inter"/>
-              </a:rPr>
-              <a:t>Finding Datasets</a:t>
-            </a:r>
-          </a:p>
-        </p:txBody>
-      </p:sp>
-      <p:sp>
-        <p:nvSpPr>
-          <p:cNvPr id="25" name="TextBox 24"/>
-          <p:cNvSpPr txBox="1"/>
-          <p:nvPr/>
-        </p:nvSpPr>
-        <p:spPr>
-          <a:xfrm>
-            <a:off x="8423225" y="4482405"/>
-            <a:ext cx="2901850" cy="274290"/>
-          </a:xfrm>
-          <a:prstGeom prst="rect">
-            <a:avLst/>
-          </a:prstGeom>
-          <a:noFill/>
-        </p:spPr>
-        <p:txBody>
-          <a:bodyPr wrap="square" lIns="161925" tIns="0" rIns="0" bIns="0" anchor="t">
-            <a:spAutoFit/>
-          </a:bodyPr>
-          <a:lstStyle/>
-          <a:p>
-            <a:pPr algn="l">
-              <a:lnSpc>
-                <a:spcPts val="2160"/>
-              </a:lnSpc>
-            </a:pPr>
-            <a:r>
-              <a:rPr sz="1350" b="0" i="0" u="none">
-                <a:solidFill>
-                  <a:srgbClr val="94A3B8"/>
-                </a:solidFill>
-                <a:latin typeface="Inter"/>
-              </a:rPr>
-              <a:t>Pentaho Transformations</a:t>
-            </a:r>
-          </a:p>
-        </p:txBody>
-      </p:sp>
-      <p:sp>
-        <p:nvSpPr>
-          <p:cNvPr id="26" name="TextBox 25"/>
-          <p:cNvSpPr txBox="1"/>
-          <p:nvPr/>
-        </p:nvSpPr>
-        <p:spPr>
-          <a:xfrm>
-            <a:off x="8423225" y="4851945"/>
-            <a:ext cx="2901850" cy="274290"/>
-          </a:xfrm>
-          <a:prstGeom prst="rect">
-            <a:avLst/>
-          </a:prstGeom>
-          <a:noFill/>
-        </p:spPr>
-        <p:txBody>
-          <a:bodyPr wrap="square" lIns="161925" tIns="0" rIns="0" bIns="0" anchor="t">
-            <a:spAutoFit/>
-          </a:bodyPr>
-          <a:lstStyle/>
-          <a:p>
-            <a:pPr algn="l">
-              <a:lnSpc>
-                <a:spcPts val="2160"/>
-              </a:lnSpc>
-            </a:pPr>
-            <a:r>
-              <a:rPr sz="1350" b="0" i="0" u="none">
-                <a:solidFill>
-                  <a:srgbClr val="94A3B8"/>
-                </a:solidFill>
-                <a:latin typeface="Inter"/>
-              </a:rPr>
-              <a:t>Pentaho Jobs Integration</a:t>
-            </a:r>
-          </a:p>
-        </p:txBody>
-      </p:sp>
-      <p:pic>
-        <p:nvPicPr>
-          <p:cNvPr id="27" name="Picture 26" descr="image.png"/>
-          <p:cNvPicPr>
-            <a:picLocks noChangeAspect="1"/>
-          </p:cNvPicPr>
-          <p:nvPr/>
-        </p:nvPicPr>
-        <p:blipFill>
-          <a:blip r:embed="rId12"/>
-          <a:stretch>
-            <a:fillRect/>
-          </a:stretch>
-        </p:blipFill>
-        <p:spPr>
-          <a:xfrm>
-            <a:off x="866775" y="4155727"/>
-            <a:ext cx="85725" cy="180975"/>
-          </a:xfrm>
-          <a:prstGeom prst="rect">
-            <a:avLst/>
-          </a:prstGeom>
-        </p:spPr>
-      </p:pic>
-      <p:pic>
-        <p:nvPicPr>
-          <p:cNvPr id="28" name="Picture 27" descr="image.png"/>
-          <p:cNvPicPr>
-            <a:picLocks noChangeAspect="1"/>
-          </p:cNvPicPr>
-          <p:nvPr/>
-        </p:nvPicPr>
-        <p:blipFill>
-          <a:blip r:embed="rId12"/>
-          <a:stretch>
-            <a:fillRect/>
-          </a:stretch>
-        </p:blipFill>
-        <p:spPr>
-          <a:xfrm>
-            <a:off x="866775" y="4525267"/>
-            <a:ext cx="85725" cy="180975"/>
-          </a:xfrm>
-          <a:prstGeom prst="rect">
-            <a:avLst/>
-          </a:prstGeom>
-        </p:spPr>
-      </p:pic>
-      <p:pic>
-        <p:nvPicPr>
-          <p:cNvPr id="29" name="Picture 28" descr="image.png"/>
-          <p:cNvPicPr>
-            <a:picLocks noChangeAspect="1"/>
-          </p:cNvPicPr>
-          <p:nvPr/>
-        </p:nvPicPr>
-        <p:blipFill>
-          <a:blip r:embed="rId12"/>
-          <a:stretch>
-            <a:fillRect/>
-          </a:stretch>
-        </p:blipFill>
-        <p:spPr>
-          <a:xfrm>
-            <a:off x="866775" y="4894808"/>
-            <a:ext cx="85725" cy="180975"/>
-          </a:xfrm>
-          <a:prstGeom prst="rect">
-            <a:avLst/>
-          </a:prstGeom>
-        </p:spPr>
-      </p:pic>
-      <p:pic>
-        <p:nvPicPr>
-          <p:cNvPr id="30" name="Picture 29" descr="image.png"/>
-          <p:cNvPicPr>
-            <a:picLocks noChangeAspect="1"/>
-          </p:cNvPicPr>
-          <p:nvPr/>
-        </p:nvPicPr>
-        <p:blipFill>
-          <a:blip r:embed="rId13"/>
-          <a:stretch>
-            <a:fillRect/>
-          </a:stretch>
-        </p:blipFill>
-        <p:spPr>
-          <a:xfrm>
-            <a:off x="4644925" y="4155727"/>
-            <a:ext cx="85725" cy="180975"/>
-          </a:xfrm>
-          <a:prstGeom prst="rect">
-            <a:avLst/>
-          </a:prstGeom>
-        </p:spPr>
-      </p:pic>
-      <p:pic>
-        <p:nvPicPr>
-          <p:cNvPr id="31" name="Picture 30" descr="image.png"/>
-          <p:cNvPicPr>
-            <a:picLocks noChangeAspect="1"/>
-          </p:cNvPicPr>
-          <p:nvPr/>
-        </p:nvPicPr>
-        <p:blipFill>
-          <a:blip r:embed="rId13"/>
-          <a:stretch>
-            <a:fillRect/>
-          </a:stretch>
-        </p:blipFill>
-        <p:spPr>
-          <a:xfrm>
-            <a:off x="4644925" y="4525267"/>
-            <a:ext cx="85725" cy="180975"/>
-          </a:xfrm>
-          <a:prstGeom prst="rect">
-            <a:avLst/>
-          </a:prstGeom>
-        </p:spPr>
-      </p:pic>
-      <p:pic>
-        <p:nvPicPr>
-          <p:cNvPr id="32" name="Picture 31" descr="image.png"/>
-          <p:cNvPicPr>
-            <a:picLocks noChangeAspect="1"/>
-          </p:cNvPicPr>
-          <p:nvPr/>
-        </p:nvPicPr>
-        <p:blipFill>
-          <a:blip r:embed="rId13"/>
-          <a:stretch>
-            <a:fillRect/>
-          </a:stretch>
-        </p:blipFill>
-        <p:spPr>
-          <a:xfrm>
-            <a:off x="4644925" y="4894808"/>
-            <a:ext cx="85725" cy="180975"/>
-          </a:xfrm>
-          <a:prstGeom prst="rect">
-            <a:avLst/>
-          </a:prstGeom>
-        </p:spPr>
-      </p:pic>
-      <p:pic>
-        <p:nvPicPr>
-          <p:cNvPr id="33" name="Picture 32" descr="image.png"/>
-          <p:cNvPicPr>
-            <a:picLocks noChangeAspect="1"/>
-          </p:cNvPicPr>
-          <p:nvPr/>
-        </p:nvPicPr>
-        <p:blipFill>
-          <a:blip r:embed="rId12"/>
-          <a:stretch>
-            <a:fillRect/>
-          </a:stretch>
-        </p:blipFill>
-        <p:spPr>
-          <a:xfrm>
-            <a:off x="8423225" y="4155727"/>
-            <a:ext cx="85725" cy="180975"/>
-          </a:xfrm>
-          <a:prstGeom prst="rect">
-            <a:avLst/>
-          </a:prstGeom>
-        </p:spPr>
-      </p:pic>
-      <p:pic>
-        <p:nvPicPr>
-          <p:cNvPr id="34" name="Picture 33" descr="image.png"/>
-          <p:cNvPicPr>
-            <a:picLocks noChangeAspect="1"/>
-          </p:cNvPicPr>
-          <p:nvPr/>
-        </p:nvPicPr>
-        <p:blipFill>
-          <a:blip r:embed="rId12"/>
-          <a:stretch>
-            <a:fillRect/>
-          </a:stretch>
-        </p:blipFill>
-        <p:spPr>
-          <a:xfrm>
-            <a:off x="8423225" y="4525267"/>
-            <a:ext cx="85725" cy="180975"/>
-          </a:xfrm>
-          <a:prstGeom prst="rect">
-            <a:avLst/>
-          </a:prstGeom>
-        </p:spPr>
-      </p:pic>
-      <p:pic>
-        <p:nvPicPr>
-          <p:cNvPr id="35" name="Picture 34" descr="image.png"/>
-          <p:cNvPicPr>
-            <a:picLocks noChangeAspect="1"/>
-          </p:cNvPicPr>
-          <p:nvPr/>
-        </p:nvPicPr>
-        <p:blipFill>
-          <a:blip r:embed="rId12"/>
-          <a:stretch>
-            <a:fillRect/>
-          </a:stretch>
-        </p:blipFill>
-        <p:spPr>
-          <a:xfrm>
-            <a:off x="8423225" y="4894808"/>
-            <a:ext cx="85725" cy="180975"/>
-          </a:xfrm>
-          <a:prstGeom prst="rect">
-            <a:avLst/>
-          </a:prstGeom>
-        </p:spPr>
-      </p:pic>
-      <p:sp>
-        <p:nvSpPr>
-          <p:cNvPr id="36" name="TextBox 35"/>
-          <p:cNvSpPr txBox="1"/>
-          <p:nvPr/>
-        </p:nvSpPr>
-        <p:spPr>
-          <a:xfrm>
-            <a:off x="762000" y="476250"/>
-            <a:ext cx="11401425" cy="502890"/>
-          </a:xfrm>
-          <a:prstGeom prst="rect">
-            <a:avLst/>
-          </a:prstGeom>
-          <a:noFill/>
-        </p:spPr>
-        <p:txBody>
-          <a:bodyPr wrap="square" lIns="0" tIns="0" rIns="0" bIns="0" anchor="t">
-            <a:spAutoFit/>
-          </a:bodyPr>
-          <a:lstStyle/>
-          <a:p>
-            <a:pPr algn="l">
-              <a:lnSpc>
-                <a:spcPts val="3959"/>
-              </a:lnSpc>
-            </a:pPr>
-            <a:r>
-              <a:rPr sz="3300" b="1" i="0" u="none">
-                <a:solidFill>
-                  <a:srgbClr val="F8FAFC"/>
-                </a:solidFill>
-                <a:latin typeface="Inter"/>
-              </a:rPr>
-              <a:t>TEAM CONTRIBUTIONS</a:t>
-            </a:r>
-          </a:p>
-        </p:txBody>
-      </p:sp>
-      <p:sp>
-        <p:nvSpPr>
-          <p:cNvPr id="37" name="Rectangle 36"/>
+          <p:cNvPr id="10" name="Rectangle 9"/>
           <p:cNvSpPr/>
           <p:nvPr/>
         </p:nvSpPr>
@@ -5764,6 +4985,688 @@
           <a:p>
             <a:pPr algn="ctr"/>
             <a:endParaRPr/>
+          </a:p>
+        </p:txBody>
+      </p:sp>
+      <p:sp>
+        <p:nvSpPr>
+          <p:cNvPr id="11" name="Rounded Rectangle 10"/>
+          <p:cNvSpPr/>
+          <p:nvPr/>
+        </p:nvSpPr>
+        <p:spPr>
+          <a:xfrm>
+            <a:off x="6381750" y="2384970"/>
+            <a:ext cx="5238750" cy="2209502"/>
+          </a:xfrm>
+          <a:prstGeom prst="roundRect">
+            <a:avLst>
+              <a:gd name="adj" fmla="val 6897"/>
+            </a:avLst>
+          </a:prstGeom>
+          <a:solidFill>
+            <a:srgbClr val="161F30"/>
+          </a:solidFill>
+          <a:ln w="9525">
+            <a:solidFill>
+              <a:srgbClr val="334155"/>
+            </a:solidFill>
+          </a:ln>
+          <a:effectLst/>
+        </p:spPr>
+        <p:style>
+          <a:lnRef idx="1">
+            <a:schemeClr val="accent1"/>
+          </a:lnRef>
+          <a:fillRef idx="3">
+            <a:schemeClr val="accent1"/>
+          </a:fillRef>
+          <a:effectRef idx="2">
+            <a:schemeClr val="accent1"/>
+          </a:effectRef>
+          <a:fontRef idx="minor">
+            <a:schemeClr val="lt1"/>
+          </a:fontRef>
+        </p:style>
+        <p:txBody>
+          <a:bodyPr rtlCol="0" anchor="ctr"/>
+          <a:lstStyle/>
+          <a:p>
+            <a:pPr algn="ctr"/>
+            <a:endParaRPr/>
+          </a:p>
+        </p:txBody>
+      </p:sp>
+      <p:pic>
+        <p:nvPicPr>
+          <p:cNvPr id="12" name="Picture 11" descr="image.png"/>
+          <p:cNvPicPr>
+            <a:picLocks noChangeAspect="1"/>
+          </p:cNvPicPr>
+          <p:nvPr/>
+        </p:nvPicPr>
+        <p:blipFill>
+          <a:blip r:embed="rId4"/>
+          <a:stretch>
+            <a:fillRect/>
+          </a:stretch>
+        </p:blipFill>
+        <p:spPr>
+          <a:xfrm>
+            <a:off x="6677025" y="2699295"/>
+            <a:ext cx="133350" cy="171450"/>
+          </a:xfrm>
+          <a:prstGeom prst="rect">
+            <a:avLst/>
+          </a:prstGeom>
+        </p:spPr>
+      </p:pic>
+      <p:pic>
+        <p:nvPicPr>
+          <p:cNvPr id="13" name="Picture 12" descr="image.png"/>
+          <p:cNvPicPr>
+            <a:picLocks noChangeAspect="1"/>
+          </p:cNvPicPr>
+          <p:nvPr/>
+        </p:nvPicPr>
+        <p:blipFill>
+          <a:blip r:embed="rId5"/>
+          <a:stretch>
+            <a:fillRect/>
+          </a:stretch>
+        </p:blipFill>
+        <p:spPr>
+          <a:xfrm>
+            <a:off x="6677025" y="3529756"/>
+            <a:ext cx="133350" cy="171450"/>
+          </a:xfrm>
+          <a:prstGeom prst="rect">
+            <a:avLst/>
+          </a:prstGeom>
+        </p:spPr>
+      </p:pic>
+      <p:sp>
+        <p:nvSpPr>
+          <p:cNvPr id="14" name="TextBox 13"/>
+          <p:cNvSpPr txBox="1"/>
+          <p:nvPr/>
+        </p:nvSpPr>
+        <p:spPr>
+          <a:xfrm>
+            <a:off x="762000" y="476250"/>
+            <a:ext cx="11430000" cy="502890"/>
+          </a:xfrm>
+          <a:prstGeom prst="rect">
+            <a:avLst/>
+          </a:prstGeom>
+          <a:noFill/>
+        </p:spPr>
+        <p:txBody>
+          <a:bodyPr wrap="none" lIns="0" tIns="0" rIns="0" bIns="0" anchor="t">
+            <a:spAutoFit/>
+          </a:bodyPr>
+          <a:lstStyle/>
+          <a:p>
+            <a:pPr algn="l">
+              <a:lnSpc>
+                <a:spcPts val="3959"/>
+              </a:lnSpc>
+            </a:pPr>
+            <a:r>
+              <a:rPr sz="3300" b="1" i="0" u="none" dirty="0">
+                <a:solidFill>
+                  <a:srgbClr val="F8FAFC"/>
+                </a:solidFill>
+                <a:latin typeface="Inter"/>
+              </a:rPr>
+              <a:t>DATA PROFILING &amp; STRUCTURAL ANALYSIS</a:t>
+            </a:r>
+          </a:p>
+        </p:txBody>
+      </p:sp>
+      <p:sp>
+        <p:nvSpPr>
+          <p:cNvPr id="15" name="TextBox 14"/>
+          <p:cNvSpPr txBox="1"/>
+          <p:nvPr/>
+        </p:nvSpPr>
+        <p:spPr>
+          <a:xfrm>
+            <a:off x="571500" y="1360140"/>
+            <a:ext cx="11620500" cy="274290"/>
+          </a:xfrm>
+          <a:prstGeom prst="rect">
+            <a:avLst/>
+          </a:prstGeom>
+          <a:noFill/>
+        </p:spPr>
+        <p:txBody>
+          <a:bodyPr wrap="none" lIns="0" tIns="0" rIns="0" bIns="0" anchor="t">
+            <a:spAutoFit/>
+          </a:bodyPr>
+          <a:lstStyle/>
+          <a:p>
+            <a:pPr algn="l">
+              <a:lnSpc>
+                <a:spcPts val="2160"/>
+              </a:lnSpc>
+            </a:pPr>
+            <a:r>
+              <a:rPr sz="1800" b="1" i="0" u="none">
+                <a:solidFill>
+                  <a:srgbClr val="10B981"/>
+                </a:solidFill>
+                <a:latin typeface="Inter"/>
+              </a:rPr>
+              <a:t>Sprint 2 Objective</a:t>
+            </a:r>
+          </a:p>
+        </p:txBody>
+      </p:sp>
+      <p:sp>
+        <p:nvSpPr>
+          <p:cNvPr id="16" name="TextBox 15"/>
+          <p:cNvSpPr txBox="1"/>
+          <p:nvPr/>
+        </p:nvSpPr>
+        <p:spPr>
+          <a:xfrm>
+            <a:off x="571500" y="1824930"/>
+            <a:ext cx="11620500" cy="274290"/>
+          </a:xfrm>
+          <a:prstGeom prst="rect">
+            <a:avLst/>
+          </a:prstGeom>
+          <a:noFill/>
+        </p:spPr>
+        <p:txBody>
+          <a:bodyPr wrap="none" lIns="0" tIns="0" rIns="0" bIns="0" anchor="t">
+            <a:spAutoFit/>
+          </a:bodyPr>
+          <a:lstStyle/>
+          <a:p>
+            <a:pPr algn="l">
+              <a:lnSpc>
+                <a:spcPts val="2160"/>
+              </a:lnSpc>
+            </a:pPr>
+            <a:r>
+              <a:rPr sz="1350" b="0" i="0" u="none">
+                <a:solidFill>
+                  <a:srgbClr val="94A3B8"/>
+                </a:solidFill>
+                <a:latin typeface="Inter"/>
+              </a:rPr>
+              <a:t>Understand the structure and quality of source datasets before cleaning and standardization.</a:t>
+            </a:r>
+          </a:p>
+        </p:txBody>
+      </p:sp>
+      <p:sp>
+        <p:nvSpPr>
+          <p:cNvPr id="17" name="TextBox 16"/>
+          <p:cNvSpPr txBox="1"/>
+          <p:nvPr/>
+        </p:nvSpPr>
+        <p:spPr>
+          <a:xfrm>
+            <a:off x="571500" y="2384970"/>
+            <a:ext cx="6875859" cy="228600"/>
+          </a:xfrm>
+          <a:prstGeom prst="rect">
+            <a:avLst/>
+          </a:prstGeom>
+          <a:noFill/>
+        </p:spPr>
+        <p:txBody>
+          <a:bodyPr wrap="none" lIns="0" tIns="0" rIns="0" bIns="0" anchor="t">
+            <a:spAutoFit/>
+          </a:bodyPr>
+          <a:lstStyle/>
+          <a:p>
+            <a:pPr algn="l">
+              <a:lnSpc>
+                <a:spcPts val="1800"/>
+              </a:lnSpc>
+            </a:pPr>
+            <a:r>
+              <a:rPr sz="1500" b="1" i="0" u="none">
+                <a:solidFill>
+                  <a:srgbClr val="0EA5E9"/>
+                </a:solidFill>
+                <a:latin typeface="Inter"/>
+              </a:rPr>
+              <a:t>Implementation</a:t>
+            </a:r>
+          </a:p>
+        </p:txBody>
+      </p:sp>
+      <p:sp>
+        <p:nvSpPr>
+          <p:cNvPr id="18" name="TextBox 17"/>
+          <p:cNvSpPr txBox="1"/>
+          <p:nvPr/>
+        </p:nvSpPr>
+        <p:spPr>
+          <a:xfrm>
+            <a:off x="6677025" y="2680245"/>
+            <a:ext cx="5514975" cy="205680"/>
+          </a:xfrm>
+          <a:prstGeom prst="rect">
+            <a:avLst/>
+          </a:prstGeom>
+          <a:noFill/>
+        </p:spPr>
+        <p:txBody>
+          <a:bodyPr wrap="none" lIns="209550" tIns="0" rIns="0" bIns="0" anchor="t">
+            <a:spAutoFit/>
+          </a:bodyPr>
+          <a:lstStyle/>
+          <a:p>
+            <a:pPr algn="l">
+              <a:lnSpc>
+                <a:spcPts val="1620"/>
+              </a:lnSpc>
+            </a:pPr>
+            <a:r>
+              <a:rPr sz="1350" b="1" i="0" u="none">
+                <a:solidFill>
+                  <a:srgbClr val="10B981"/>
+                </a:solidFill>
+                <a:latin typeface="Inter"/>
+              </a:rPr>
+              <a:t>Expected Output</a:t>
+            </a:r>
+          </a:p>
+        </p:txBody>
+      </p:sp>
+      <p:sp>
+        <p:nvSpPr>
+          <p:cNvPr id="19" name="TextBox 18"/>
+          <p:cNvSpPr txBox="1"/>
+          <p:nvPr/>
+        </p:nvSpPr>
+        <p:spPr>
+          <a:xfrm>
+            <a:off x="6677025" y="3028801"/>
+            <a:ext cx="5514975" cy="243780"/>
+          </a:xfrm>
+          <a:prstGeom prst="rect">
+            <a:avLst/>
+          </a:prstGeom>
+          <a:noFill/>
+        </p:spPr>
+        <p:txBody>
+          <a:bodyPr wrap="none" lIns="0" tIns="0" rIns="0" bIns="0" anchor="t">
+            <a:spAutoFit/>
+          </a:bodyPr>
+          <a:lstStyle/>
+          <a:p>
+            <a:pPr algn="l">
+              <a:lnSpc>
+                <a:spcPts val="1920"/>
+              </a:lnSpc>
+            </a:pPr>
+            <a:r>
+              <a:rPr sz="1200" b="0" i="0" u="none">
+                <a:solidFill>
+                  <a:srgbClr val="F8FAFC"/>
+                </a:solidFill>
+                <a:latin typeface="monospace"/>
+              </a:rPr>
+              <a:t>Data_Profiling_Report.xlsx</a:t>
+            </a:r>
+          </a:p>
+        </p:txBody>
+      </p:sp>
+      <p:sp>
+        <p:nvSpPr>
+          <p:cNvPr id="20" name="TextBox 19"/>
+          <p:cNvSpPr txBox="1"/>
+          <p:nvPr/>
+        </p:nvSpPr>
+        <p:spPr>
+          <a:xfrm>
+            <a:off x="6677025" y="3510706"/>
+            <a:ext cx="5514975" cy="205680"/>
+          </a:xfrm>
+          <a:prstGeom prst="rect">
+            <a:avLst/>
+          </a:prstGeom>
+          <a:noFill/>
+        </p:spPr>
+        <p:txBody>
+          <a:bodyPr wrap="none" lIns="209550" tIns="0" rIns="0" bIns="0" anchor="t">
+            <a:spAutoFit/>
+          </a:bodyPr>
+          <a:lstStyle/>
+          <a:p>
+            <a:pPr algn="l">
+              <a:lnSpc>
+                <a:spcPts val="1620"/>
+              </a:lnSpc>
+            </a:pPr>
+            <a:r>
+              <a:rPr sz="1350" b="1" i="0" u="none">
+                <a:solidFill>
+                  <a:srgbClr val="10B981"/>
+                </a:solidFill>
+                <a:latin typeface="Inter"/>
+              </a:rPr>
+              <a:t>Business Value</a:t>
+            </a:r>
+          </a:p>
+        </p:txBody>
+      </p:sp>
+      <p:sp>
+        <p:nvSpPr>
+          <p:cNvPr id="21" name="TextBox 20"/>
+          <p:cNvSpPr txBox="1"/>
+          <p:nvPr/>
+        </p:nvSpPr>
+        <p:spPr>
+          <a:xfrm>
+            <a:off x="6677025" y="3811637"/>
+            <a:ext cx="4743450" cy="487560"/>
+          </a:xfrm>
+          <a:prstGeom prst="rect">
+            <a:avLst/>
+          </a:prstGeom>
+          <a:noFill/>
+        </p:spPr>
+        <p:txBody>
+          <a:bodyPr wrap="square" lIns="0" tIns="0" rIns="0" bIns="0" anchor="t">
+            <a:spAutoFit/>
+          </a:bodyPr>
+          <a:lstStyle/>
+          <a:p>
+            <a:pPr algn="l">
+              <a:lnSpc>
+                <a:spcPts val="1920"/>
+              </a:lnSpc>
+            </a:pPr>
+            <a:r>
+              <a:rPr sz="1200" b="0" i="0" u="none">
+                <a:solidFill>
+                  <a:srgbClr val="94A3B8"/>
+                </a:solidFill>
+                <a:latin typeface="Inter"/>
+              </a:rPr>
+              <a:t>Establishes a baseline for identifying incomplete, inconsistent and potentially invalid data before downstream processing.</a:t>
+            </a:r>
+          </a:p>
+        </p:txBody>
+      </p:sp>
+      <p:sp>
+        <p:nvSpPr>
+          <p:cNvPr id="22" name="TextBox 21"/>
+          <p:cNvSpPr txBox="1"/>
+          <p:nvPr/>
+        </p:nvSpPr>
+        <p:spPr>
+          <a:xfrm>
+            <a:off x="904875" y="2756445"/>
+            <a:ext cx="6215062" cy="274290"/>
+          </a:xfrm>
+          <a:prstGeom prst="rect">
+            <a:avLst/>
+          </a:prstGeom>
+          <a:noFill/>
+        </p:spPr>
+        <p:txBody>
+          <a:bodyPr wrap="none" lIns="0" tIns="0" rIns="0" bIns="0" anchor="t">
+            <a:spAutoFit/>
+          </a:bodyPr>
+          <a:lstStyle/>
+          <a:p>
+            <a:pPr algn="l">
+              <a:lnSpc>
+                <a:spcPts val="2160"/>
+              </a:lnSpc>
+            </a:pPr>
+            <a:r>
+              <a:rPr sz="1350" b="0" i="0" u="none">
+                <a:solidFill>
+                  <a:srgbClr val="94A3B8"/>
+                </a:solidFill>
+                <a:latin typeface="Inter"/>
+              </a:rPr>
+              <a:t>Load CSV, Excel and JSON datasets using Pandas.</a:t>
+            </a:r>
+          </a:p>
+        </p:txBody>
+      </p:sp>
+      <p:sp>
+        <p:nvSpPr>
+          <p:cNvPr id="23" name="TextBox 22"/>
+          <p:cNvSpPr txBox="1"/>
+          <p:nvPr/>
+        </p:nvSpPr>
+        <p:spPr>
+          <a:xfrm>
+            <a:off x="904875" y="3261147"/>
+            <a:ext cx="5000625" cy="548580"/>
+          </a:xfrm>
+          <a:prstGeom prst="rect">
+            <a:avLst/>
+          </a:prstGeom>
+          <a:noFill/>
+        </p:spPr>
+        <p:txBody>
+          <a:bodyPr wrap="square" lIns="0" tIns="0" rIns="0" bIns="0" anchor="t">
+            <a:spAutoFit/>
+          </a:bodyPr>
+          <a:lstStyle/>
+          <a:p>
+            <a:pPr algn="l">
+              <a:lnSpc>
+                <a:spcPts val="2160"/>
+              </a:lnSpc>
+            </a:pPr>
+            <a:r>
+              <a:rPr sz="1350" b="0" i="0" u="none">
+                <a:solidFill>
+                  <a:srgbClr val="94A3B8"/>
+                </a:solidFill>
+                <a:latin typeface="Inter"/>
+              </a:rPr>
+              <a:t>Identify the number of records and columns in each dataset.</a:t>
+            </a:r>
+          </a:p>
+        </p:txBody>
+      </p:sp>
+      <p:sp>
+        <p:nvSpPr>
+          <p:cNvPr id="24" name="TextBox 23"/>
+          <p:cNvSpPr txBox="1"/>
+          <p:nvPr/>
+        </p:nvSpPr>
+        <p:spPr>
+          <a:xfrm>
+            <a:off x="904875" y="3727067"/>
+            <a:ext cx="6215062" cy="274290"/>
+          </a:xfrm>
+          <a:prstGeom prst="rect">
+            <a:avLst/>
+          </a:prstGeom>
+          <a:noFill/>
+        </p:spPr>
+        <p:txBody>
+          <a:bodyPr wrap="none" lIns="0" tIns="0" rIns="0" bIns="0" anchor="t">
+            <a:spAutoFit/>
+          </a:bodyPr>
+          <a:lstStyle/>
+          <a:p>
+            <a:pPr algn="l">
+              <a:lnSpc>
+                <a:spcPts val="2160"/>
+              </a:lnSpc>
+            </a:pPr>
+            <a:r>
+              <a:rPr sz="1350" b="0" i="0" u="none">
+                <a:solidFill>
+                  <a:srgbClr val="94A3B8"/>
+                </a:solidFill>
+                <a:latin typeface="Inter"/>
+              </a:rPr>
+              <a:t>Inspect column data types and sample values.</a:t>
+            </a:r>
+          </a:p>
+        </p:txBody>
+      </p:sp>
+      <p:sp>
+        <p:nvSpPr>
+          <p:cNvPr id="25" name="TextBox 24"/>
+          <p:cNvSpPr txBox="1"/>
+          <p:nvPr/>
+        </p:nvSpPr>
+        <p:spPr>
+          <a:xfrm>
+            <a:off x="904875" y="4191857"/>
+            <a:ext cx="6215062" cy="274290"/>
+          </a:xfrm>
+          <a:prstGeom prst="rect">
+            <a:avLst/>
+          </a:prstGeom>
+          <a:noFill/>
+        </p:spPr>
+        <p:txBody>
+          <a:bodyPr wrap="none" lIns="0" tIns="0" rIns="0" bIns="0" anchor="t">
+            <a:spAutoFit/>
+          </a:bodyPr>
+          <a:lstStyle/>
+          <a:p>
+            <a:pPr algn="l">
+              <a:lnSpc>
+                <a:spcPts val="2160"/>
+              </a:lnSpc>
+            </a:pPr>
+            <a:r>
+              <a:rPr sz="1350" b="0" i="0" u="none" dirty="0">
+                <a:solidFill>
+                  <a:srgbClr val="94A3B8"/>
+                </a:solidFill>
+                <a:latin typeface="Inter"/>
+              </a:rPr>
+              <a:t>Calculate missing-value counts and percentages.</a:t>
+            </a:r>
+          </a:p>
+        </p:txBody>
+      </p:sp>
+      <p:sp>
+        <p:nvSpPr>
+          <p:cNvPr id="26" name="TextBox 25"/>
+          <p:cNvSpPr txBox="1"/>
+          <p:nvPr/>
+        </p:nvSpPr>
+        <p:spPr>
+          <a:xfrm>
+            <a:off x="904875" y="4656647"/>
+            <a:ext cx="6215062" cy="274290"/>
+          </a:xfrm>
+          <a:prstGeom prst="rect">
+            <a:avLst/>
+          </a:prstGeom>
+          <a:noFill/>
+        </p:spPr>
+        <p:txBody>
+          <a:bodyPr wrap="none" lIns="0" tIns="0" rIns="0" bIns="0" anchor="t">
+            <a:spAutoFit/>
+          </a:bodyPr>
+          <a:lstStyle/>
+          <a:p>
+            <a:pPr algn="l">
+              <a:lnSpc>
+                <a:spcPts val="2160"/>
+              </a:lnSpc>
+            </a:pPr>
+            <a:r>
+              <a:rPr sz="1350" b="0" i="0" u="none" dirty="0">
+                <a:solidFill>
+                  <a:srgbClr val="94A3B8"/>
+                </a:solidFill>
+                <a:latin typeface="Inter"/>
+              </a:rPr>
+              <a:t>Identify duplicate values and unique-value counts.</a:t>
+            </a:r>
+          </a:p>
+        </p:txBody>
+      </p:sp>
+      <p:sp>
+        <p:nvSpPr>
+          <p:cNvPr id="27" name="TextBox 26"/>
+          <p:cNvSpPr txBox="1"/>
+          <p:nvPr/>
+        </p:nvSpPr>
+        <p:spPr>
+          <a:xfrm>
+            <a:off x="904875" y="5121438"/>
+            <a:ext cx="5000625" cy="548580"/>
+          </a:xfrm>
+          <a:prstGeom prst="rect">
+            <a:avLst/>
+          </a:prstGeom>
+          <a:noFill/>
+        </p:spPr>
+        <p:txBody>
+          <a:bodyPr wrap="square" lIns="0" tIns="0" rIns="0" bIns="0" anchor="t">
+            <a:spAutoFit/>
+          </a:bodyPr>
+          <a:lstStyle/>
+          <a:p>
+            <a:pPr algn="l">
+              <a:lnSpc>
+                <a:spcPts val="2160"/>
+              </a:lnSpc>
+            </a:pPr>
+            <a:r>
+              <a:rPr sz="1350" b="0" i="0" u="none" dirty="0">
+                <a:solidFill>
+                  <a:srgbClr val="94A3B8"/>
+                </a:solidFill>
+                <a:latin typeface="Inter"/>
+              </a:rPr>
+              <a:t>Calculate minimum, maximum and mean for numeric columns.</a:t>
+            </a:r>
+          </a:p>
+        </p:txBody>
+      </p:sp>
+      <p:sp>
+        <p:nvSpPr>
+          <p:cNvPr id="28" name="TextBox 27"/>
+          <p:cNvSpPr txBox="1"/>
+          <p:nvPr/>
+        </p:nvSpPr>
+        <p:spPr>
+          <a:xfrm>
+            <a:off x="904875" y="5532873"/>
+            <a:ext cx="6215062" cy="274290"/>
+          </a:xfrm>
+          <a:prstGeom prst="rect">
+            <a:avLst/>
+          </a:prstGeom>
+          <a:noFill/>
+        </p:spPr>
+        <p:txBody>
+          <a:bodyPr wrap="none" lIns="0" tIns="0" rIns="0" bIns="0" anchor="t">
+            <a:spAutoFit/>
+          </a:bodyPr>
+          <a:lstStyle/>
+          <a:p>
+            <a:pPr algn="l">
+              <a:lnSpc>
+                <a:spcPts val="2160"/>
+              </a:lnSpc>
+            </a:pPr>
+            <a:r>
+              <a:rPr sz="1350" b="0" i="0" u="none">
+                <a:solidFill>
+                  <a:srgbClr val="94A3B8"/>
+                </a:solidFill>
+                <a:latin typeface="Inter"/>
+              </a:rPr>
+              <a:t>Prepare a structured profiling report in Excel format.</a:t>
+            </a:r>
           </a:p>
         </p:txBody>
       </p:sp>
@@ -5775,7 +5678,5386 @@
 </p:sld>
 </file>
 
-<file path=ppt/slides/slide12.xml><?xml version="1.0" encoding="utf-8"?>
+<file path=ppt/slides/slide13.xml><?xml version="1.0" encoding="utf-8"?>
+<p:sld xmlns:a="http://schemas.openxmlformats.org/drawingml/2006/main" xmlns:r="http://schemas.openxmlformats.org/officeDocument/2006/relationships" xmlns:p="http://schemas.openxmlformats.org/presentationml/2006/main">
+  <p:cSld>
+    <p:spTree>
+      <p:nvGrpSpPr>
+        <p:cNvPr id="1" name=""/>
+        <p:cNvGrpSpPr/>
+        <p:nvPr/>
+      </p:nvGrpSpPr>
+      <p:grpSpPr>
+        <a:xfrm>
+          <a:off x="0" y="0"/>
+          <a:ext cx="0" cy="0"/>
+          <a:chOff x="0" y="0"/>
+          <a:chExt cx="0" cy="0"/>
+        </a:xfrm>
+      </p:grpSpPr>
+      <p:pic>
+        <p:nvPicPr>
+          <p:cNvPr id="2" name="Picture 1" descr="image.png"/>
+          <p:cNvPicPr>
+            <a:picLocks noChangeAspect="1"/>
+          </p:cNvPicPr>
+          <p:nvPr/>
+        </p:nvPicPr>
+        <p:blipFill>
+          <a:blip r:embed="rId2"/>
+          <a:stretch>
+            <a:fillRect/>
+          </a:stretch>
+        </p:blipFill>
+        <p:spPr>
+          <a:xfrm>
+            <a:off x="0" y="0"/>
+            <a:ext cx="12192000" cy="6858000"/>
+          </a:xfrm>
+          <a:prstGeom prst="rect">
+            <a:avLst/>
+          </a:prstGeom>
+        </p:spPr>
+      </p:pic>
+      <p:pic>
+        <p:nvPicPr>
+          <p:cNvPr id="3" name="Picture 2" descr="image.png"/>
+          <p:cNvPicPr>
+            <a:picLocks noChangeAspect="1"/>
+          </p:cNvPicPr>
+          <p:nvPr/>
+        </p:nvPicPr>
+        <p:blipFill>
+          <a:blip r:embed="rId3"/>
+          <a:stretch>
+            <a:fillRect/>
+          </a:stretch>
+        </p:blipFill>
+        <p:spPr>
+          <a:xfrm>
+            <a:off x="962025" y="2943000"/>
+            <a:ext cx="190500" cy="200025"/>
+          </a:xfrm>
+          <a:prstGeom prst="rect">
+            <a:avLst/>
+          </a:prstGeom>
+        </p:spPr>
+      </p:pic>
+      <p:pic>
+        <p:nvPicPr>
+          <p:cNvPr id="4" name="Picture 3" descr="image.png"/>
+          <p:cNvPicPr>
+            <a:picLocks noChangeAspect="1"/>
+          </p:cNvPicPr>
+          <p:nvPr/>
+        </p:nvPicPr>
+        <p:blipFill>
+          <a:blip r:embed="rId3"/>
+          <a:stretch>
+            <a:fillRect/>
+          </a:stretch>
+        </p:blipFill>
+        <p:spPr>
+          <a:xfrm>
+            <a:off x="962025" y="3407790"/>
+            <a:ext cx="190500" cy="200025"/>
+          </a:xfrm>
+          <a:prstGeom prst="rect">
+            <a:avLst/>
+          </a:prstGeom>
+        </p:spPr>
+      </p:pic>
+      <p:pic>
+        <p:nvPicPr>
+          <p:cNvPr id="5" name="Picture 4" descr="image.png"/>
+          <p:cNvPicPr>
+            <a:picLocks noChangeAspect="1"/>
+          </p:cNvPicPr>
+          <p:nvPr/>
+        </p:nvPicPr>
+        <p:blipFill>
+          <a:blip r:embed="rId3"/>
+          <a:stretch>
+            <a:fillRect/>
+          </a:stretch>
+        </p:blipFill>
+        <p:spPr>
+          <a:xfrm>
+            <a:off x="962025" y="3872580"/>
+            <a:ext cx="190500" cy="200025"/>
+          </a:xfrm>
+          <a:prstGeom prst="rect">
+            <a:avLst/>
+          </a:prstGeom>
+        </p:spPr>
+      </p:pic>
+      <p:pic>
+        <p:nvPicPr>
+          <p:cNvPr id="6" name="Picture 5" descr="image.png"/>
+          <p:cNvPicPr>
+            <a:picLocks noChangeAspect="1"/>
+          </p:cNvPicPr>
+          <p:nvPr/>
+        </p:nvPicPr>
+        <p:blipFill>
+          <a:blip r:embed="rId3"/>
+          <a:stretch>
+            <a:fillRect/>
+          </a:stretch>
+        </p:blipFill>
+        <p:spPr>
+          <a:xfrm>
+            <a:off x="6772275" y="2943000"/>
+            <a:ext cx="190500" cy="200025"/>
+          </a:xfrm>
+          <a:prstGeom prst="rect">
+            <a:avLst/>
+          </a:prstGeom>
+        </p:spPr>
+      </p:pic>
+      <p:pic>
+        <p:nvPicPr>
+          <p:cNvPr id="7" name="Picture 6" descr="image.png"/>
+          <p:cNvPicPr>
+            <a:picLocks noChangeAspect="1"/>
+          </p:cNvPicPr>
+          <p:nvPr/>
+        </p:nvPicPr>
+        <p:blipFill>
+          <a:blip r:embed="rId3"/>
+          <a:stretch>
+            <a:fillRect/>
+          </a:stretch>
+        </p:blipFill>
+        <p:spPr>
+          <a:xfrm>
+            <a:off x="6772275" y="3682080"/>
+            <a:ext cx="190500" cy="200025"/>
+          </a:xfrm>
+          <a:prstGeom prst="rect">
+            <a:avLst/>
+          </a:prstGeom>
+        </p:spPr>
+      </p:pic>
+      <p:pic>
+        <p:nvPicPr>
+          <p:cNvPr id="8" name="Picture 7" descr="image.png"/>
+          <p:cNvPicPr>
+            <a:picLocks noChangeAspect="1"/>
+          </p:cNvPicPr>
+          <p:nvPr/>
+        </p:nvPicPr>
+        <p:blipFill>
+          <a:blip r:embed="rId3"/>
+          <a:stretch>
+            <a:fillRect/>
+          </a:stretch>
+        </p:blipFill>
+        <p:spPr>
+          <a:xfrm>
+            <a:off x="6772275" y="4695451"/>
+            <a:ext cx="190500" cy="200025"/>
+          </a:xfrm>
+          <a:prstGeom prst="rect">
+            <a:avLst/>
+          </a:prstGeom>
+        </p:spPr>
+      </p:pic>
+      <p:sp>
+        <p:nvSpPr>
+          <p:cNvPr id="9" name="Rectangle 8"/>
+          <p:cNvSpPr/>
+          <p:nvPr/>
+        </p:nvSpPr>
+        <p:spPr>
+          <a:xfrm>
+            <a:off x="571500" y="476250"/>
+            <a:ext cx="57150" cy="502890"/>
+          </a:xfrm>
+          <a:prstGeom prst="rect">
+            <a:avLst/>
+          </a:prstGeom>
+          <a:solidFill>
+            <a:srgbClr val="0EA5E9"/>
+          </a:solidFill>
+          <a:ln>
+            <a:noFill/>
+          </a:ln>
+          <a:effectLst/>
+        </p:spPr>
+        <p:style>
+          <a:lnRef idx="1">
+            <a:schemeClr val="accent1"/>
+          </a:lnRef>
+          <a:fillRef idx="3">
+            <a:schemeClr val="accent1"/>
+          </a:fillRef>
+          <a:effectRef idx="2">
+            <a:schemeClr val="accent1"/>
+          </a:effectRef>
+          <a:fontRef idx="minor">
+            <a:schemeClr val="lt1"/>
+          </a:fontRef>
+        </p:style>
+        <p:txBody>
+          <a:bodyPr rtlCol="0" anchor="ctr"/>
+          <a:lstStyle/>
+          <a:p>
+            <a:pPr algn="ctr"/>
+            <a:endParaRPr/>
+          </a:p>
+        </p:txBody>
+      </p:sp>
+      <p:sp>
+        <p:nvSpPr>
+          <p:cNvPr id="10" name="Rounded Rectangle 9"/>
+          <p:cNvSpPr/>
+          <p:nvPr/>
+        </p:nvSpPr>
+        <p:spPr>
+          <a:xfrm>
+            <a:off x="571500" y="5648401"/>
+            <a:ext cx="11049000" cy="1024830"/>
+          </a:xfrm>
+          <a:prstGeom prst="roundRect">
+            <a:avLst>
+              <a:gd name="adj" fmla="val 3717"/>
+            </a:avLst>
+          </a:prstGeom>
+          <a:solidFill>
+            <a:srgbClr val="0C222A"/>
+          </a:solidFill>
+          <a:ln>
+            <a:noFill/>
+          </a:ln>
+          <a:effectLst/>
+        </p:spPr>
+        <p:style>
+          <a:lnRef idx="1">
+            <a:schemeClr val="accent1"/>
+          </a:lnRef>
+          <a:fillRef idx="3">
+            <a:schemeClr val="accent1"/>
+          </a:fillRef>
+          <a:effectRef idx="2">
+            <a:schemeClr val="accent1"/>
+          </a:effectRef>
+          <a:fontRef idx="minor">
+            <a:schemeClr val="lt1"/>
+          </a:fontRef>
+        </p:style>
+        <p:txBody>
+          <a:bodyPr rtlCol="0" anchor="ctr"/>
+          <a:lstStyle/>
+          <a:p>
+            <a:pPr algn="ctr"/>
+            <a:endParaRPr/>
+          </a:p>
+        </p:txBody>
+      </p:sp>
+      <p:sp>
+        <p:nvSpPr>
+          <p:cNvPr id="11" name="Rounded Rectangle 10"/>
+          <p:cNvSpPr/>
+          <p:nvPr/>
+        </p:nvSpPr>
+        <p:spPr>
+          <a:xfrm>
+            <a:off x="571500" y="2139179"/>
+            <a:ext cx="5238750" cy="3215433"/>
+          </a:xfrm>
+          <a:prstGeom prst="roundRect">
+            <a:avLst>
+              <a:gd name="adj" fmla="val 4156"/>
+            </a:avLst>
+          </a:prstGeom>
+          <a:solidFill>
+            <a:srgbClr val="1E293B"/>
+          </a:solidFill>
+          <a:ln w="9525">
+            <a:solidFill>
+              <a:srgbClr val="334155"/>
+            </a:solidFill>
+          </a:ln>
+          <a:effectLst/>
+        </p:spPr>
+        <p:style>
+          <a:lnRef idx="1">
+            <a:schemeClr val="accent1"/>
+          </a:lnRef>
+          <a:fillRef idx="3">
+            <a:schemeClr val="accent1"/>
+          </a:fillRef>
+          <a:effectRef idx="2">
+            <a:schemeClr val="accent1"/>
+          </a:effectRef>
+          <a:fontRef idx="minor">
+            <a:schemeClr val="lt1"/>
+          </a:fontRef>
+        </p:style>
+        <p:txBody>
+          <a:bodyPr rtlCol="0" anchor="ctr"/>
+          <a:lstStyle/>
+          <a:p>
+            <a:pPr algn="ctr"/>
+            <a:endParaRPr/>
+          </a:p>
+        </p:txBody>
+      </p:sp>
+      <p:sp>
+        <p:nvSpPr>
+          <p:cNvPr id="12" name="Rounded Rectangle 11"/>
+          <p:cNvSpPr/>
+          <p:nvPr/>
+        </p:nvSpPr>
+        <p:spPr>
+          <a:xfrm>
+            <a:off x="6381750" y="2139179"/>
+            <a:ext cx="5238750" cy="3215433"/>
+          </a:xfrm>
+          <a:prstGeom prst="roundRect">
+            <a:avLst>
+              <a:gd name="adj" fmla="val 4156"/>
+            </a:avLst>
+          </a:prstGeom>
+          <a:solidFill>
+            <a:srgbClr val="1E293B"/>
+          </a:solidFill>
+          <a:ln w="9525">
+            <a:solidFill>
+              <a:srgbClr val="334155"/>
+            </a:solidFill>
+          </a:ln>
+          <a:effectLst/>
+        </p:spPr>
+        <p:style>
+          <a:lnRef idx="1">
+            <a:schemeClr val="accent1"/>
+          </a:lnRef>
+          <a:fillRef idx="3">
+            <a:schemeClr val="accent1"/>
+          </a:fillRef>
+          <a:effectRef idx="2">
+            <a:schemeClr val="accent1"/>
+          </a:effectRef>
+          <a:fontRef idx="minor">
+            <a:schemeClr val="lt1"/>
+          </a:fontRef>
+        </p:style>
+        <p:txBody>
+          <a:bodyPr rtlCol="0" anchor="ctr"/>
+          <a:lstStyle/>
+          <a:p>
+            <a:pPr algn="ctr"/>
+            <a:endParaRPr/>
+          </a:p>
+        </p:txBody>
+      </p:sp>
+      <p:sp>
+        <p:nvSpPr>
+          <p:cNvPr id="13" name="Rectangle 12"/>
+          <p:cNvSpPr/>
+          <p:nvPr/>
+        </p:nvSpPr>
+        <p:spPr>
+          <a:xfrm>
+            <a:off x="571500" y="5648401"/>
+            <a:ext cx="38100" cy="1024830"/>
+          </a:xfrm>
+          <a:prstGeom prst="rect">
+            <a:avLst/>
+          </a:prstGeom>
+          <a:solidFill>
+            <a:srgbClr val="10B981"/>
+          </a:solidFill>
+          <a:ln>
+            <a:noFill/>
+          </a:ln>
+          <a:effectLst/>
+        </p:spPr>
+        <p:style>
+          <a:lnRef idx="1">
+            <a:schemeClr val="accent1"/>
+          </a:lnRef>
+          <a:fillRef idx="3">
+            <a:schemeClr val="accent1"/>
+          </a:fillRef>
+          <a:effectRef idx="2">
+            <a:schemeClr val="accent1"/>
+          </a:effectRef>
+          <a:fontRef idx="minor">
+            <a:schemeClr val="lt1"/>
+          </a:fontRef>
+        </p:style>
+        <p:txBody>
+          <a:bodyPr rtlCol="0" anchor="ctr"/>
+          <a:lstStyle/>
+          <a:p>
+            <a:pPr algn="ctr"/>
+            <a:endParaRPr/>
+          </a:p>
+        </p:txBody>
+      </p:sp>
+      <p:pic>
+        <p:nvPicPr>
+          <p:cNvPr id="14" name="Picture 13" descr="image.png"/>
+          <p:cNvPicPr>
+            <a:picLocks noChangeAspect="1"/>
+          </p:cNvPicPr>
+          <p:nvPr/>
+        </p:nvPicPr>
+        <p:blipFill>
+          <a:blip r:embed="rId4"/>
+          <a:stretch>
+            <a:fillRect/>
+          </a:stretch>
+        </p:blipFill>
+        <p:spPr>
+          <a:xfrm>
+            <a:off x="962025" y="2550540"/>
+            <a:ext cx="180975" cy="209550"/>
+          </a:xfrm>
+          <a:prstGeom prst="rect">
+            <a:avLst/>
+          </a:prstGeom>
+        </p:spPr>
+      </p:pic>
+      <p:pic>
+        <p:nvPicPr>
+          <p:cNvPr id="15" name="Picture 14" descr="image.png"/>
+          <p:cNvPicPr>
+            <a:picLocks noChangeAspect="1"/>
+          </p:cNvPicPr>
+          <p:nvPr/>
+        </p:nvPicPr>
+        <p:blipFill>
+          <a:blip r:embed="rId5"/>
+          <a:stretch>
+            <a:fillRect/>
+          </a:stretch>
+        </p:blipFill>
+        <p:spPr>
+          <a:xfrm>
+            <a:off x="6772275" y="2550540"/>
+            <a:ext cx="238125" cy="209550"/>
+          </a:xfrm>
+          <a:prstGeom prst="rect">
+            <a:avLst/>
+          </a:prstGeom>
+        </p:spPr>
+      </p:pic>
+      <p:sp>
+        <p:nvSpPr>
+          <p:cNvPr id="16" name="TextBox 15"/>
+          <p:cNvSpPr txBox="1"/>
+          <p:nvPr/>
+        </p:nvSpPr>
+        <p:spPr>
+          <a:xfrm>
+            <a:off x="762000" y="476250"/>
+            <a:ext cx="11430000" cy="502890"/>
+          </a:xfrm>
+          <a:prstGeom prst="rect">
+            <a:avLst/>
+          </a:prstGeom>
+          <a:noFill/>
+        </p:spPr>
+        <p:txBody>
+          <a:bodyPr wrap="none" lIns="0" tIns="0" rIns="0" bIns="0" anchor="t">
+            <a:spAutoFit/>
+          </a:bodyPr>
+          <a:lstStyle/>
+          <a:p>
+            <a:pPr algn="l">
+              <a:lnSpc>
+                <a:spcPts val="3959"/>
+              </a:lnSpc>
+            </a:pPr>
+            <a:r>
+              <a:rPr sz="3300" b="1" i="0" u="none">
+                <a:solidFill>
+                  <a:srgbClr val="F8FAFC"/>
+                </a:solidFill>
+                <a:latin typeface="Inter"/>
+              </a:rPr>
+              <a:t>DATA QUALITY &amp; VALIDATION</a:t>
+            </a:r>
+          </a:p>
+        </p:txBody>
+      </p:sp>
+      <p:sp>
+        <p:nvSpPr>
+          <p:cNvPr id="17" name="TextBox 16"/>
+          <p:cNvSpPr txBox="1"/>
+          <p:nvPr/>
+        </p:nvSpPr>
+        <p:spPr>
+          <a:xfrm>
+            <a:off x="571500" y="1209599"/>
+            <a:ext cx="11620500" cy="274290"/>
+          </a:xfrm>
+          <a:prstGeom prst="rect">
+            <a:avLst/>
+          </a:prstGeom>
+          <a:noFill/>
+        </p:spPr>
+        <p:txBody>
+          <a:bodyPr wrap="none" lIns="0" tIns="0" rIns="0" bIns="0" anchor="t">
+            <a:spAutoFit/>
+          </a:bodyPr>
+          <a:lstStyle/>
+          <a:p>
+            <a:pPr algn="l">
+              <a:lnSpc>
+                <a:spcPts val="2160"/>
+              </a:lnSpc>
+            </a:pPr>
+            <a:r>
+              <a:rPr sz="1800" b="1" i="0" u="none" dirty="0">
+                <a:solidFill>
+                  <a:srgbClr val="10B981"/>
+                </a:solidFill>
+                <a:latin typeface="Inter"/>
+              </a:rPr>
+              <a:t>Sprint 2 Objective</a:t>
+            </a:r>
+          </a:p>
+        </p:txBody>
+      </p:sp>
+      <p:sp>
+        <p:nvSpPr>
+          <p:cNvPr id="18" name="TextBox 17"/>
+          <p:cNvSpPr txBox="1"/>
+          <p:nvPr/>
+        </p:nvSpPr>
+        <p:spPr>
+          <a:xfrm>
+            <a:off x="571500" y="1674389"/>
+            <a:ext cx="11620500" cy="274290"/>
+          </a:xfrm>
+          <a:prstGeom prst="rect">
+            <a:avLst/>
+          </a:prstGeom>
+          <a:noFill/>
+        </p:spPr>
+        <p:txBody>
+          <a:bodyPr wrap="none" lIns="0" tIns="0" rIns="0" bIns="0" anchor="t">
+            <a:spAutoFit/>
+          </a:bodyPr>
+          <a:lstStyle/>
+          <a:p>
+            <a:pPr algn="l">
+              <a:lnSpc>
+                <a:spcPts val="2160"/>
+              </a:lnSpc>
+            </a:pPr>
+            <a:r>
+              <a:rPr sz="1350" b="0" i="0" u="none" dirty="0">
+                <a:solidFill>
+                  <a:srgbClr val="94A3B8"/>
+                </a:solidFill>
+                <a:latin typeface="Inter"/>
+              </a:rPr>
+              <a:t>Identify common data-quality issues and domain-specific inconsistencies in energy datasets.</a:t>
+            </a:r>
+          </a:p>
+        </p:txBody>
+      </p:sp>
+      <p:sp>
+        <p:nvSpPr>
+          <p:cNvPr id="19" name="TextBox 18"/>
+          <p:cNvSpPr txBox="1"/>
+          <p:nvPr/>
+        </p:nvSpPr>
+        <p:spPr>
+          <a:xfrm>
+            <a:off x="800100" y="5838901"/>
+            <a:ext cx="11391900" cy="274290"/>
+          </a:xfrm>
+          <a:prstGeom prst="rect">
+            <a:avLst/>
+          </a:prstGeom>
+          <a:noFill/>
+        </p:spPr>
+        <p:txBody>
+          <a:bodyPr wrap="none" lIns="0" tIns="0" rIns="0" bIns="0" anchor="t">
+            <a:spAutoFit/>
+          </a:bodyPr>
+          <a:lstStyle/>
+          <a:p>
+            <a:pPr algn="l">
+              <a:lnSpc>
+                <a:spcPts val="2160"/>
+              </a:lnSpc>
+            </a:pPr>
+            <a:r>
+              <a:rPr sz="1350" b="1" i="0" u="none">
+                <a:solidFill>
+                  <a:srgbClr val="F8FAFC"/>
+                </a:solidFill>
+                <a:latin typeface="Inter"/>
+              </a:rPr>
+              <a:t>Output:</a:t>
+            </a:r>
+            <a:r>
+              <a:rPr sz="1350" b="0" i="0" u="none">
+                <a:solidFill>
+                  <a:srgbClr val="94A3B8"/>
+                </a:solidFill>
+                <a:latin typeface="Inter"/>
+              </a:rPr>
+              <a:t> A structured quality report containing the dataset, affected column, issue type, issue count and severity.</a:t>
+            </a:r>
+          </a:p>
+        </p:txBody>
+      </p:sp>
+      <p:sp>
+        <p:nvSpPr>
+          <p:cNvPr id="20" name="TextBox 19"/>
+          <p:cNvSpPr txBox="1"/>
+          <p:nvPr/>
+        </p:nvSpPr>
+        <p:spPr>
+          <a:xfrm>
+            <a:off x="800100" y="6208441"/>
+            <a:ext cx="11391900" cy="0"/>
+          </a:xfrm>
+          <a:prstGeom prst="rect">
+            <a:avLst/>
+          </a:prstGeom>
+          <a:noFill/>
+        </p:spPr>
+        <p:txBody>
+          <a:bodyPr wrap="none" lIns="0" tIns="0" rIns="0" bIns="0" anchor="t">
+            <a:spAutoFit/>
+          </a:bodyPr>
+          <a:lstStyle/>
+          <a:p>
+            <a:pPr algn="l">
+              <a:lnSpc>
+                <a:spcPts val="2160"/>
+              </a:lnSpc>
+            </a:pPr>
+            <a:r>
+              <a:rPr sz="1350" b="1" i="0" u="none">
+                <a:solidFill>
+                  <a:srgbClr val="F8FAFC"/>
+                </a:solidFill>
+                <a:latin typeface="Inter"/>
+              </a:rPr>
+              <a:t>Business Value:</a:t>
+            </a:r>
+            <a:r>
+              <a:rPr sz="1350" b="0" i="0" u="none">
+                <a:solidFill>
+                  <a:srgbClr val="94A3B8"/>
+                </a:solidFill>
+                <a:latin typeface="Inter"/>
+              </a:rPr>
+              <a:t> Makes data-quality issues visible before the data is used for operational analysis or reporting.</a:t>
+            </a:r>
+          </a:p>
+        </p:txBody>
+      </p:sp>
+      <p:sp>
+        <p:nvSpPr>
+          <p:cNvPr id="21" name="TextBox 20"/>
+          <p:cNvSpPr txBox="1"/>
+          <p:nvPr/>
+        </p:nvSpPr>
+        <p:spPr>
+          <a:xfrm>
+            <a:off x="1257300" y="2529704"/>
+            <a:ext cx="5540692" cy="251370"/>
+          </a:xfrm>
+          <a:prstGeom prst="rect">
+            <a:avLst/>
+          </a:prstGeom>
+          <a:noFill/>
+        </p:spPr>
+        <p:txBody>
+          <a:bodyPr wrap="none" lIns="0" tIns="0" rIns="0" bIns="0" anchor="ctr">
+            <a:spAutoFit/>
+          </a:bodyPr>
+          <a:lstStyle/>
+          <a:p>
+            <a:pPr algn="l">
+              <a:lnSpc>
+                <a:spcPts val="1979"/>
+              </a:lnSpc>
+            </a:pPr>
+            <a:r>
+              <a:rPr sz="1650" b="1" i="0" u="none">
+                <a:solidFill>
+                  <a:srgbClr val="0EA5E9"/>
+                </a:solidFill>
+                <a:latin typeface="Inter"/>
+              </a:rPr>
+              <a:t>General Validation</a:t>
+            </a:r>
+          </a:p>
+        </p:txBody>
+      </p:sp>
+      <p:sp>
+        <p:nvSpPr>
+          <p:cNvPr id="22" name="TextBox 21"/>
+          <p:cNvSpPr txBox="1"/>
+          <p:nvPr/>
+        </p:nvSpPr>
+        <p:spPr>
+          <a:xfrm>
+            <a:off x="7124700" y="2529704"/>
+            <a:ext cx="5067300" cy="251370"/>
+          </a:xfrm>
+          <a:prstGeom prst="rect">
+            <a:avLst/>
+          </a:prstGeom>
+          <a:noFill/>
+        </p:spPr>
+        <p:txBody>
+          <a:bodyPr wrap="none" lIns="0" tIns="0" rIns="0" bIns="0" anchor="ctr">
+            <a:spAutoFit/>
+          </a:bodyPr>
+          <a:lstStyle/>
+          <a:p>
+            <a:pPr algn="l">
+              <a:lnSpc>
+                <a:spcPts val="1979"/>
+              </a:lnSpc>
+            </a:pPr>
+            <a:r>
+              <a:rPr sz="1650" b="1" i="0" u="none">
+                <a:solidFill>
+                  <a:srgbClr val="F59E0B"/>
+                </a:solidFill>
+                <a:latin typeface="Inter"/>
+              </a:rPr>
+              <a:t>Domain-Specific Validation</a:t>
+            </a:r>
+          </a:p>
+        </p:txBody>
+      </p:sp>
+      <p:sp>
+        <p:nvSpPr>
+          <p:cNvPr id="23" name="TextBox 22"/>
+          <p:cNvSpPr txBox="1"/>
+          <p:nvPr/>
+        </p:nvSpPr>
+        <p:spPr>
+          <a:xfrm>
+            <a:off x="1295400" y="2923950"/>
+            <a:ext cx="5238750" cy="274290"/>
+          </a:xfrm>
+          <a:prstGeom prst="rect">
+            <a:avLst/>
+          </a:prstGeom>
+          <a:noFill/>
+        </p:spPr>
+        <p:txBody>
+          <a:bodyPr wrap="none" lIns="0" tIns="0" rIns="0" bIns="0" anchor="t">
+            <a:spAutoFit/>
+          </a:bodyPr>
+          <a:lstStyle/>
+          <a:p>
+            <a:pPr algn="l">
+              <a:lnSpc>
+                <a:spcPts val="2160"/>
+              </a:lnSpc>
+            </a:pPr>
+            <a:r>
+              <a:rPr sz="1350" b="0" i="0" u="none">
+                <a:solidFill>
+                  <a:srgbClr val="94A3B8"/>
+                </a:solidFill>
+                <a:latin typeface="Inter"/>
+              </a:rPr>
+              <a:t>Detect missing values in dataset columns.</a:t>
+            </a:r>
+          </a:p>
+        </p:txBody>
+      </p:sp>
+      <p:sp>
+        <p:nvSpPr>
+          <p:cNvPr id="24" name="TextBox 23"/>
+          <p:cNvSpPr txBox="1"/>
+          <p:nvPr/>
+        </p:nvSpPr>
+        <p:spPr>
+          <a:xfrm>
+            <a:off x="1295400" y="3388740"/>
+            <a:ext cx="5238750" cy="274290"/>
+          </a:xfrm>
+          <a:prstGeom prst="rect">
+            <a:avLst/>
+          </a:prstGeom>
+          <a:noFill/>
+        </p:spPr>
+        <p:txBody>
+          <a:bodyPr wrap="none" lIns="0" tIns="0" rIns="0" bIns="0" anchor="t">
+            <a:spAutoFit/>
+          </a:bodyPr>
+          <a:lstStyle/>
+          <a:p>
+            <a:pPr algn="l">
+              <a:lnSpc>
+                <a:spcPts val="2160"/>
+              </a:lnSpc>
+            </a:pPr>
+            <a:r>
+              <a:rPr sz="1350" b="0" i="0" u="none">
+                <a:solidFill>
+                  <a:srgbClr val="94A3B8"/>
+                </a:solidFill>
+                <a:latin typeface="Inter"/>
+              </a:rPr>
+              <a:t>Identify duplicate records.</a:t>
+            </a:r>
+          </a:p>
+        </p:txBody>
+      </p:sp>
+      <p:sp>
+        <p:nvSpPr>
+          <p:cNvPr id="25" name="TextBox 24"/>
+          <p:cNvSpPr txBox="1"/>
+          <p:nvPr/>
+        </p:nvSpPr>
+        <p:spPr>
+          <a:xfrm>
+            <a:off x="1295400" y="3853530"/>
+            <a:ext cx="4219575" cy="548580"/>
+          </a:xfrm>
+          <a:prstGeom prst="rect">
+            <a:avLst/>
+          </a:prstGeom>
+          <a:noFill/>
+        </p:spPr>
+        <p:txBody>
+          <a:bodyPr wrap="square" lIns="0" tIns="0" rIns="0" bIns="0" anchor="t">
+            <a:spAutoFit/>
+          </a:bodyPr>
+          <a:lstStyle/>
+          <a:p>
+            <a:pPr algn="l">
+              <a:lnSpc>
+                <a:spcPts val="2160"/>
+              </a:lnSpc>
+            </a:pPr>
+            <a:r>
+              <a:rPr sz="1350" b="0" i="0" u="none">
+                <a:solidFill>
+                  <a:srgbClr val="94A3B8"/>
+                </a:solidFill>
+                <a:latin typeface="Inter"/>
+              </a:rPr>
+              <a:t>Assign issue severity based on the proportion of missing values.</a:t>
+            </a:r>
+          </a:p>
+        </p:txBody>
+      </p:sp>
+      <p:sp>
+        <p:nvSpPr>
+          <p:cNvPr id="26" name="TextBox 25"/>
+          <p:cNvSpPr txBox="1"/>
+          <p:nvPr/>
+        </p:nvSpPr>
+        <p:spPr>
+          <a:xfrm>
+            <a:off x="7105650" y="2923950"/>
+            <a:ext cx="4219575" cy="548580"/>
+          </a:xfrm>
+          <a:prstGeom prst="rect">
+            <a:avLst/>
+          </a:prstGeom>
+          <a:noFill/>
+        </p:spPr>
+        <p:txBody>
+          <a:bodyPr wrap="square" lIns="0" tIns="0" rIns="0" bIns="0" anchor="t">
+            <a:spAutoFit/>
+          </a:bodyPr>
+          <a:lstStyle/>
+          <a:p>
+            <a:pPr algn="l">
+              <a:lnSpc>
+                <a:spcPts val="2160"/>
+              </a:lnSpc>
+            </a:pPr>
+            <a:r>
+              <a:rPr sz="1350" b="1" i="0" u="none">
+                <a:solidFill>
+                  <a:srgbClr val="F8FAFC"/>
+                </a:solidFill>
+                <a:latin typeface="Inter"/>
+              </a:rPr>
+              <a:t>SCADA:</a:t>
+            </a:r>
+            <a:r>
+              <a:rPr sz="1350" b="0" i="0" u="none">
+                <a:solidFill>
+                  <a:srgbClr val="94A3B8"/>
+                </a:solidFill>
+                <a:latin typeface="Inter"/>
+              </a:rPr>
+              <a:t> Check for negative sensor measurements and invalid timestamps.</a:t>
+            </a:r>
+          </a:p>
+        </p:txBody>
+      </p:sp>
+      <p:sp>
+        <p:nvSpPr>
+          <p:cNvPr id="27" name="TextBox 26"/>
+          <p:cNvSpPr txBox="1"/>
+          <p:nvPr/>
+        </p:nvSpPr>
+        <p:spPr>
+          <a:xfrm>
+            <a:off x="7105650" y="3663030"/>
+            <a:ext cx="4219575" cy="822870"/>
+          </a:xfrm>
+          <a:prstGeom prst="rect">
+            <a:avLst/>
+          </a:prstGeom>
+          <a:noFill/>
+        </p:spPr>
+        <p:txBody>
+          <a:bodyPr wrap="square" lIns="0" tIns="0" rIns="0" bIns="0" anchor="t">
+            <a:spAutoFit/>
+          </a:bodyPr>
+          <a:lstStyle/>
+          <a:p>
+            <a:pPr algn="l">
+              <a:lnSpc>
+                <a:spcPts val="2160"/>
+              </a:lnSpc>
+            </a:pPr>
+            <a:r>
+              <a:rPr sz="1350" b="1" i="0" u="none">
+                <a:solidFill>
+                  <a:srgbClr val="F8FAFC"/>
+                </a:solidFill>
+                <a:latin typeface="Inter"/>
+              </a:rPr>
+              <a:t>Smart meters:</a:t>
+            </a:r>
+            <a:r>
+              <a:rPr sz="1350" b="0" i="0" u="none">
+                <a:solidFill>
+                  <a:srgbClr val="94A3B8"/>
+                </a:solidFill>
+                <a:latin typeface="Inter"/>
+              </a:rPr>
+              <a:t> Check for negative consumption-related values and humidity outside the 0–100 range.</a:t>
+            </a:r>
+          </a:p>
+        </p:txBody>
+      </p:sp>
+      <p:sp>
+        <p:nvSpPr>
+          <p:cNvPr id="28" name="TextBox 27"/>
+          <p:cNvSpPr txBox="1"/>
+          <p:nvPr/>
+        </p:nvSpPr>
+        <p:spPr>
+          <a:xfrm>
+            <a:off x="7105650" y="4676401"/>
+            <a:ext cx="4219575" cy="548580"/>
+          </a:xfrm>
+          <a:prstGeom prst="rect">
+            <a:avLst/>
+          </a:prstGeom>
+          <a:noFill/>
+        </p:spPr>
+        <p:txBody>
+          <a:bodyPr wrap="square" lIns="0" tIns="0" rIns="0" bIns="0" anchor="t">
+            <a:spAutoFit/>
+          </a:bodyPr>
+          <a:lstStyle/>
+          <a:p>
+            <a:pPr algn="l">
+              <a:lnSpc>
+                <a:spcPts val="2160"/>
+              </a:lnSpc>
+            </a:pPr>
+            <a:r>
+              <a:rPr sz="1350" b="1" i="0" u="none">
+                <a:solidFill>
+                  <a:srgbClr val="F8FAFC"/>
+                </a:solidFill>
+                <a:latin typeface="Inter"/>
+              </a:rPr>
+              <a:t>Other energy datasets:</a:t>
+            </a:r>
+            <a:r>
+              <a:rPr sz="1350" b="0" i="0" u="none">
+                <a:solidFill>
+                  <a:srgbClr val="94A3B8"/>
+                </a:solidFill>
+                <a:latin typeface="Inter"/>
+              </a:rPr>
+              <a:t> Apply dataset-specific checks where expected columns are available.</a:t>
+            </a:r>
+          </a:p>
+        </p:txBody>
+      </p:sp>
+    </p:spTree>
+  </p:cSld>
+  <p:clrMapOvr>
+    <a:masterClrMapping/>
+  </p:clrMapOvr>
+</p:sld>
+</file>
+
+<file path=ppt/slides/slide14.xml><?xml version="1.0" encoding="utf-8"?>
+<p:sld xmlns:a="http://schemas.openxmlformats.org/drawingml/2006/main" xmlns:r="http://schemas.openxmlformats.org/officeDocument/2006/relationships" xmlns:p="http://schemas.openxmlformats.org/presentationml/2006/main">
+  <p:cSld>
+    <p:spTree>
+      <p:nvGrpSpPr>
+        <p:cNvPr id="1" name=""/>
+        <p:cNvGrpSpPr/>
+        <p:nvPr/>
+      </p:nvGrpSpPr>
+      <p:grpSpPr>
+        <a:xfrm>
+          <a:off x="0" y="0"/>
+          <a:ext cx="0" cy="0"/>
+          <a:chOff x="0" y="0"/>
+          <a:chExt cx="0" cy="0"/>
+        </a:xfrm>
+      </p:grpSpPr>
+      <p:pic>
+        <p:nvPicPr>
+          <p:cNvPr id="2" name="Picture 1" descr="image.png"/>
+          <p:cNvPicPr>
+            <a:picLocks noChangeAspect="1"/>
+          </p:cNvPicPr>
+          <p:nvPr/>
+        </p:nvPicPr>
+        <p:blipFill>
+          <a:blip r:embed="rId2"/>
+          <a:stretch>
+            <a:fillRect/>
+          </a:stretch>
+        </p:blipFill>
+        <p:spPr>
+          <a:xfrm>
+            <a:off x="0" y="0"/>
+            <a:ext cx="12192000" cy="6858000"/>
+          </a:xfrm>
+          <a:prstGeom prst="rect">
+            <a:avLst/>
+          </a:prstGeom>
+        </p:spPr>
+      </p:pic>
+      <p:pic>
+        <p:nvPicPr>
+          <p:cNvPr id="3" name="Picture 2" descr="image.png"/>
+          <p:cNvPicPr>
+            <a:picLocks noChangeAspect="1"/>
+          </p:cNvPicPr>
+          <p:nvPr/>
+        </p:nvPicPr>
+        <p:blipFill>
+          <a:blip r:embed="rId3"/>
+          <a:stretch>
+            <a:fillRect/>
+          </a:stretch>
+        </p:blipFill>
+        <p:spPr>
+          <a:xfrm>
+            <a:off x="571500" y="2682478"/>
+            <a:ext cx="114300" cy="200025"/>
+          </a:xfrm>
+          <a:prstGeom prst="rect">
+            <a:avLst/>
+          </a:prstGeom>
+        </p:spPr>
+      </p:pic>
+      <p:pic>
+        <p:nvPicPr>
+          <p:cNvPr id="4" name="Picture 3" descr="image.png"/>
+          <p:cNvPicPr>
+            <a:picLocks noChangeAspect="1"/>
+          </p:cNvPicPr>
+          <p:nvPr/>
+        </p:nvPicPr>
+        <p:blipFill>
+          <a:blip r:embed="rId3"/>
+          <a:stretch>
+            <a:fillRect/>
+          </a:stretch>
+        </p:blipFill>
+        <p:spPr>
+          <a:xfrm>
+            <a:off x="571500" y="3421559"/>
+            <a:ext cx="114300" cy="200025"/>
+          </a:xfrm>
+          <a:prstGeom prst="rect">
+            <a:avLst/>
+          </a:prstGeom>
+        </p:spPr>
+      </p:pic>
+      <p:pic>
+        <p:nvPicPr>
+          <p:cNvPr id="5" name="Picture 4" descr="image.png"/>
+          <p:cNvPicPr>
+            <a:picLocks noChangeAspect="1"/>
+          </p:cNvPicPr>
+          <p:nvPr/>
+        </p:nvPicPr>
+        <p:blipFill>
+          <a:blip r:embed="rId3"/>
+          <a:stretch>
+            <a:fillRect/>
+          </a:stretch>
+        </p:blipFill>
+        <p:spPr>
+          <a:xfrm>
+            <a:off x="571500" y="3897436"/>
+            <a:ext cx="114300" cy="200025"/>
+          </a:xfrm>
+          <a:prstGeom prst="rect">
+            <a:avLst/>
+          </a:prstGeom>
+        </p:spPr>
+      </p:pic>
+      <p:pic>
+        <p:nvPicPr>
+          <p:cNvPr id="6" name="Picture 5" descr="image.png"/>
+          <p:cNvPicPr>
+            <a:picLocks noChangeAspect="1"/>
+          </p:cNvPicPr>
+          <p:nvPr/>
+        </p:nvPicPr>
+        <p:blipFill>
+          <a:blip r:embed="rId3"/>
+          <a:stretch>
+            <a:fillRect/>
+          </a:stretch>
+        </p:blipFill>
+        <p:spPr>
+          <a:xfrm>
+            <a:off x="571500" y="4362227"/>
+            <a:ext cx="114300" cy="200025"/>
+          </a:xfrm>
+          <a:prstGeom prst="rect">
+            <a:avLst/>
+          </a:prstGeom>
+        </p:spPr>
+      </p:pic>
+      <p:pic>
+        <p:nvPicPr>
+          <p:cNvPr id="7" name="Picture 6" descr="image.png"/>
+          <p:cNvPicPr>
+            <a:picLocks noChangeAspect="1"/>
+          </p:cNvPicPr>
+          <p:nvPr/>
+        </p:nvPicPr>
+        <p:blipFill>
+          <a:blip r:embed="rId3"/>
+          <a:stretch>
+            <a:fillRect/>
+          </a:stretch>
+        </p:blipFill>
+        <p:spPr>
+          <a:xfrm>
+            <a:off x="571500" y="4827017"/>
+            <a:ext cx="114300" cy="200025"/>
+          </a:xfrm>
+          <a:prstGeom prst="rect">
+            <a:avLst/>
+          </a:prstGeom>
+        </p:spPr>
+      </p:pic>
+      <p:pic>
+        <p:nvPicPr>
+          <p:cNvPr id="8" name="Picture 7" descr="image.png"/>
+          <p:cNvPicPr>
+            <a:picLocks noChangeAspect="1"/>
+          </p:cNvPicPr>
+          <p:nvPr/>
+        </p:nvPicPr>
+        <p:blipFill>
+          <a:blip r:embed="rId4"/>
+          <a:stretch>
+            <a:fillRect/>
+          </a:stretch>
+        </p:blipFill>
+        <p:spPr>
+          <a:xfrm>
+            <a:off x="6381750" y="2682478"/>
+            <a:ext cx="190500" cy="200025"/>
+          </a:xfrm>
+          <a:prstGeom prst="rect">
+            <a:avLst/>
+          </a:prstGeom>
+        </p:spPr>
+      </p:pic>
+      <p:pic>
+        <p:nvPicPr>
+          <p:cNvPr id="9" name="Picture 8" descr="image.png"/>
+          <p:cNvPicPr>
+            <a:picLocks noChangeAspect="1"/>
+          </p:cNvPicPr>
+          <p:nvPr/>
+        </p:nvPicPr>
+        <p:blipFill>
+          <a:blip r:embed="rId4"/>
+          <a:stretch>
+            <a:fillRect/>
+          </a:stretch>
+        </p:blipFill>
+        <p:spPr>
+          <a:xfrm>
+            <a:off x="6381750" y="3421559"/>
+            <a:ext cx="190500" cy="200025"/>
+          </a:xfrm>
+          <a:prstGeom prst="rect">
+            <a:avLst/>
+          </a:prstGeom>
+        </p:spPr>
+      </p:pic>
+      <p:pic>
+        <p:nvPicPr>
+          <p:cNvPr id="10" name="Picture 9" descr="image.png"/>
+          <p:cNvPicPr>
+            <a:picLocks noChangeAspect="1"/>
+          </p:cNvPicPr>
+          <p:nvPr/>
+        </p:nvPicPr>
+        <p:blipFill>
+          <a:blip r:embed="rId4"/>
+          <a:stretch>
+            <a:fillRect/>
+          </a:stretch>
+        </p:blipFill>
+        <p:spPr>
+          <a:xfrm>
+            <a:off x="6381750" y="4171727"/>
+            <a:ext cx="190500" cy="200025"/>
+          </a:xfrm>
+          <a:prstGeom prst="rect">
+            <a:avLst/>
+          </a:prstGeom>
+        </p:spPr>
+      </p:pic>
+      <p:sp>
+        <p:nvSpPr>
+          <p:cNvPr id="11" name="Rectangle 10"/>
+          <p:cNvSpPr/>
+          <p:nvPr/>
+        </p:nvSpPr>
+        <p:spPr>
+          <a:xfrm>
+            <a:off x="571500" y="476250"/>
+            <a:ext cx="57150" cy="504824"/>
+          </a:xfrm>
+          <a:prstGeom prst="rect">
+            <a:avLst/>
+          </a:prstGeom>
+          <a:solidFill>
+            <a:srgbClr val="0EA5E9"/>
+          </a:solidFill>
+          <a:ln>
+            <a:noFill/>
+          </a:ln>
+          <a:effectLst/>
+        </p:spPr>
+        <p:style>
+          <a:lnRef idx="1">
+            <a:schemeClr val="accent1"/>
+          </a:lnRef>
+          <a:fillRef idx="3">
+            <a:schemeClr val="accent1"/>
+          </a:fillRef>
+          <a:effectRef idx="2">
+            <a:schemeClr val="accent1"/>
+          </a:effectRef>
+          <a:fontRef idx="minor">
+            <a:schemeClr val="lt1"/>
+          </a:fontRef>
+        </p:style>
+        <p:txBody>
+          <a:bodyPr rtlCol="0" anchor="ctr"/>
+          <a:lstStyle/>
+          <a:p>
+            <a:pPr algn="ctr"/>
+            <a:endParaRPr/>
+          </a:p>
+        </p:txBody>
+      </p:sp>
+      <p:sp>
+        <p:nvSpPr>
+          <p:cNvPr id="12" name="Rounded Rectangle 11"/>
+          <p:cNvSpPr/>
+          <p:nvPr/>
+        </p:nvSpPr>
+        <p:spPr>
+          <a:xfrm>
+            <a:off x="571500" y="5726460"/>
+            <a:ext cx="11049000" cy="655290"/>
+          </a:xfrm>
+          <a:prstGeom prst="roundRect">
+            <a:avLst>
+              <a:gd name="adj" fmla="val 11628"/>
+            </a:avLst>
+          </a:prstGeom>
+          <a:solidFill>
+            <a:srgbClr val="1A2436"/>
+          </a:solidFill>
+          <a:ln>
+            <a:noFill/>
+          </a:ln>
+          <a:effectLst/>
+        </p:spPr>
+        <p:style>
+          <a:lnRef idx="1">
+            <a:schemeClr val="accent1"/>
+          </a:lnRef>
+          <a:fillRef idx="3">
+            <a:schemeClr val="accent1"/>
+          </a:fillRef>
+          <a:effectRef idx="2">
+            <a:schemeClr val="accent1"/>
+          </a:effectRef>
+          <a:fontRef idx="minor">
+            <a:schemeClr val="lt1"/>
+          </a:fontRef>
+        </p:style>
+        <p:txBody>
+          <a:bodyPr rtlCol="0" anchor="ctr"/>
+          <a:lstStyle/>
+          <a:p>
+            <a:pPr algn="ctr"/>
+            <a:endParaRPr/>
+          </a:p>
+        </p:txBody>
+      </p:sp>
+      <p:pic>
+        <p:nvPicPr>
+          <p:cNvPr id="13" name="Picture 12" descr="image.png"/>
+          <p:cNvPicPr>
+            <a:picLocks noChangeAspect="1"/>
+          </p:cNvPicPr>
+          <p:nvPr/>
+        </p:nvPicPr>
+        <p:blipFill>
+          <a:blip r:embed="rId5"/>
+          <a:stretch>
+            <a:fillRect/>
+          </a:stretch>
+        </p:blipFill>
+        <p:spPr>
+          <a:xfrm>
+            <a:off x="571500" y="2311003"/>
+            <a:ext cx="219075" cy="190500"/>
+          </a:xfrm>
+          <a:prstGeom prst="rect">
+            <a:avLst/>
+          </a:prstGeom>
+        </p:spPr>
+      </p:pic>
+      <p:pic>
+        <p:nvPicPr>
+          <p:cNvPr id="14" name="Picture 13" descr="image.png"/>
+          <p:cNvPicPr>
+            <a:picLocks noChangeAspect="1"/>
+          </p:cNvPicPr>
+          <p:nvPr/>
+        </p:nvPicPr>
+        <p:blipFill>
+          <a:blip r:embed="rId6"/>
+          <a:stretch>
+            <a:fillRect/>
+          </a:stretch>
+        </p:blipFill>
+        <p:spPr>
+          <a:xfrm>
+            <a:off x="6381750" y="2311003"/>
+            <a:ext cx="219075" cy="190500"/>
+          </a:xfrm>
+          <a:prstGeom prst="rect">
+            <a:avLst/>
+          </a:prstGeom>
+        </p:spPr>
+      </p:pic>
+      <p:sp>
+        <p:nvSpPr>
+          <p:cNvPr id="15" name="TextBox 14"/>
+          <p:cNvSpPr txBox="1"/>
+          <p:nvPr/>
+        </p:nvSpPr>
+        <p:spPr>
+          <a:xfrm>
+            <a:off x="762000" y="476250"/>
+            <a:ext cx="11430000" cy="1005780"/>
+          </a:xfrm>
+          <a:prstGeom prst="rect">
+            <a:avLst/>
+          </a:prstGeom>
+          <a:noFill/>
+        </p:spPr>
+        <p:txBody>
+          <a:bodyPr wrap="square" lIns="0" tIns="0" rIns="0" bIns="0" anchor="t">
+            <a:spAutoFit/>
+          </a:bodyPr>
+          <a:lstStyle/>
+          <a:p>
+            <a:pPr algn="l">
+              <a:lnSpc>
+                <a:spcPts val="3959"/>
+              </a:lnSpc>
+            </a:pPr>
+            <a:r>
+              <a:rPr sz="3300" b="1" i="0" u="none">
+                <a:solidFill>
+                  <a:srgbClr val="F8FAFC"/>
+                </a:solidFill>
+                <a:latin typeface="Inter"/>
+              </a:rPr>
+              <a:t>DATA STANDARDIZATION &amp; MASTER DATA PREPARATION</a:t>
+            </a:r>
+          </a:p>
+        </p:txBody>
+      </p:sp>
+      <p:sp>
+        <p:nvSpPr>
+          <p:cNvPr id="16" name="TextBox 15"/>
+          <p:cNvSpPr txBox="1"/>
+          <p:nvPr/>
+        </p:nvSpPr>
+        <p:spPr>
+          <a:xfrm>
+            <a:off x="571500" y="1267123"/>
+            <a:ext cx="11620500" cy="274290"/>
+          </a:xfrm>
+          <a:prstGeom prst="rect">
+            <a:avLst/>
+          </a:prstGeom>
+          <a:noFill/>
+        </p:spPr>
+        <p:txBody>
+          <a:bodyPr wrap="none" lIns="0" tIns="0" rIns="0" bIns="0" anchor="t">
+            <a:spAutoFit/>
+          </a:bodyPr>
+          <a:lstStyle/>
+          <a:p>
+            <a:pPr algn="l">
+              <a:lnSpc>
+                <a:spcPts val="2160"/>
+              </a:lnSpc>
+            </a:pPr>
+            <a:r>
+              <a:rPr sz="1800" b="1" i="0" u="none">
+                <a:solidFill>
+                  <a:srgbClr val="10B981"/>
+                </a:solidFill>
+                <a:latin typeface="Inter"/>
+              </a:rPr>
+              <a:t>Sprint 2 Objective</a:t>
+            </a:r>
+          </a:p>
+        </p:txBody>
+      </p:sp>
+      <p:sp>
+        <p:nvSpPr>
+          <p:cNvPr id="17" name="TextBox 16"/>
+          <p:cNvSpPr txBox="1"/>
+          <p:nvPr/>
+        </p:nvSpPr>
+        <p:spPr>
+          <a:xfrm>
+            <a:off x="571500" y="1731913"/>
+            <a:ext cx="11620500" cy="274290"/>
+          </a:xfrm>
+          <a:prstGeom prst="rect">
+            <a:avLst/>
+          </a:prstGeom>
+          <a:noFill/>
+        </p:spPr>
+        <p:txBody>
+          <a:bodyPr wrap="none" lIns="0" tIns="0" rIns="0" bIns="0" anchor="t">
+            <a:spAutoFit/>
+          </a:bodyPr>
+          <a:lstStyle/>
+          <a:p>
+            <a:pPr algn="l">
+              <a:lnSpc>
+                <a:spcPts val="2160"/>
+              </a:lnSpc>
+            </a:pPr>
+            <a:r>
+              <a:rPr sz="1350" b="0" i="0" u="none">
+                <a:solidFill>
+                  <a:srgbClr val="94A3B8"/>
+                </a:solidFill>
+                <a:latin typeface="Inter"/>
+              </a:rPr>
+              <a:t>Improve consistency across source datasets and prepare structured records for downstream integration.</a:t>
+            </a:r>
+          </a:p>
+        </p:txBody>
+      </p:sp>
+      <p:sp>
+        <p:nvSpPr>
+          <p:cNvPr id="18" name="TextBox 17"/>
+          <p:cNvSpPr txBox="1"/>
+          <p:nvPr/>
+        </p:nvSpPr>
+        <p:spPr>
+          <a:xfrm>
+            <a:off x="-285750" y="5916960"/>
+            <a:ext cx="12763500" cy="274290"/>
+          </a:xfrm>
+          <a:prstGeom prst="rect">
+            <a:avLst/>
+          </a:prstGeom>
+          <a:noFill/>
+        </p:spPr>
+        <p:txBody>
+          <a:bodyPr wrap="none" lIns="0" tIns="0" rIns="0" bIns="0" anchor="t">
+            <a:spAutoFit/>
+          </a:bodyPr>
+          <a:lstStyle/>
+          <a:p>
+            <a:pPr algn="ctr">
+              <a:lnSpc>
+                <a:spcPts val="2160"/>
+              </a:lnSpc>
+            </a:pPr>
+            <a:r>
+              <a:rPr sz="1350" b="1" i="0" u="none">
+                <a:solidFill>
+                  <a:srgbClr val="10B981"/>
+                </a:solidFill>
+                <a:latin typeface="Inter"/>
+              </a:rPr>
+              <a:t>Intended Outcome:</a:t>
+            </a:r>
+            <a:r>
+              <a:rPr sz="1350" b="0" i="0" u="none">
+                <a:solidFill>
+                  <a:srgbClr val="94A3B8"/>
+                </a:solidFill>
+                <a:latin typeface="Inter"/>
+              </a:rPr>
+              <a:t> More consistent customer/utility, asset and grid records for downstream integration and analysis.</a:t>
+            </a:r>
+          </a:p>
+        </p:txBody>
+      </p:sp>
+      <p:sp>
+        <p:nvSpPr>
+          <p:cNvPr id="19" name="TextBox 18"/>
+          <p:cNvSpPr txBox="1"/>
+          <p:nvPr/>
+        </p:nvSpPr>
+        <p:spPr>
+          <a:xfrm>
+            <a:off x="571500" y="2291953"/>
+            <a:ext cx="6875859" cy="228600"/>
+          </a:xfrm>
+          <a:prstGeom prst="rect">
+            <a:avLst/>
+          </a:prstGeom>
+          <a:noFill/>
+        </p:spPr>
+        <p:txBody>
+          <a:bodyPr wrap="none" lIns="295275" tIns="0" rIns="0" bIns="0" anchor="t">
+            <a:spAutoFit/>
+          </a:bodyPr>
+          <a:lstStyle/>
+          <a:p>
+            <a:pPr algn="l">
+              <a:lnSpc>
+                <a:spcPts val="1800"/>
+              </a:lnSpc>
+            </a:pPr>
+            <a:r>
+              <a:rPr sz="1500" b="1" i="0" u="none">
+                <a:solidFill>
+                  <a:srgbClr val="0EA5E9"/>
+                </a:solidFill>
+                <a:latin typeface="Inter"/>
+              </a:rPr>
+              <a:t>Standardization Operations</a:t>
+            </a:r>
+          </a:p>
+        </p:txBody>
+      </p:sp>
+      <p:sp>
+        <p:nvSpPr>
+          <p:cNvPr id="20" name="TextBox 19"/>
+          <p:cNvSpPr txBox="1"/>
+          <p:nvPr/>
+        </p:nvSpPr>
+        <p:spPr>
+          <a:xfrm>
+            <a:off x="6381750" y="2291953"/>
+            <a:ext cx="5810250" cy="228600"/>
+          </a:xfrm>
+          <a:prstGeom prst="rect">
+            <a:avLst/>
+          </a:prstGeom>
+          <a:noFill/>
+        </p:spPr>
+        <p:txBody>
+          <a:bodyPr wrap="none" lIns="295275" tIns="0" rIns="0" bIns="0" anchor="t">
+            <a:spAutoFit/>
+          </a:bodyPr>
+          <a:lstStyle/>
+          <a:p>
+            <a:pPr algn="l">
+              <a:lnSpc>
+                <a:spcPts val="1800"/>
+              </a:lnSpc>
+            </a:pPr>
+            <a:r>
+              <a:rPr sz="1500" b="1" i="0" u="none">
+                <a:solidFill>
+                  <a:srgbClr val="0EA5E9"/>
+                </a:solidFill>
+                <a:latin typeface="Inter"/>
+              </a:rPr>
+              <a:t>Master Data Preparation</a:t>
+            </a:r>
+          </a:p>
+        </p:txBody>
+      </p:sp>
+      <p:sp>
+        <p:nvSpPr>
+          <p:cNvPr id="21" name="TextBox 20"/>
+          <p:cNvSpPr txBox="1"/>
+          <p:nvPr/>
+        </p:nvSpPr>
+        <p:spPr>
+          <a:xfrm>
+            <a:off x="904875" y="2663428"/>
+            <a:ext cx="5000625" cy="548580"/>
+          </a:xfrm>
+          <a:prstGeom prst="rect">
+            <a:avLst/>
+          </a:prstGeom>
+          <a:noFill/>
+        </p:spPr>
+        <p:txBody>
+          <a:bodyPr wrap="square" lIns="0" tIns="0" rIns="0" bIns="0" anchor="t">
+            <a:spAutoFit/>
+          </a:bodyPr>
+          <a:lstStyle/>
+          <a:p>
+            <a:pPr algn="l">
+              <a:lnSpc>
+                <a:spcPts val="2160"/>
+              </a:lnSpc>
+            </a:pPr>
+            <a:r>
+              <a:rPr sz="1350" b="0" i="0" u="none">
+                <a:solidFill>
+                  <a:srgbClr val="94A3B8"/>
+                </a:solidFill>
+                <a:latin typeface="Inter"/>
+              </a:rPr>
+              <a:t>Normalize column names by removing inconsistent punctuation and formatting.</a:t>
+            </a:r>
+          </a:p>
+        </p:txBody>
+      </p:sp>
+      <p:sp>
+        <p:nvSpPr>
+          <p:cNvPr id="22" name="TextBox 21"/>
+          <p:cNvSpPr txBox="1"/>
+          <p:nvPr/>
+        </p:nvSpPr>
+        <p:spPr>
+          <a:xfrm>
+            <a:off x="904875" y="3402509"/>
+            <a:ext cx="5000625" cy="548580"/>
+          </a:xfrm>
+          <a:prstGeom prst="rect">
+            <a:avLst/>
+          </a:prstGeom>
+          <a:noFill/>
+        </p:spPr>
+        <p:txBody>
+          <a:bodyPr wrap="square" lIns="0" tIns="0" rIns="0" bIns="0" anchor="t">
+            <a:spAutoFit/>
+          </a:bodyPr>
+          <a:lstStyle/>
+          <a:p>
+            <a:pPr algn="l">
+              <a:lnSpc>
+                <a:spcPts val="2160"/>
+              </a:lnSpc>
+            </a:pPr>
+            <a:r>
+              <a:rPr sz="1350" b="0" i="0" u="none">
+                <a:solidFill>
+                  <a:srgbClr val="94A3B8"/>
+                </a:solidFill>
+                <a:latin typeface="Inter"/>
+              </a:rPr>
+              <a:t>Trim leading and trailing whitespace from selected text fields.</a:t>
+            </a:r>
+          </a:p>
+        </p:txBody>
+      </p:sp>
+      <p:sp>
+        <p:nvSpPr>
+          <p:cNvPr id="23" name="TextBox 22"/>
+          <p:cNvSpPr txBox="1"/>
+          <p:nvPr/>
+        </p:nvSpPr>
+        <p:spPr>
+          <a:xfrm>
+            <a:off x="904875" y="3878386"/>
+            <a:ext cx="6215062" cy="274290"/>
+          </a:xfrm>
+          <a:prstGeom prst="rect">
+            <a:avLst/>
+          </a:prstGeom>
+          <a:noFill/>
+        </p:spPr>
+        <p:txBody>
+          <a:bodyPr wrap="none" lIns="0" tIns="0" rIns="0" bIns="0" anchor="t">
+            <a:spAutoFit/>
+          </a:bodyPr>
+          <a:lstStyle/>
+          <a:p>
+            <a:pPr algn="l">
+              <a:lnSpc>
+                <a:spcPts val="2160"/>
+              </a:lnSpc>
+            </a:pPr>
+            <a:r>
+              <a:rPr sz="1350" b="0" i="0" u="none">
+                <a:solidFill>
+                  <a:srgbClr val="94A3B8"/>
+                </a:solidFill>
+                <a:latin typeface="Inter"/>
+              </a:rPr>
+              <a:t>Normalize repeated whitespace within text values.</a:t>
+            </a:r>
+          </a:p>
+        </p:txBody>
+      </p:sp>
+      <p:sp>
+        <p:nvSpPr>
+          <p:cNvPr id="24" name="TextBox 23"/>
+          <p:cNvSpPr txBox="1"/>
+          <p:nvPr/>
+        </p:nvSpPr>
+        <p:spPr>
+          <a:xfrm>
+            <a:off x="904875" y="4343177"/>
+            <a:ext cx="6215062" cy="274290"/>
+          </a:xfrm>
+          <a:prstGeom prst="rect">
+            <a:avLst/>
+          </a:prstGeom>
+          <a:noFill/>
+        </p:spPr>
+        <p:txBody>
+          <a:bodyPr wrap="none" lIns="0" tIns="0" rIns="0" bIns="0" anchor="t">
+            <a:spAutoFit/>
+          </a:bodyPr>
+          <a:lstStyle/>
+          <a:p>
+            <a:pPr algn="l">
+              <a:lnSpc>
+                <a:spcPts val="2160"/>
+              </a:lnSpc>
+            </a:pPr>
+            <a:r>
+              <a:rPr sz="1350" b="0" i="0" u="none">
+                <a:solidFill>
+                  <a:srgbClr val="94A3B8"/>
+                </a:solidFill>
+                <a:latin typeface="Inter"/>
+              </a:rPr>
+              <a:t>Rename selected fields into consistent names.</a:t>
+            </a:r>
+          </a:p>
+        </p:txBody>
+      </p:sp>
+      <p:sp>
+        <p:nvSpPr>
+          <p:cNvPr id="25" name="TextBox 24"/>
+          <p:cNvSpPr txBox="1"/>
+          <p:nvPr/>
+        </p:nvSpPr>
+        <p:spPr>
+          <a:xfrm>
+            <a:off x="904875" y="4807967"/>
+            <a:ext cx="6215062" cy="274290"/>
+          </a:xfrm>
+          <a:prstGeom prst="rect">
+            <a:avLst/>
+          </a:prstGeom>
+          <a:noFill/>
+        </p:spPr>
+        <p:txBody>
+          <a:bodyPr wrap="none" lIns="0" tIns="0" rIns="0" bIns="0" anchor="t">
+            <a:spAutoFit/>
+          </a:bodyPr>
+          <a:lstStyle/>
+          <a:p>
+            <a:pPr algn="l">
+              <a:lnSpc>
+                <a:spcPts val="2160"/>
+              </a:lnSpc>
+            </a:pPr>
+            <a:r>
+              <a:rPr sz="1350" b="0" i="0" u="none">
+                <a:solidFill>
+                  <a:srgbClr val="94A3B8"/>
+                </a:solidFill>
+                <a:latin typeface="Inter"/>
+              </a:rPr>
+              <a:t>Remove duplicate records using selected identifiers.</a:t>
+            </a:r>
+          </a:p>
+        </p:txBody>
+      </p:sp>
+      <p:sp>
+        <p:nvSpPr>
+          <p:cNvPr id="26" name="TextBox 25"/>
+          <p:cNvSpPr txBox="1"/>
+          <p:nvPr/>
+        </p:nvSpPr>
+        <p:spPr>
+          <a:xfrm>
+            <a:off x="6715125" y="2663428"/>
+            <a:ext cx="5000625" cy="548580"/>
+          </a:xfrm>
+          <a:prstGeom prst="rect">
+            <a:avLst/>
+          </a:prstGeom>
+          <a:noFill/>
+        </p:spPr>
+        <p:txBody>
+          <a:bodyPr wrap="square" lIns="0" tIns="0" rIns="0" bIns="0" anchor="t">
+            <a:spAutoFit/>
+          </a:bodyPr>
+          <a:lstStyle/>
+          <a:p>
+            <a:pPr algn="l">
+              <a:lnSpc>
+                <a:spcPts val="2160"/>
+              </a:lnSpc>
+            </a:pPr>
+            <a:r>
+              <a:rPr sz="1350" b="1" i="0" u="none">
+                <a:solidFill>
+                  <a:srgbClr val="F8FAFC"/>
+                </a:solidFill>
+                <a:latin typeface="Inter"/>
+              </a:rPr>
+              <a:t>Customer/utility master:</a:t>
+            </a:r>
+            <a:r>
+              <a:rPr sz="1350" b="0" i="0" u="none">
+                <a:solidFill>
+                  <a:srgbClr val="94A3B8"/>
+                </a:solidFill>
+                <a:latin typeface="Inter"/>
+              </a:rPr>
+              <a:t> Prepare utility identifiers, names, state, type and customer-count attributes from billing data.</a:t>
+            </a:r>
+          </a:p>
+        </p:txBody>
+      </p:sp>
+      <p:sp>
+        <p:nvSpPr>
+          <p:cNvPr id="27" name="TextBox 26"/>
+          <p:cNvSpPr txBox="1"/>
+          <p:nvPr/>
+        </p:nvSpPr>
+        <p:spPr>
+          <a:xfrm>
+            <a:off x="6715125" y="3402509"/>
+            <a:ext cx="5000625" cy="822870"/>
+          </a:xfrm>
+          <a:prstGeom prst="rect">
+            <a:avLst/>
+          </a:prstGeom>
+          <a:noFill/>
+        </p:spPr>
+        <p:txBody>
+          <a:bodyPr wrap="square" lIns="0" tIns="0" rIns="0" bIns="0" anchor="t">
+            <a:spAutoFit/>
+          </a:bodyPr>
+          <a:lstStyle/>
+          <a:p>
+            <a:pPr algn="l">
+              <a:lnSpc>
+                <a:spcPts val="2160"/>
+              </a:lnSpc>
+            </a:pPr>
+            <a:r>
+              <a:rPr sz="1350" b="1" i="0" u="none">
+                <a:solidFill>
+                  <a:srgbClr val="F8FAFC"/>
+                </a:solidFill>
+                <a:latin typeface="Inter"/>
+              </a:rPr>
+              <a:t>Asset master:</a:t>
+            </a:r>
+            <a:r>
+              <a:rPr sz="1350" b="0" i="0" u="none">
+                <a:solidFill>
+                  <a:srgbClr val="94A3B8"/>
+                </a:solidFill>
+                <a:latin typeface="Inter"/>
+              </a:rPr>
+              <a:t> Prepare asset identifiers, product identifiers, asset types and failure-related attributes from maintenance data.</a:t>
+            </a:r>
+          </a:p>
+        </p:txBody>
+      </p:sp>
+      <p:sp>
+        <p:nvSpPr>
+          <p:cNvPr id="28" name="TextBox 27"/>
+          <p:cNvSpPr txBox="1"/>
+          <p:nvPr/>
+        </p:nvSpPr>
+        <p:spPr>
+          <a:xfrm>
+            <a:off x="6715125" y="4152677"/>
+            <a:ext cx="5000625" cy="548580"/>
+          </a:xfrm>
+          <a:prstGeom prst="rect">
+            <a:avLst/>
+          </a:prstGeom>
+          <a:noFill/>
+        </p:spPr>
+        <p:txBody>
+          <a:bodyPr wrap="square" lIns="0" tIns="0" rIns="0" bIns="0" anchor="t">
+            <a:spAutoFit/>
+          </a:bodyPr>
+          <a:lstStyle/>
+          <a:p>
+            <a:pPr algn="l">
+              <a:lnSpc>
+                <a:spcPts val="2160"/>
+              </a:lnSpc>
+            </a:pPr>
+            <a:r>
+              <a:rPr sz="1350" b="1" i="0" u="none">
+                <a:solidFill>
+                  <a:srgbClr val="F8FAFC"/>
+                </a:solidFill>
+                <a:latin typeface="Inter"/>
+              </a:rPr>
+              <a:t>Grid master:</a:t>
+            </a:r>
+            <a:r>
+              <a:rPr sz="1350" b="0" i="0" u="none">
+                <a:solidFill>
+                  <a:srgbClr val="94A3B8"/>
+                </a:solidFill>
+                <a:latin typeface="Inter"/>
+              </a:rPr>
+              <a:t> Extract distinct grid-segment identifiers from SCADA data.</a:t>
+            </a:r>
+          </a:p>
+        </p:txBody>
+      </p:sp>
+    </p:spTree>
+  </p:cSld>
+  <p:clrMapOvr>
+    <a:masterClrMapping/>
+  </p:clrMapOvr>
+</p:sld>
+</file>
+
+<file path=ppt/slides/slide15.xml><?xml version="1.0" encoding="utf-8"?>
+<p:sld xmlns:a="http://schemas.openxmlformats.org/drawingml/2006/main" xmlns:r="http://schemas.openxmlformats.org/officeDocument/2006/relationships" xmlns:p="http://schemas.openxmlformats.org/presentationml/2006/main">
+  <p:cSld>
+    <p:spTree>
+      <p:nvGrpSpPr>
+        <p:cNvPr id="1" name=""/>
+        <p:cNvGrpSpPr/>
+        <p:nvPr/>
+      </p:nvGrpSpPr>
+      <p:grpSpPr>
+        <a:xfrm>
+          <a:off x="0" y="0"/>
+          <a:ext cx="0" cy="0"/>
+          <a:chOff x="0" y="0"/>
+          <a:chExt cx="0" cy="0"/>
+        </a:xfrm>
+      </p:grpSpPr>
+      <p:pic>
+        <p:nvPicPr>
+          <p:cNvPr id="2" name="Picture 1" descr="image.png"/>
+          <p:cNvPicPr>
+            <a:picLocks noChangeAspect="1"/>
+          </p:cNvPicPr>
+          <p:nvPr/>
+        </p:nvPicPr>
+        <p:blipFill>
+          <a:blip r:embed="rId2"/>
+          <a:stretch>
+            <a:fillRect/>
+          </a:stretch>
+        </p:blipFill>
+        <p:spPr>
+          <a:xfrm>
+            <a:off x="0" y="0"/>
+            <a:ext cx="12192000" cy="6858000"/>
+          </a:xfrm>
+          <a:prstGeom prst="rect">
+            <a:avLst/>
+          </a:prstGeom>
+        </p:spPr>
+      </p:pic>
+      <p:pic>
+        <p:nvPicPr>
+          <p:cNvPr id="3" name="Picture 2" descr="image.png"/>
+          <p:cNvPicPr>
+            <a:picLocks noChangeAspect="1"/>
+          </p:cNvPicPr>
+          <p:nvPr/>
+        </p:nvPicPr>
+        <p:blipFill>
+          <a:blip r:embed="rId3"/>
+          <a:stretch>
+            <a:fillRect/>
+          </a:stretch>
+        </p:blipFill>
+        <p:spPr>
+          <a:xfrm>
+            <a:off x="876300" y="2545970"/>
+            <a:ext cx="114300" cy="200025"/>
+          </a:xfrm>
+          <a:prstGeom prst="rect">
+            <a:avLst/>
+          </a:prstGeom>
+        </p:spPr>
+      </p:pic>
+      <p:pic>
+        <p:nvPicPr>
+          <p:cNvPr id="4" name="Picture 3" descr="image.png"/>
+          <p:cNvPicPr>
+            <a:picLocks noChangeAspect="1"/>
+          </p:cNvPicPr>
+          <p:nvPr/>
+        </p:nvPicPr>
+        <p:blipFill>
+          <a:blip r:embed="rId3"/>
+          <a:stretch>
+            <a:fillRect/>
+          </a:stretch>
+        </p:blipFill>
+        <p:spPr>
+          <a:xfrm>
+            <a:off x="876300" y="3189800"/>
+            <a:ext cx="114300" cy="200025"/>
+          </a:xfrm>
+          <a:prstGeom prst="rect">
+            <a:avLst/>
+          </a:prstGeom>
+        </p:spPr>
+      </p:pic>
+      <p:pic>
+        <p:nvPicPr>
+          <p:cNvPr id="5" name="Picture 4" descr="image.png"/>
+          <p:cNvPicPr>
+            <a:picLocks noChangeAspect="1"/>
+          </p:cNvPicPr>
+          <p:nvPr/>
+        </p:nvPicPr>
+        <p:blipFill>
+          <a:blip r:embed="rId3"/>
+          <a:stretch>
+            <a:fillRect/>
+          </a:stretch>
+        </p:blipFill>
+        <p:spPr>
+          <a:xfrm>
+            <a:off x="876300" y="3833631"/>
+            <a:ext cx="114300" cy="200025"/>
+          </a:xfrm>
+          <a:prstGeom prst="rect">
+            <a:avLst/>
+          </a:prstGeom>
+        </p:spPr>
+      </p:pic>
+      <p:pic>
+        <p:nvPicPr>
+          <p:cNvPr id="6" name="Picture 5" descr="image.png"/>
+          <p:cNvPicPr>
+            <a:picLocks noChangeAspect="1"/>
+          </p:cNvPicPr>
+          <p:nvPr/>
+        </p:nvPicPr>
+        <p:blipFill>
+          <a:blip r:embed="rId3"/>
+          <a:stretch>
+            <a:fillRect/>
+          </a:stretch>
+        </p:blipFill>
+        <p:spPr>
+          <a:xfrm>
+            <a:off x="876300" y="4477461"/>
+            <a:ext cx="114300" cy="200025"/>
+          </a:xfrm>
+          <a:prstGeom prst="rect">
+            <a:avLst/>
+          </a:prstGeom>
+        </p:spPr>
+      </p:pic>
+      <p:pic>
+        <p:nvPicPr>
+          <p:cNvPr id="7" name="Picture 6" descr="image.png"/>
+          <p:cNvPicPr>
+            <a:picLocks noChangeAspect="1"/>
+          </p:cNvPicPr>
+          <p:nvPr/>
+        </p:nvPicPr>
+        <p:blipFill>
+          <a:blip r:embed="rId3"/>
+          <a:stretch>
+            <a:fillRect/>
+          </a:stretch>
+        </p:blipFill>
+        <p:spPr>
+          <a:xfrm>
+            <a:off x="876300" y="4847001"/>
+            <a:ext cx="114300" cy="200025"/>
+          </a:xfrm>
+          <a:prstGeom prst="rect">
+            <a:avLst/>
+          </a:prstGeom>
+        </p:spPr>
+      </p:pic>
+      <p:pic>
+        <p:nvPicPr>
+          <p:cNvPr id="8" name="Picture 7" descr="image.png"/>
+          <p:cNvPicPr>
+            <a:picLocks noChangeAspect="1"/>
+          </p:cNvPicPr>
+          <p:nvPr/>
+        </p:nvPicPr>
+        <p:blipFill>
+          <a:blip r:embed="rId3"/>
+          <a:stretch>
+            <a:fillRect/>
+          </a:stretch>
+        </p:blipFill>
+        <p:spPr>
+          <a:xfrm>
+            <a:off x="876300" y="5169086"/>
+            <a:ext cx="114300" cy="200025"/>
+          </a:xfrm>
+          <a:prstGeom prst="rect">
+            <a:avLst/>
+          </a:prstGeom>
+        </p:spPr>
+      </p:pic>
+      <p:pic>
+        <p:nvPicPr>
+          <p:cNvPr id="9" name="Picture 8" descr="image.png"/>
+          <p:cNvPicPr>
+            <a:picLocks noChangeAspect="1"/>
+          </p:cNvPicPr>
+          <p:nvPr/>
+        </p:nvPicPr>
+        <p:blipFill>
+          <a:blip r:embed="rId4"/>
+          <a:stretch>
+            <a:fillRect/>
+          </a:stretch>
+        </p:blipFill>
+        <p:spPr>
+          <a:xfrm>
+            <a:off x="6686550" y="2545970"/>
+            <a:ext cx="190500" cy="200025"/>
+          </a:xfrm>
+          <a:prstGeom prst="rect">
+            <a:avLst/>
+          </a:prstGeom>
+        </p:spPr>
+      </p:pic>
+      <p:pic>
+        <p:nvPicPr>
+          <p:cNvPr id="10" name="Picture 9" descr="image.png"/>
+          <p:cNvPicPr>
+            <a:picLocks noChangeAspect="1"/>
+          </p:cNvPicPr>
+          <p:nvPr/>
+        </p:nvPicPr>
+        <p:blipFill>
+          <a:blip r:embed="rId4"/>
+          <a:stretch>
+            <a:fillRect/>
+          </a:stretch>
+        </p:blipFill>
+        <p:spPr>
+          <a:xfrm>
+            <a:off x="6686550" y="3285050"/>
+            <a:ext cx="190500" cy="200025"/>
+          </a:xfrm>
+          <a:prstGeom prst="rect">
+            <a:avLst/>
+          </a:prstGeom>
+        </p:spPr>
+      </p:pic>
+      <p:pic>
+        <p:nvPicPr>
+          <p:cNvPr id="11" name="Picture 10" descr="image.png"/>
+          <p:cNvPicPr>
+            <a:picLocks noChangeAspect="1"/>
+          </p:cNvPicPr>
+          <p:nvPr/>
+        </p:nvPicPr>
+        <p:blipFill>
+          <a:blip r:embed="rId4"/>
+          <a:stretch>
+            <a:fillRect/>
+          </a:stretch>
+        </p:blipFill>
+        <p:spPr>
+          <a:xfrm>
+            <a:off x="6686550" y="3749840"/>
+            <a:ext cx="190500" cy="200025"/>
+          </a:xfrm>
+          <a:prstGeom prst="rect">
+            <a:avLst/>
+          </a:prstGeom>
+        </p:spPr>
+      </p:pic>
+      <p:pic>
+        <p:nvPicPr>
+          <p:cNvPr id="12" name="Picture 11" descr="image.png"/>
+          <p:cNvPicPr>
+            <a:picLocks noChangeAspect="1"/>
+          </p:cNvPicPr>
+          <p:nvPr/>
+        </p:nvPicPr>
+        <p:blipFill>
+          <a:blip r:embed="rId4"/>
+          <a:stretch>
+            <a:fillRect/>
+          </a:stretch>
+        </p:blipFill>
+        <p:spPr>
+          <a:xfrm>
+            <a:off x="6686550" y="4214631"/>
+            <a:ext cx="190500" cy="200025"/>
+          </a:xfrm>
+          <a:prstGeom prst="rect">
+            <a:avLst/>
+          </a:prstGeom>
+        </p:spPr>
+      </p:pic>
+      <p:pic>
+        <p:nvPicPr>
+          <p:cNvPr id="13" name="Picture 12" descr="image.png"/>
+          <p:cNvPicPr>
+            <a:picLocks noChangeAspect="1"/>
+          </p:cNvPicPr>
+          <p:nvPr/>
+        </p:nvPicPr>
+        <p:blipFill>
+          <a:blip r:embed="rId4"/>
+          <a:stretch>
+            <a:fillRect/>
+          </a:stretch>
+        </p:blipFill>
+        <p:spPr>
+          <a:xfrm>
+            <a:off x="6686550" y="4679421"/>
+            <a:ext cx="190500" cy="200025"/>
+          </a:xfrm>
+          <a:prstGeom prst="rect">
+            <a:avLst/>
+          </a:prstGeom>
+        </p:spPr>
+      </p:pic>
+      <p:sp>
+        <p:nvSpPr>
+          <p:cNvPr id="14" name="Rectangle 13"/>
+          <p:cNvSpPr/>
+          <p:nvPr/>
+        </p:nvSpPr>
+        <p:spPr>
+          <a:xfrm>
+            <a:off x="571500" y="476250"/>
+            <a:ext cx="57150" cy="502890"/>
+          </a:xfrm>
+          <a:prstGeom prst="rect">
+            <a:avLst/>
+          </a:prstGeom>
+          <a:solidFill>
+            <a:srgbClr val="0EA5E9"/>
+          </a:solidFill>
+          <a:ln>
+            <a:noFill/>
+          </a:ln>
+          <a:effectLst/>
+        </p:spPr>
+        <p:style>
+          <a:lnRef idx="1">
+            <a:schemeClr val="accent1"/>
+          </a:lnRef>
+          <a:fillRef idx="3">
+            <a:schemeClr val="accent1"/>
+          </a:fillRef>
+          <a:effectRef idx="2">
+            <a:schemeClr val="accent1"/>
+          </a:effectRef>
+          <a:fontRef idx="minor">
+            <a:schemeClr val="lt1"/>
+          </a:fontRef>
+        </p:style>
+        <p:txBody>
+          <a:bodyPr rtlCol="0" anchor="ctr"/>
+          <a:lstStyle/>
+          <a:p>
+            <a:pPr algn="ctr"/>
+            <a:endParaRPr/>
+          </a:p>
+        </p:txBody>
+      </p:sp>
+      <p:sp>
+        <p:nvSpPr>
+          <p:cNvPr id="15" name="Rounded Rectangle 14"/>
+          <p:cNvSpPr/>
+          <p:nvPr/>
+        </p:nvSpPr>
+        <p:spPr>
+          <a:xfrm>
+            <a:off x="628650" y="1930714"/>
+            <a:ext cx="5238750" cy="3929431"/>
+          </a:xfrm>
+          <a:prstGeom prst="roundRect">
+            <a:avLst>
+              <a:gd name="adj" fmla="val 3365"/>
+            </a:avLst>
+          </a:prstGeom>
+          <a:solidFill>
+            <a:srgbClr val="1E293B"/>
+          </a:solidFill>
+          <a:ln w="9525">
+            <a:solidFill>
+              <a:srgbClr val="334155"/>
+            </a:solidFill>
+          </a:ln>
+          <a:effectLst/>
+        </p:spPr>
+        <p:style>
+          <a:lnRef idx="1">
+            <a:schemeClr val="accent1"/>
+          </a:lnRef>
+          <a:fillRef idx="3">
+            <a:schemeClr val="accent1"/>
+          </a:fillRef>
+          <a:effectRef idx="2">
+            <a:schemeClr val="accent1"/>
+          </a:effectRef>
+          <a:fontRef idx="minor">
+            <a:schemeClr val="lt1"/>
+          </a:fontRef>
+        </p:style>
+        <p:txBody>
+          <a:bodyPr rtlCol="0" anchor="ctr"/>
+          <a:lstStyle/>
+          <a:p>
+            <a:pPr algn="ctr"/>
+            <a:endParaRPr/>
+          </a:p>
+        </p:txBody>
+      </p:sp>
+      <p:sp>
+        <p:nvSpPr>
+          <p:cNvPr id="16" name="Rounded Rectangle 15"/>
+          <p:cNvSpPr/>
+          <p:nvPr/>
+        </p:nvSpPr>
+        <p:spPr>
+          <a:xfrm>
+            <a:off x="6438900" y="1930714"/>
+            <a:ext cx="5238750" cy="3929431"/>
+          </a:xfrm>
+          <a:prstGeom prst="roundRect">
+            <a:avLst>
+              <a:gd name="adj" fmla="val 3365"/>
+            </a:avLst>
+          </a:prstGeom>
+          <a:solidFill>
+            <a:srgbClr val="1E293B"/>
+          </a:solidFill>
+          <a:ln w="9525">
+            <a:solidFill>
+              <a:srgbClr val="334155"/>
+            </a:solidFill>
+          </a:ln>
+          <a:effectLst/>
+        </p:spPr>
+        <p:style>
+          <a:lnRef idx="1">
+            <a:schemeClr val="accent1"/>
+          </a:lnRef>
+          <a:fillRef idx="3">
+            <a:schemeClr val="accent1"/>
+          </a:fillRef>
+          <a:effectRef idx="2">
+            <a:schemeClr val="accent1"/>
+          </a:effectRef>
+          <a:fontRef idx="minor">
+            <a:schemeClr val="lt1"/>
+          </a:fontRef>
+        </p:style>
+        <p:txBody>
+          <a:bodyPr rtlCol="0" anchor="ctr"/>
+          <a:lstStyle/>
+          <a:p>
+            <a:pPr algn="ctr"/>
+            <a:endParaRPr/>
+          </a:p>
+        </p:txBody>
+      </p:sp>
+      <p:sp>
+        <p:nvSpPr>
+          <p:cNvPr id="17" name="Rectangle 16"/>
+          <p:cNvSpPr/>
+          <p:nvPr/>
+        </p:nvSpPr>
+        <p:spPr>
+          <a:xfrm>
+            <a:off x="6686550" y="4946290"/>
+            <a:ext cx="4743450" cy="748605"/>
+          </a:xfrm>
+          <a:prstGeom prst="rect">
+            <a:avLst/>
+          </a:prstGeom>
+          <a:noFill/>
+          <a:ln>
+            <a:noFill/>
+          </a:ln>
+          <a:effectLst/>
+        </p:spPr>
+        <p:style>
+          <a:lnRef idx="1">
+            <a:schemeClr val="accent1"/>
+          </a:lnRef>
+          <a:fillRef idx="3">
+            <a:schemeClr val="accent1"/>
+          </a:fillRef>
+          <a:effectRef idx="2">
+            <a:schemeClr val="accent1"/>
+          </a:effectRef>
+          <a:fontRef idx="minor">
+            <a:schemeClr val="lt1"/>
+          </a:fontRef>
+        </p:style>
+        <p:txBody>
+          <a:bodyPr rtlCol="0" anchor="ctr"/>
+          <a:lstStyle/>
+          <a:p>
+            <a:pPr algn="ctr"/>
+            <a:endParaRPr/>
+          </a:p>
+        </p:txBody>
+      </p:sp>
+      <p:sp>
+        <p:nvSpPr>
+          <p:cNvPr id="18" name="Rectangle 17"/>
+          <p:cNvSpPr/>
+          <p:nvPr/>
+        </p:nvSpPr>
+        <p:spPr>
+          <a:xfrm>
+            <a:off x="6686550" y="5027083"/>
+            <a:ext cx="4743450" cy="9525"/>
+          </a:xfrm>
+          <a:prstGeom prst="rect">
+            <a:avLst/>
+          </a:prstGeom>
+          <a:solidFill>
+            <a:srgbClr val="334155"/>
+          </a:solidFill>
+          <a:ln>
+            <a:noFill/>
+          </a:ln>
+          <a:effectLst/>
+        </p:spPr>
+        <p:style>
+          <a:lnRef idx="1">
+            <a:schemeClr val="accent1"/>
+          </a:lnRef>
+          <a:fillRef idx="3">
+            <a:schemeClr val="accent1"/>
+          </a:fillRef>
+          <a:effectRef idx="2">
+            <a:schemeClr val="accent1"/>
+          </a:effectRef>
+          <a:fontRef idx="minor">
+            <a:schemeClr val="lt1"/>
+          </a:fontRef>
+        </p:style>
+        <p:txBody>
+          <a:bodyPr rtlCol="0" anchor="ctr"/>
+          <a:lstStyle/>
+          <a:p>
+            <a:pPr algn="ctr"/>
+            <a:endParaRPr/>
+          </a:p>
+        </p:txBody>
+      </p:sp>
+      <p:pic>
+        <p:nvPicPr>
+          <p:cNvPr id="19" name="Picture 18" descr="image.png"/>
+          <p:cNvPicPr>
+            <a:picLocks noChangeAspect="1"/>
+          </p:cNvPicPr>
+          <p:nvPr/>
+        </p:nvPicPr>
+        <p:blipFill>
+          <a:blip r:embed="rId5"/>
+          <a:stretch>
+            <a:fillRect/>
+          </a:stretch>
+        </p:blipFill>
+        <p:spPr>
+          <a:xfrm>
+            <a:off x="876300" y="2197414"/>
+            <a:ext cx="219075" cy="171450"/>
+          </a:xfrm>
+          <a:prstGeom prst="rect">
+            <a:avLst/>
+          </a:prstGeom>
+        </p:spPr>
+      </p:pic>
+      <p:pic>
+        <p:nvPicPr>
+          <p:cNvPr id="20" name="Picture 19" descr="image.png"/>
+          <p:cNvPicPr>
+            <a:picLocks noChangeAspect="1"/>
+          </p:cNvPicPr>
+          <p:nvPr/>
+        </p:nvPicPr>
+        <p:blipFill>
+          <a:blip r:embed="rId6"/>
+          <a:stretch>
+            <a:fillRect/>
+          </a:stretch>
+        </p:blipFill>
+        <p:spPr>
+          <a:xfrm>
+            <a:off x="6686550" y="2197414"/>
+            <a:ext cx="171450" cy="171450"/>
+          </a:xfrm>
+          <a:prstGeom prst="rect">
+            <a:avLst/>
+          </a:prstGeom>
+        </p:spPr>
+      </p:pic>
+      <p:sp>
+        <p:nvSpPr>
+          <p:cNvPr id="21" name="TextBox 20"/>
+          <p:cNvSpPr txBox="1"/>
+          <p:nvPr/>
+        </p:nvSpPr>
+        <p:spPr>
+          <a:xfrm>
+            <a:off x="762000" y="476250"/>
+            <a:ext cx="11430000" cy="502890"/>
+          </a:xfrm>
+          <a:prstGeom prst="rect">
+            <a:avLst/>
+          </a:prstGeom>
+          <a:noFill/>
+        </p:spPr>
+        <p:txBody>
+          <a:bodyPr wrap="none" lIns="0" tIns="0" rIns="0" bIns="0" anchor="t">
+            <a:spAutoFit/>
+          </a:bodyPr>
+          <a:lstStyle/>
+          <a:p>
+            <a:pPr algn="l">
+              <a:lnSpc>
+                <a:spcPts val="3959"/>
+              </a:lnSpc>
+            </a:pPr>
+            <a:r>
+              <a:rPr sz="3300" b="1" i="0" u="none">
+                <a:solidFill>
+                  <a:srgbClr val="F8FAFC"/>
+                </a:solidFill>
+                <a:latin typeface="Inter"/>
+              </a:rPr>
+              <a:t>CROSS-DATASET COLUMN MAPPING</a:t>
+            </a:r>
+          </a:p>
+        </p:txBody>
+      </p:sp>
+      <p:sp>
+        <p:nvSpPr>
+          <p:cNvPr id="22" name="TextBox 21"/>
+          <p:cNvSpPr txBox="1"/>
+          <p:nvPr/>
+        </p:nvSpPr>
+        <p:spPr>
+          <a:xfrm>
+            <a:off x="628650" y="1166068"/>
+            <a:ext cx="11620500" cy="274290"/>
+          </a:xfrm>
+          <a:prstGeom prst="rect">
+            <a:avLst/>
+          </a:prstGeom>
+          <a:noFill/>
+        </p:spPr>
+        <p:txBody>
+          <a:bodyPr wrap="none" lIns="0" tIns="0" rIns="0" bIns="0" anchor="t">
+            <a:spAutoFit/>
+          </a:bodyPr>
+          <a:lstStyle/>
+          <a:p>
+            <a:pPr algn="l">
+              <a:lnSpc>
+                <a:spcPts val="2160"/>
+              </a:lnSpc>
+            </a:pPr>
+            <a:r>
+              <a:rPr sz="1800" b="1" i="0" u="none">
+                <a:solidFill>
+                  <a:srgbClr val="10B981"/>
+                </a:solidFill>
+                <a:latin typeface="Inter"/>
+              </a:rPr>
+              <a:t>Sprint 2 Objective</a:t>
+            </a:r>
+          </a:p>
+        </p:txBody>
+      </p:sp>
+      <p:sp>
+        <p:nvSpPr>
+          <p:cNvPr id="23" name="TextBox 22"/>
+          <p:cNvSpPr txBox="1"/>
+          <p:nvPr/>
+        </p:nvSpPr>
+        <p:spPr>
+          <a:xfrm>
+            <a:off x="628650" y="1493713"/>
+            <a:ext cx="11620500" cy="274290"/>
+          </a:xfrm>
+          <a:prstGeom prst="rect">
+            <a:avLst/>
+          </a:prstGeom>
+          <a:noFill/>
+        </p:spPr>
+        <p:txBody>
+          <a:bodyPr wrap="none" lIns="0" tIns="0" rIns="0" bIns="0" anchor="t">
+            <a:spAutoFit/>
+          </a:bodyPr>
+          <a:lstStyle/>
+          <a:p>
+            <a:pPr algn="l">
+              <a:lnSpc>
+                <a:spcPts val="2160"/>
+              </a:lnSpc>
+            </a:pPr>
+            <a:r>
+              <a:rPr sz="1350" b="0" i="0" u="none">
+                <a:solidFill>
+                  <a:srgbClr val="94A3B8"/>
+                </a:solidFill>
+                <a:latin typeface="Inter"/>
+              </a:rPr>
+              <a:t>Identify related attributes across heterogeneous datasets and assess whether they may support integration.</a:t>
+            </a:r>
+          </a:p>
+        </p:txBody>
+      </p:sp>
+      <p:sp>
+        <p:nvSpPr>
+          <p:cNvPr id="24" name="TextBox 23"/>
+          <p:cNvSpPr txBox="1"/>
+          <p:nvPr/>
+        </p:nvSpPr>
+        <p:spPr>
+          <a:xfrm>
+            <a:off x="628650" y="6385061"/>
+            <a:ext cx="11620500" cy="0"/>
+          </a:xfrm>
+          <a:prstGeom prst="rect">
+            <a:avLst/>
+          </a:prstGeom>
+          <a:noFill/>
+        </p:spPr>
+        <p:txBody>
+          <a:bodyPr wrap="none" lIns="0" tIns="0" rIns="0" bIns="0" anchor="t">
+            <a:spAutoFit/>
+          </a:bodyPr>
+          <a:lstStyle/>
+          <a:p>
+            <a:pPr algn="l">
+              <a:lnSpc>
+                <a:spcPts val="1679"/>
+              </a:lnSpc>
+            </a:pPr>
+            <a:r>
+              <a:rPr sz="1050" b="1" i="1" u="none">
+                <a:solidFill>
+                  <a:srgbClr val="EF4444"/>
+                </a:solidFill>
+                <a:latin typeface="Inter"/>
+              </a:rPr>
+              <a:t>Important:</a:t>
+            </a:r>
+            <a:r>
+              <a:rPr sz="1050" b="0" i="1" u="none">
+                <a:solidFill>
+                  <a:srgbClr val="EF4444"/>
+                </a:solidFill>
+                <a:latin typeface="Inter"/>
+              </a:rPr>
+              <a:t> A related attribute does not automatically establish a valid join key. Mapping relationships must be verified before integrating datasets.</a:t>
+            </a:r>
+          </a:p>
+        </p:txBody>
+      </p:sp>
+      <p:sp>
+        <p:nvSpPr>
+          <p:cNvPr id="25" name="TextBox 24"/>
+          <p:cNvSpPr txBox="1"/>
+          <p:nvPr/>
+        </p:nvSpPr>
+        <p:spPr>
+          <a:xfrm>
+            <a:off x="876300" y="2178364"/>
+            <a:ext cx="6225778" cy="205680"/>
+          </a:xfrm>
+          <a:prstGeom prst="rect">
+            <a:avLst/>
+          </a:prstGeom>
+          <a:noFill/>
+        </p:spPr>
+        <p:txBody>
+          <a:bodyPr wrap="none" lIns="295275" tIns="0" rIns="0" bIns="0" anchor="t">
+            <a:spAutoFit/>
+          </a:bodyPr>
+          <a:lstStyle/>
+          <a:p>
+            <a:pPr algn="l">
+              <a:lnSpc>
+                <a:spcPts val="1620"/>
+              </a:lnSpc>
+            </a:pPr>
+            <a:r>
+              <a:rPr sz="1350" b="1" i="0" u="none">
+                <a:solidFill>
+                  <a:srgbClr val="0EA5E9"/>
+                </a:solidFill>
+                <a:latin typeface="Inter"/>
+              </a:rPr>
+              <a:t>Relationships Examined</a:t>
+            </a:r>
+          </a:p>
+        </p:txBody>
+      </p:sp>
+      <p:sp>
+        <p:nvSpPr>
+          <p:cNvPr id="26" name="TextBox 25"/>
+          <p:cNvSpPr txBox="1"/>
+          <p:nvPr/>
+        </p:nvSpPr>
+        <p:spPr>
+          <a:xfrm>
+            <a:off x="6686550" y="2178364"/>
+            <a:ext cx="5562600" cy="205680"/>
+          </a:xfrm>
+          <a:prstGeom prst="rect">
+            <a:avLst/>
+          </a:prstGeom>
+          <a:noFill/>
+        </p:spPr>
+        <p:txBody>
+          <a:bodyPr wrap="none" lIns="247650" tIns="0" rIns="0" bIns="0" anchor="t">
+            <a:spAutoFit/>
+          </a:bodyPr>
+          <a:lstStyle/>
+          <a:p>
+            <a:pPr algn="l">
+              <a:lnSpc>
+                <a:spcPts val="1620"/>
+              </a:lnSpc>
+            </a:pPr>
+            <a:r>
+              <a:rPr sz="1350" b="1" i="0" u="none">
+                <a:solidFill>
+                  <a:srgbClr val="0EA5E9"/>
+                </a:solidFill>
+                <a:latin typeface="Inter"/>
+              </a:rPr>
+              <a:t>Mapping Checks</a:t>
+            </a:r>
+          </a:p>
+        </p:txBody>
+      </p:sp>
+      <p:sp>
+        <p:nvSpPr>
+          <p:cNvPr id="27" name="TextBox 26"/>
+          <p:cNvSpPr txBox="1"/>
+          <p:nvPr/>
+        </p:nvSpPr>
+        <p:spPr>
+          <a:xfrm>
+            <a:off x="1209675" y="2526920"/>
+            <a:ext cx="4505325" cy="548580"/>
+          </a:xfrm>
+          <a:prstGeom prst="rect">
+            <a:avLst/>
+          </a:prstGeom>
+          <a:noFill/>
+        </p:spPr>
+        <p:txBody>
+          <a:bodyPr wrap="square" lIns="0" tIns="0" rIns="0" bIns="0" anchor="t">
+            <a:spAutoFit/>
+          </a:bodyPr>
+          <a:lstStyle/>
+          <a:p>
+            <a:pPr algn="l">
+              <a:lnSpc>
+                <a:spcPts val="2160"/>
+              </a:lnSpc>
+            </a:pPr>
+            <a:r>
+              <a:rPr sz="1350" b="1" i="0" u="none">
+                <a:solidFill>
+                  <a:srgbClr val="F8FAFC"/>
+                </a:solidFill>
+                <a:latin typeface="Inter"/>
+              </a:rPr>
+              <a:t>Renewable energy monitoring ↔ OWID energy data:</a:t>
+            </a:r>
+            <a:r>
+              <a:rPr sz="1350" b="0" i="0" u="none">
+                <a:solidFill>
+                  <a:srgbClr val="94A3B8"/>
+                </a:solidFill>
+                <a:latin typeface="Inter"/>
+              </a:rPr>
+              <a:t> country, year and ISO code.</a:t>
+            </a:r>
+          </a:p>
+        </p:txBody>
+      </p:sp>
+      <p:sp>
+        <p:nvSpPr>
+          <p:cNvPr id="28" name="TextBox 27"/>
+          <p:cNvSpPr txBox="1"/>
+          <p:nvPr/>
+        </p:nvSpPr>
+        <p:spPr>
+          <a:xfrm>
+            <a:off x="1209675" y="3170750"/>
+            <a:ext cx="4505325" cy="548580"/>
+          </a:xfrm>
+          <a:prstGeom prst="rect">
+            <a:avLst/>
+          </a:prstGeom>
+          <a:noFill/>
+        </p:spPr>
+        <p:txBody>
+          <a:bodyPr wrap="square" lIns="0" tIns="0" rIns="0" bIns="0" anchor="t">
+            <a:spAutoFit/>
+          </a:bodyPr>
+          <a:lstStyle/>
+          <a:p>
+            <a:pPr algn="l">
+              <a:lnSpc>
+                <a:spcPts val="2160"/>
+              </a:lnSpc>
+            </a:pPr>
+            <a:r>
+              <a:rPr sz="1350" b="1" i="0" u="none">
+                <a:solidFill>
+                  <a:srgbClr val="F8FAFC"/>
+                </a:solidFill>
+                <a:latin typeface="Inter"/>
+              </a:rPr>
+              <a:t>Smart meter ↔ IIoT:</a:t>
+            </a:r>
+            <a:r>
+              <a:rPr sz="1350" b="0" i="0" u="none">
+                <a:solidFill>
+                  <a:srgbClr val="94A3B8"/>
+                </a:solidFill>
+                <a:latin typeface="Inter"/>
+              </a:rPr>
+              <a:t> timestamp, energy consumption, temperature and humidity.</a:t>
+            </a:r>
+          </a:p>
+        </p:txBody>
+      </p:sp>
+      <p:sp>
+        <p:nvSpPr>
+          <p:cNvPr id="29" name="TextBox 28"/>
+          <p:cNvSpPr txBox="1"/>
+          <p:nvPr/>
+        </p:nvSpPr>
+        <p:spPr>
+          <a:xfrm>
+            <a:off x="1209675" y="3814581"/>
+            <a:ext cx="4505325" cy="548580"/>
+          </a:xfrm>
+          <a:prstGeom prst="rect">
+            <a:avLst/>
+          </a:prstGeom>
+          <a:noFill/>
+        </p:spPr>
+        <p:txBody>
+          <a:bodyPr wrap="square" lIns="0" tIns="0" rIns="0" bIns="0" anchor="t">
+            <a:spAutoFit/>
+          </a:bodyPr>
+          <a:lstStyle/>
+          <a:p>
+            <a:pPr algn="l">
+              <a:lnSpc>
+                <a:spcPts val="2160"/>
+              </a:lnSpc>
+            </a:pPr>
+            <a:r>
+              <a:rPr sz="1350" b="1" i="0" u="none">
+                <a:solidFill>
+                  <a:srgbClr val="F8FAFC"/>
+                </a:solidFill>
+                <a:latin typeface="Inter"/>
+              </a:rPr>
+              <a:t>SCADA ↔ IIoT:</a:t>
+            </a:r>
+            <a:r>
+              <a:rPr sz="1350" b="0" i="0" u="none">
+                <a:solidFill>
+                  <a:srgbClr val="94A3B8"/>
+                </a:solidFill>
+                <a:latin typeface="Inter"/>
+              </a:rPr>
+              <a:t> operational timestamp, energy consumption and temperature.</a:t>
+            </a:r>
+          </a:p>
+        </p:txBody>
+      </p:sp>
+      <p:sp>
+        <p:nvSpPr>
+          <p:cNvPr id="30" name="TextBox 29"/>
+          <p:cNvSpPr txBox="1"/>
+          <p:nvPr/>
+        </p:nvSpPr>
+        <p:spPr>
+          <a:xfrm>
+            <a:off x="1209675" y="4458411"/>
+            <a:ext cx="5595937" cy="274290"/>
+          </a:xfrm>
+          <a:prstGeom prst="rect">
+            <a:avLst/>
+          </a:prstGeom>
+          <a:noFill/>
+        </p:spPr>
+        <p:txBody>
+          <a:bodyPr wrap="none" lIns="0" tIns="0" rIns="0" bIns="0" anchor="t">
+            <a:spAutoFit/>
+          </a:bodyPr>
+          <a:lstStyle/>
+          <a:p>
+            <a:pPr algn="l">
+              <a:lnSpc>
+                <a:spcPts val="2160"/>
+              </a:lnSpc>
+            </a:pPr>
+            <a:r>
+              <a:rPr sz="1350" b="1" i="0" u="none">
+                <a:solidFill>
+                  <a:srgbClr val="F8FAFC"/>
+                </a:solidFill>
+                <a:latin typeface="Inter"/>
+              </a:rPr>
+              <a:t>SCADA ↔ Smart meter:</a:t>
+            </a:r>
+            <a:r>
+              <a:rPr sz="1350" b="0" i="0" u="none">
+                <a:solidFill>
+                  <a:srgbClr val="94A3B8"/>
+                </a:solidFill>
+                <a:latin typeface="Inter"/>
+              </a:rPr>
+              <a:t> timestamp and temperature.</a:t>
+            </a:r>
+          </a:p>
+        </p:txBody>
+      </p:sp>
+      <p:sp>
+        <p:nvSpPr>
+          <p:cNvPr id="31" name="TextBox 30"/>
+          <p:cNvSpPr txBox="1"/>
+          <p:nvPr/>
+        </p:nvSpPr>
+        <p:spPr>
+          <a:xfrm>
+            <a:off x="1209675" y="4827951"/>
+            <a:ext cx="4505325" cy="548580"/>
+          </a:xfrm>
+          <a:prstGeom prst="rect">
+            <a:avLst/>
+          </a:prstGeom>
+          <a:noFill/>
+        </p:spPr>
+        <p:txBody>
+          <a:bodyPr wrap="square" lIns="0" tIns="0" rIns="0" bIns="0" anchor="t">
+            <a:spAutoFit/>
+          </a:bodyPr>
+          <a:lstStyle/>
+          <a:p>
+            <a:pPr algn="l">
+              <a:lnSpc>
+                <a:spcPts val="2160"/>
+              </a:lnSpc>
+            </a:pPr>
+            <a:r>
+              <a:rPr sz="1350" b="1" i="0" u="none">
+                <a:solidFill>
+                  <a:srgbClr val="F8FAFC"/>
+                </a:solidFill>
+                <a:latin typeface="Inter"/>
+              </a:rPr>
+              <a:t>OMS ↔ Billing:</a:t>
+            </a:r>
+            <a:r>
+              <a:rPr sz="1350" b="0" i="0" u="none">
+                <a:solidFill>
+                  <a:srgbClr val="94A3B8"/>
+                </a:solidFill>
+                <a:latin typeface="Inter"/>
+              </a:rPr>
+              <a:t> geographic and customer-related attributes.</a:t>
+            </a:r>
+          </a:p>
+        </p:txBody>
+      </p:sp>
+      <p:sp>
+        <p:nvSpPr>
+          <p:cNvPr id="32" name="TextBox 31"/>
+          <p:cNvSpPr txBox="1"/>
+          <p:nvPr/>
+        </p:nvSpPr>
+        <p:spPr>
+          <a:xfrm>
+            <a:off x="1209675" y="5150036"/>
+            <a:ext cx="4505325" cy="548580"/>
+          </a:xfrm>
+          <a:prstGeom prst="rect">
+            <a:avLst/>
+          </a:prstGeom>
+          <a:noFill/>
+        </p:spPr>
+        <p:txBody>
+          <a:bodyPr wrap="square" lIns="0" tIns="0" rIns="0" bIns="0" anchor="t">
+            <a:spAutoFit/>
+          </a:bodyPr>
+          <a:lstStyle/>
+          <a:p>
+            <a:pPr algn="l">
+              <a:lnSpc>
+                <a:spcPts val="2160"/>
+              </a:lnSpc>
+            </a:pPr>
+            <a:r>
+              <a:rPr sz="1350" b="1" i="0" u="none">
+                <a:solidFill>
+                  <a:srgbClr val="F8FAFC"/>
+                </a:solidFill>
+                <a:latin typeface="Inter"/>
+              </a:rPr>
+              <a:t>OMS ↔ Renewable energy data:</a:t>
+            </a:r>
+            <a:r>
+              <a:rPr sz="1350" b="0" i="0" u="none">
+                <a:solidFill>
+                  <a:srgbClr val="94A3B8"/>
+                </a:solidFill>
+                <a:latin typeface="Inter"/>
+              </a:rPr>
+              <a:t> year and geographic attributes.</a:t>
+            </a:r>
+          </a:p>
+        </p:txBody>
+      </p:sp>
+      <p:sp>
+        <p:nvSpPr>
+          <p:cNvPr id="33" name="TextBox 32"/>
+          <p:cNvSpPr txBox="1"/>
+          <p:nvPr/>
+        </p:nvSpPr>
+        <p:spPr>
+          <a:xfrm>
+            <a:off x="7019925" y="2526920"/>
+            <a:ext cx="4505325" cy="548580"/>
+          </a:xfrm>
+          <a:prstGeom prst="rect">
+            <a:avLst/>
+          </a:prstGeom>
+          <a:noFill/>
+        </p:spPr>
+        <p:txBody>
+          <a:bodyPr wrap="square" lIns="0" tIns="0" rIns="0" bIns="0" anchor="t">
+            <a:spAutoFit/>
+          </a:bodyPr>
+          <a:lstStyle/>
+          <a:p>
+            <a:pPr algn="l">
+              <a:lnSpc>
+                <a:spcPts val="2160"/>
+              </a:lnSpc>
+            </a:pPr>
+            <a:r>
+              <a:rPr sz="1350" b="0" i="0" u="none">
+                <a:solidFill>
+                  <a:srgbClr val="94A3B8"/>
+                </a:solidFill>
+                <a:latin typeface="Inter"/>
+              </a:rPr>
+              <a:t>Verify whether the specified datasets and columns exist.</a:t>
+            </a:r>
+          </a:p>
+        </p:txBody>
+      </p:sp>
+      <p:sp>
+        <p:nvSpPr>
+          <p:cNvPr id="34" name="TextBox 33"/>
+          <p:cNvSpPr txBox="1"/>
+          <p:nvPr/>
+        </p:nvSpPr>
+        <p:spPr>
+          <a:xfrm>
+            <a:off x="7019925" y="3266000"/>
+            <a:ext cx="5229225" cy="274290"/>
+          </a:xfrm>
+          <a:prstGeom prst="rect">
+            <a:avLst/>
+          </a:prstGeom>
+          <a:noFill/>
+        </p:spPr>
+        <p:txBody>
+          <a:bodyPr wrap="none" lIns="0" tIns="0" rIns="0" bIns="0" anchor="t">
+            <a:spAutoFit/>
+          </a:bodyPr>
+          <a:lstStyle/>
+          <a:p>
+            <a:pPr algn="l">
+              <a:lnSpc>
+                <a:spcPts val="2160"/>
+              </a:lnSpc>
+            </a:pPr>
+            <a:r>
+              <a:rPr sz="1350" b="0" i="0" u="none">
+                <a:solidFill>
+                  <a:srgbClr val="94A3B8"/>
+                </a:solidFill>
+                <a:latin typeface="Inter"/>
+              </a:rPr>
+              <a:t>Compare data types and missing-value counts.</a:t>
+            </a:r>
+          </a:p>
+        </p:txBody>
+      </p:sp>
+      <p:sp>
+        <p:nvSpPr>
+          <p:cNvPr id="35" name="TextBox 34"/>
+          <p:cNvSpPr txBox="1"/>
+          <p:nvPr/>
+        </p:nvSpPr>
+        <p:spPr>
+          <a:xfrm>
+            <a:off x="7019925" y="3730790"/>
+            <a:ext cx="5229225" cy="274290"/>
+          </a:xfrm>
+          <a:prstGeom prst="rect">
+            <a:avLst/>
+          </a:prstGeom>
+          <a:noFill/>
+        </p:spPr>
+        <p:txBody>
+          <a:bodyPr wrap="none" lIns="0" tIns="0" rIns="0" bIns="0" anchor="t">
+            <a:spAutoFit/>
+          </a:bodyPr>
+          <a:lstStyle/>
+          <a:p>
+            <a:pPr algn="l">
+              <a:lnSpc>
+                <a:spcPts val="2160"/>
+              </a:lnSpc>
+            </a:pPr>
+            <a:r>
+              <a:rPr sz="1350" b="0" i="0" u="none">
+                <a:solidFill>
+                  <a:srgbClr val="94A3B8"/>
+                </a:solidFill>
+                <a:latin typeface="Inter"/>
+              </a:rPr>
+              <a:t>Compare unique-value counts.</a:t>
+            </a:r>
+          </a:p>
+        </p:txBody>
+      </p:sp>
+      <p:sp>
+        <p:nvSpPr>
+          <p:cNvPr id="36" name="TextBox 35"/>
+          <p:cNvSpPr txBox="1"/>
+          <p:nvPr/>
+        </p:nvSpPr>
+        <p:spPr>
+          <a:xfrm>
+            <a:off x="7019925" y="4195581"/>
+            <a:ext cx="5229225" cy="274290"/>
+          </a:xfrm>
+          <a:prstGeom prst="rect">
+            <a:avLst/>
+          </a:prstGeom>
+          <a:noFill/>
+        </p:spPr>
+        <p:txBody>
+          <a:bodyPr wrap="none" lIns="0" tIns="0" rIns="0" bIns="0" anchor="t">
+            <a:spAutoFit/>
+          </a:bodyPr>
+          <a:lstStyle/>
+          <a:p>
+            <a:pPr algn="l">
+              <a:lnSpc>
+                <a:spcPts val="2160"/>
+              </a:lnSpc>
+            </a:pPr>
+            <a:r>
+              <a:rPr sz="1350" b="0" i="0" u="none">
+                <a:solidFill>
+                  <a:srgbClr val="94A3B8"/>
+                </a:solidFill>
+                <a:latin typeface="Inter"/>
+              </a:rPr>
+              <a:t>Count common values between selected columns.</a:t>
+            </a:r>
+          </a:p>
+        </p:txBody>
+      </p:sp>
+      <p:sp>
+        <p:nvSpPr>
+          <p:cNvPr id="37" name="TextBox 36"/>
+          <p:cNvSpPr txBox="1"/>
+          <p:nvPr/>
+        </p:nvSpPr>
+        <p:spPr>
+          <a:xfrm>
+            <a:off x="7019925" y="4660371"/>
+            <a:ext cx="5229225" cy="274290"/>
+          </a:xfrm>
+          <a:prstGeom prst="rect">
+            <a:avLst/>
+          </a:prstGeom>
+          <a:noFill/>
+        </p:spPr>
+        <p:txBody>
+          <a:bodyPr wrap="none" lIns="0" tIns="0" rIns="0" bIns="0" anchor="t">
+            <a:spAutoFit/>
+          </a:bodyPr>
+          <a:lstStyle/>
+          <a:p>
+            <a:pPr algn="l">
+              <a:lnSpc>
+                <a:spcPts val="2160"/>
+              </a:lnSpc>
+            </a:pPr>
+            <a:r>
+              <a:rPr sz="1350" b="0" i="0" u="none">
+                <a:solidFill>
+                  <a:srgbClr val="94A3B8"/>
+                </a:solidFill>
+                <a:latin typeface="Inter"/>
+              </a:rPr>
+              <a:t>Record missing-column or type-compatibility issues.</a:t>
+            </a:r>
+          </a:p>
+        </p:txBody>
+      </p:sp>
+      <p:sp>
+        <p:nvSpPr>
+          <p:cNvPr id="38" name="TextBox 37"/>
+          <p:cNvSpPr txBox="1"/>
+          <p:nvPr/>
+        </p:nvSpPr>
+        <p:spPr>
+          <a:xfrm>
+            <a:off x="6686550" y="5098690"/>
+            <a:ext cx="5562600" cy="274290"/>
+          </a:xfrm>
+          <a:prstGeom prst="rect">
+            <a:avLst/>
+          </a:prstGeom>
+          <a:noFill/>
+        </p:spPr>
+        <p:txBody>
+          <a:bodyPr wrap="none" lIns="0" tIns="0" rIns="0" bIns="0" anchor="t">
+            <a:spAutoFit/>
+          </a:bodyPr>
+          <a:lstStyle/>
+          <a:p>
+            <a:pPr algn="l">
+              <a:lnSpc>
+                <a:spcPts val="2160"/>
+              </a:lnSpc>
+            </a:pPr>
+            <a:r>
+              <a:rPr sz="1350" b="1" i="0" u="none">
+                <a:solidFill>
+                  <a:srgbClr val="10B981"/>
+                </a:solidFill>
+                <a:latin typeface="Inter"/>
+              </a:rPr>
+              <a:t>Expected Output:</a:t>
+            </a:r>
+          </a:p>
+        </p:txBody>
+      </p:sp>
+      <p:sp>
+        <p:nvSpPr>
+          <p:cNvPr id="39" name="TextBox 38"/>
+          <p:cNvSpPr txBox="1"/>
+          <p:nvPr/>
+        </p:nvSpPr>
+        <p:spPr>
+          <a:xfrm>
+            <a:off x="6686550" y="5420605"/>
+            <a:ext cx="5562600" cy="274290"/>
+          </a:xfrm>
+          <a:prstGeom prst="rect">
+            <a:avLst/>
+          </a:prstGeom>
+          <a:noFill/>
+        </p:spPr>
+        <p:txBody>
+          <a:bodyPr wrap="none" lIns="0" tIns="0" rIns="0" bIns="0" anchor="t">
+            <a:spAutoFit/>
+          </a:bodyPr>
+          <a:lstStyle/>
+          <a:p>
+            <a:pPr algn="l">
+              <a:lnSpc>
+                <a:spcPts val="2160"/>
+              </a:lnSpc>
+            </a:pPr>
+            <a:r>
+              <a:rPr sz="1350" b="0" i="0" u="none">
+                <a:solidFill>
+                  <a:srgbClr val="F8FAFC"/>
+                </a:solidFill>
+                <a:latin typeface="monospace"/>
+              </a:rPr>
+              <a:t>Column_Mapping_Report.xlsx</a:t>
+            </a:r>
+          </a:p>
+        </p:txBody>
+      </p:sp>
+    </p:spTree>
+  </p:cSld>
+  <p:clrMapOvr>
+    <a:masterClrMapping/>
+  </p:clrMapOvr>
+</p:sld>
+</file>
+
+<file path=ppt/slides/slide16.xml><?xml version="1.0" encoding="utf-8"?>
+<p:sld xmlns:a="http://schemas.openxmlformats.org/drawingml/2006/main" xmlns:r="http://schemas.openxmlformats.org/officeDocument/2006/relationships" xmlns:p="http://schemas.openxmlformats.org/presentationml/2006/main">
+  <p:cSld>
+    <p:spTree>
+      <p:nvGrpSpPr>
+        <p:cNvPr id="1" name=""/>
+        <p:cNvGrpSpPr/>
+        <p:nvPr/>
+      </p:nvGrpSpPr>
+      <p:grpSpPr>
+        <a:xfrm>
+          <a:off x="0" y="0"/>
+          <a:ext cx="0" cy="0"/>
+          <a:chOff x="0" y="0"/>
+          <a:chExt cx="0" cy="0"/>
+        </a:xfrm>
+      </p:grpSpPr>
+      <p:pic>
+        <p:nvPicPr>
+          <p:cNvPr id="2" name="Picture 1" descr="image.png"/>
+          <p:cNvPicPr>
+            <a:picLocks noChangeAspect="1"/>
+          </p:cNvPicPr>
+          <p:nvPr/>
+        </p:nvPicPr>
+        <p:blipFill>
+          <a:blip r:embed="rId2"/>
+          <a:stretch>
+            <a:fillRect/>
+          </a:stretch>
+        </p:blipFill>
+        <p:spPr>
+          <a:xfrm>
+            <a:off x="0" y="0"/>
+            <a:ext cx="12192000" cy="6858000"/>
+          </a:xfrm>
+          <a:prstGeom prst="rect">
+            <a:avLst/>
+          </a:prstGeom>
+        </p:spPr>
+      </p:pic>
+      <p:pic>
+        <p:nvPicPr>
+          <p:cNvPr id="3" name="Picture 2" descr="image.png"/>
+          <p:cNvPicPr>
+            <a:picLocks noChangeAspect="1"/>
+          </p:cNvPicPr>
+          <p:nvPr/>
+        </p:nvPicPr>
+        <p:blipFill>
+          <a:blip r:embed="rId3"/>
+          <a:stretch>
+            <a:fillRect/>
+          </a:stretch>
+        </p:blipFill>
+        <p:spPr>
+          <a:xfrm>
+            <a:off x="571500" y="1508001"/>
+            <a:ext cx="114300" cy="200025"/>
+          </a:xfrm>
+          <a:prstGeom prst="rect">
+            <a:avLst/>
+          </a:prstGeom>
+        </p:spPr>
+      </p:pic>
+      <p:pic>
+        <p:nvPicPr>
+          <p:cNvPr id="4" name="Picture 3" descr="image.png"/>
+          <p:cNvPicPr>
+            <a:picLocks noChangeAspect="1"/>
+          </p:cNvPicPr>
+          <p:nvPr/>
+        </p:nvPicPr>
+        <p:blipFill>
+          <a:blip r:embed="rId3"/>
+          <a:stretch>
+            <a:fillRect/>
+          </a:stretch>
+        </p:blipFill>
+        <p:spPr>
+          <a:xfrm>
+            <a:off x="571500" y="2227434"/>
+            <a:ext cx="114300" cy="200025"/>
+          </a:xfrm>
+          <a:prstGeom prst="rect">
+            <a:avLst/>
+          </a:prstGeom>
+        </p:spPr>
+      </p:pic>
+      <p:pic>
+        <p:nvPicPr>
+          <p:cNvPr id="5" name="Picture 4" descr="image.png"/>
+          <p:cNvPicPr>
+            <a:picLocks noChangeAspect="1"/>
+          </p:cNvPicPr>
+          <p:nvPr/>
+        </p:nvPicPr>
+        <p:blipFill>
+          <a:blip r:embed="rId3"/>
+          <a:stretch>
+            <a:fillRect/>
+          </a:stretch>
+        </p:blipFill>
+        <p:spPr>
+          <a:xfrm>
+            <a:off x="590550" y="2644601"/>
+            <a:ext cx="114300" cy="200025"/>
+          </a:xfrm>
+          <a:prstGeom prst="rect">
+            <a:avLst/>
+          </a:prstGeom>
+        </p:spPr>
+      </p:pic>
+      <p:pic>
+        <p:nvPicPr>
+          <p:cNvPr id="6" name="Picture 5" descr="image.png"/>
+          <p:cNvPicPr>
+            <a:picLocks noChangeAspect="1"/>
+          </p:cNvPicPr>
+          <p:nvPr/>
+        </p:nvPicPr>
+        <p:blipFill>
+          <a:blip r:embed="rId3"/>
+          <a:stretch>
+            <a:fillRect/>
+          </a:stretch>
+        </p:blipFill>
+        <p:spPr>
+          <a:xfrm>
+            <a:off x="590550" y="3365230"/>
+            <a:ext cx="114300" cy="200025"/>
+          </a:xfrm>
+          <a:prstGeom prst="rect">
+            <a:avLst/>
+          </a:prstGeom>
+        </p:spPr>
+      </p:pic>
+      <p:pic>
+        <p:nvPicPr>
+          <p:cNvPr id="7" name="Picture 6" descr="image.png"/>
+          <p:cNvPicPr>
+            <a:picLocks noChangeAspect="1"/>
+          </p:cNvPicPr>
+          <p:nvPr/>
+        </p:nvPicPr>
+        <p:blipFill>
+          <a:blip r:embed="rId3"/>
+          <a:stretch>
+            <a:fillRect/>
+          </a:stretch>
+        </p:blipFill>
+        <p:spPr>
+          <a:xfrm>
+            <a:off x="590550" y="4028110"/>
+            <a:ext cx="114300" cy="200025"/>
+          </a:xfrm>
+          <a:prstGeom prst="rect">
+            <a:avLst/>
+          </a:prstGeom>
+        </p:spPr>
+      </p:pic>
+      <p:pic>
+        <p:nvPicPr>
+          <p:cNvPr id="8" name="Picture 7" descr="image.png"/>
+          <p:cNvPicPr>
+            <a:picLocks noChangeAspect="1"/>
+          </p:cNvPicPr>
+          <p:nvPr/>
+        </p:nvPicPr>
+        <p:blipFill>
+          <a:blip r:embed="rId3"/>
+          <a:stretch>
+            <a:fillRect/>
+          </a:stretch>
+        </p:blipFill>
+        <p:spPr>
+          <a:xfrm>
+            <a:off x="590550" y="4690990"/>
+            <a:ext cx="114300" cy="200025"/>
+          </a:xfrm>
+          <a:prstGeom prst="rect">
+            <a:avLst/>
+          </a:prstGeom>
+        </p:spPr>
+      </p:pic>
+      <p:pic>
+        <p:nvPicPr>
+          <p:cNvPr id="9" name="Picture 8" descr="image.png"/>
+          <p:cNvPicPr>
+            <a:picLocks noChangeAspect="1"/>
+          </p:cNvPicPr>
+          <p:nvPr/>
+        </p:nvPicPr>
+        <p:blipFill>
+          <a:blip r:embed="rId3"/>
+          <a:stretch>
+            <a:fillRect/>
+          </a:stretch>
+        </p:blipFill>
+        <p:spPr>
+          <a:xfrm>
+            <a:off x="590550" y="5353871"/>
+            <a:ext cx="114300" cy="200025"/>
+          </a:xfrm>
+          <a:prstGeom prst="rect">
+            <a:avLst/>
+          </a:prstGeom>
+        </p:spPr>
+      </p:pic>
+      <p:pic>
+        <p:nvPicPr>
+          <p:cNvPr id="10" name="Picture 9" descr="image.png"/>
+          <p:cNvPicPr>
+            <a:picLocks noChangeAspect="1"/>
+          </p:cNvPicPr>
+          <p:nvPr/>
+        </p:nvPicPr>
+        <p:blipFill>
+          <a:blip r:embed="rId3"/>
+          <a:stretch>
+            <a:fillRect/>
+          </a:stretch>
+        </p:blipFill>
+        <p:spPr>
+          <a:xfrm>
+            <a:off x="590550" y="6197056"/>
+            <a:ext cx="114300" cy="200025"/>
+          </a:xfrm>
+          <a:prstGeom prst="rect">
+            <a:avLst/>
+          </a:prstGeom>
+        </p:spPr>
+      </p:pic>
+      <p:sp>
+        <p:nvSpPr>
+          <p:cNvPr id="11" name="Rectangle 10"/>
+          <p:cNvSpPr/>
+          <p:nvPr/>
+        </p:nvSpPr>
+        <p:spPr>
+          <a:xfrm>
+            <a:off x="571500" y="476250"/>
+            <a:ext cx="57150" cy="434280"/>
+          </a:xfrm>
+          <a:prstGeom prst="rect">
+            <a:avLst/>
+          </a:prstGeom>
+          <a:solidFill>
+            <a:srgbClr val="0EA5E9"/>
+          </a:solidFill>
+          <a:ln>
+            <a:noFill/>
+          </a:ln>
+          <a:effectLst/>
+        </p:spPr>
+        <p:style>
+          <a:lnRef idx="1">
+            <a:schemeClr val="accent1"/>
+          </a:lnRef>
+          <a:fillRef idx="3">
+            <a:schemeClr val="accent1"/>
+          </a:fillRef>
+          <a:effectRef idx="2">
+            <a:schemeClr val="accent1"/>
+          </a:effectRef>
+          <a:fontRef idx="minor">
+            <a:schemeClr val="lt1"/>
+          </a:fontRef>
+        </p:style>
+        <p:txBody>
+          <a:bodyPr rtlCol="0" anchor="ctr"/>
+          <a:lstStyle/>
+          <a:p>
+            <a:pPr algn="ctr"/>
+            <a:endParaRPr/>
+          </a:p>
+        </p:txBody>
+      </p:sp>
+      <p:pic>
+        <p:nvPicPr>
+          <p:cNvPr id="12" name="Picture 11" descr="image.png"/>
+          <p:cNvPicPr>
+            <a:picLocks noChangeAspect="1"/>
+          </p:cNvPicPr>
+          <p:nvPr/>
+        </p:nvPicPr>
+        <p:blipFill>
+          <a:blip r:embed="rId4"/>
+          <a:stretch>
+            <a:fillRect/>
+          </a:stretch>
+        </p:blipFill>
+        <p:spPr>
+          <a:xfrm>
+            <a:off x="6096000" y="0"/>
+            <a:ext cx="6096000" cy="9177486"/>
+          </a:xfrm>
+          <a:prstGeom prst="rect">
+            <a:avLst/>
+          </a:prstGeom>
+        </p:spPr>
+      </p:pic>
+      <p:sp>
+        <p:nvSpPr>
+          <p:cNvPr id="14" name="TextBox 13"/>
+          <p:cNvSpPr txBox="1"/>
+          <p:nvPr/>
+        </p:nvSpPr>
+        <p:spPr>
+          <a:xfrm>
+            <a:off x="762000" y="476250"/>
+            <a:ext cx="6300787" cy="434280"/>
+          </a:xfrm>
+          <a:prstGeom prst="rect">
+            <a:avLst/>
+          </a:prstGeom>
+          <a:noFill/>
+        </p:spPr>
+        <p:txBody>
+          <a:bodyPr wrap="none" lIns="0" tIns="0" rIns="0" bIns="0" anchor="t">
+            <a:spAutoFit/>
+          </a:bodyPr>
+          <a:lstStyle/>
+          <a:p>
+            <a:pPr algn="l">
+              <a:lnSpc>
+                <a:spcPts val="3420"/>
+              </a:lnSpc>
+            </a:pPr>
+            <a:r>
+              <a:rPr sz="2850" b="1" i="0" u="none">
+                <a:solidFill>
+                  <a:srgbClr val="F8FAFC"/>
+                </a:solidFill>
+                <a:latin typeface="Inter"/>
+              </a:rPr>
+              <a:t>FINAL ARCHITECTURE</a:t>
+            </a:r>
+          </a:p>
+        </p:txBody>
+      </p:sp>
+      <p:sp>
+        <p:nvSpPr>
+          <p:cNvPr id="15" name="TextBox 14"/>
+          <p:cNvSpPr txBox="1"/>
+          <p:nvPr/>
+        </p:nvSpPr>
+        <p:spPr>
+          <a:xfrm>
+            <a:off x="571500" y="1094705"/>
+            <a:ext cx="6500812" cy="251370"/>
+          </a:xfrm>
+          <a:prstGeom prst="rect">
+            <a:avLst/>
+          </a:prstGeom>
+          <a:noFill/>
+        </p:spPr>
+        <p:txBody>
+          <a:bodyPr wrap="none" lIns="0" tIns="0" rIns="0" bIns="0" anchor="t">
+            <a:spAutoFit/>
+          </a:bodyPr>
+          <a:lstStyle/>
+          <a:p>
+            <a:pPr algn="l">
+              <a:lnSpc>
+                <a:spcPts val="1979"/>
+              </a:lnSpc>
+            </a:pPr>
+            <a:r>
+              <a:rPr sz="1650" b="1" i="0" u="none">
+                <a:solidFill>
+                  <a:srgbClr val="10B981"/>
+                </a:solidFill>
+                <a:latin typeface="Inter"/>
+              </a:rPr>
+              <a:t>Sprint 2 Deliverables</a:t>
+            </a:r>
+          </a:p>
+        </p:txBody>
+      </p:sp>
+      <p:sp>
+        <p:nvSpPr>
+          <p:cNvPr id="16" name="TextBox 15"/>
+          <p:cNvSpPr txBox="1"/>
+          <p:nvPr/>
+        </p:nvSpPr>
+        <p:spPr>
+          <a:xfrm>
+            <a:off x="571500" y="6570523"/>
+            <a:ext cx="5048250" cy="0"/>
+          </a:xfrm>
+          <a:prstGeom prst="rect">
+            <a:avLst/>
+          </a:prstGeom>
+          <a:noFill/>
+        </p:spPr>
+        <p:txBody>
+          <a:bodyPr wrap="square" lIns="0" tIns="0" rIns="0" bIns="0" anchor="t">
+            <a:spAutoFit/>
+          </a:bodyPr>
+          <a:lstStyle/>
+          <a:p>
+            <a:pPr algn="l">
+              <a:lnSpc>
+                <a:spcPts val="1560"/>
+              </a:lnSpc>
+            </a:pPr>
+            <a:r>
+              <a:rPr sz="975" b="0" i="1" u="none" dirty="0">
+                <a:solidFill>
+                  <a:srgbClr val="94A3B8"/>
+                </a:solidFill>
+                <a:latin typeface="Inter"/>
+              </a:rPr>
+              <a:t>* Architecture is subject to change in subsequent sprints as the warehouse evolves.</a:t>
+            </a:r>
+          </a:p>
+        </p:txBody>
+      </p:sp>
+      <p:sp>
+        <p:nvSpPr>
+          <p:cNvPr id="17" name="TextBox 16"/>
+          <p:cNvSpPr txBox="1"/>
+          <p:nvPr/>
+        </p:nvSpPr>
+        <p:spPr>
+          <a:xfrm>
+            <a:off x="904875" y="1488951"/>
+            <a:ext cx="4714875" cy="822870"/>
+          </a:xfrm>
+          <a:prstGeom prst="rect">
+            <a:avLst/>
+          </a:prstGeom>
+          <a:noFill/>
+        </p:spPr>
+        <p:txBody>
+          <a:bodyPr wrap="square" lIns="0" tIns="0" rIns="0" bIns="0" anchor="t">
+            <a:spAutoFit/>
+          </a:bodyPr>
+          <a:lstStyle/>
+          <a:p>
+            <a:pPr algn="l">
+              <a:lnSpc>
+                <a:spcPts val="2160"/>
+              </a:lnSpc>
+            </a:pPr>
+            <a:r>
+              <a:rPr sz="1350" b="1" i="0" u="none" dirty="0">
+                <a:solidFill>
+                  <a:srgbClr val="94A3B8"/>
+                </a:solidFill>
+                <a:latin typeface="Inter"/>
+              </a:rPr>
+              <a:t>Data Profiling:</a:t>
+            </a:r>
+            <a:r>
+              <a:rPr sz="1350" b="0" i="0" u="none" dirty="0">
+                <a:solidFill>
+                  <a:srgbClr val="94A3B8"/>
+                </a:solidFill>
+                <a:latin typeface="Inter"/>
+              </a:rPr>
+              <a:t> Data profiling report documenting dataset structure, data types, missing values, duplicates, and statistical summaries.</a:t>
+            </a:r>
+          </a:p>
+        </p:txBody>
+      </p:sp>
+      <p:sp>
+        <p:nvSpPr>
+          <p:cNvPr id="18" name="TextBox 17"/>
+          <p:cNvSpPr txBox="1"/>
+          <p:nvPr/>
+        </p:nvSpPr>
+        <p:spPr>
+          <a:xfrm>
+            <a:off x="904875" y="2208384"/>
+            <a:ext cx="4714875" cy="548580"/>
+          </a:xfrm>
+          <a:prstGeom prst="rect">
+            <a:avLst/>
+          </a:prstGeom>
+          <a:noFill/>
+        </p:spPr>
+        <p:txBody>
+          <a:bodyPr wrap="square" lIns="0" tIns="0" rIns="0" bIns="0" anchor="t">
+            <a:spAutoFit/>
+          </a:bodyPr>
+          <a:lstStyle/>
+          <a:p>
+            <a:pPr algn="l">
+              <a:lnSpc>
+                <a:spcPts val="2160"/>
+              </a:lnSpc>
+            </a:pPr>
+            <a:r>
+              <a:rPr sz="1350" b="1" i="0" u="none">
+                <a:solidFill>
+                  <a:srgbClr val="94A3B8"/>
+                </a:solidFill>
+                <a:latin typeface="Inter"/>
+              </a:rPr>
+              <a:t>Data Quality:</a:t>
+            </a:r>
+            <a:r>
+              <a:rPr sz="1350" b="0" i="0" u="none">
+                <a:solidFill>
+                  <a:srgbClr val="94A3B8"/>
+                </a:solidFill>
+                <a:latin typeface="Inter"/>
+              </a:rPr>
+              <a:t> Data quality report and documented validation rules.</a:t>
+            </a:r>
+          </a:p>
+        </p:txBody>
+      </p:sp>
+      <p:sp>
+        <p:nvSpPr>
+          <p:cNvPr id="19" name="TextBox 18"/>
+          <p:cNvSpPr txBox="1"/>
+          <p:nvPr/>
+        </p:nvSpPr>
+        <p:spPr>
+          <a:xfrm>
+            <a:off x="923925" y="2625551"/>
+            <a:ext cx="4714875" cy="822870"/>
+          </a:xfrm>
+          <a:prstGeom prst="rect">
+            <a:avLst/>
+          </a:prstGeom>
+          <a:noFill/>
+        </p:spPr>
+        <p:txBody>
+          <a:bodyPr wrap="square" lIns="0" tIns="0" rIns="0" bIns="0" anchor="t">
+            <a:spAutoFit/>
+          </a:bodyPr>
+          <a:lstStyle/>
+          <a:p>
+            <a:pPr algn="l">
+              <a:lnSpc>
+                <a:spcPts val="2160"/>
+              </a:lnSpc>
+            </a:pPr>
+            <a:r>
+              <a:rPr sz="1350" b="1" i="0" u="none">
+                <a:solidFill>
+                  <a:srgbClr val="94A3B8"/>
+                </a:solidFill>
+                <a:latin typeface="Inter"/>
+              </a:rPr>
+              <a:t>Data Cleaning &amp; Standardization:</a:t>
+            </a:r>
+            <a:r>
+              <a:rPr sz="1350" b="0" i="0" u="none">
+                <a:solidFill>
+                  <a:srgbClr val="94A3B8"/>
+                </a:solidFill>
+                <a:latin typeface="Inter"/>
+              </a:rPr>
+              <a:t> Cleaned and standardized datasets with consistent formats and column structures.</a:t>
+            </a:r>
+          </a:p>
+        </p:txBody>
+      </p:sp>
+      <p:sp>
+        <p:nvSpPr>
+          <p:cNvPr id="20" name="TextBox 19"/>
+          <p:cNvSpPr txBox="1"/>
+          <p:nvPr/>
+        </p:nvSpPr>
+        <p:spPr>
+          <a:xfrm>
+            <a:off x="923925" y="3346180"/>
+            <a:ext cx="4714875" cy="548580"/>
+          </a:xfrm>
+          <a:prstGeom prst="rect">
+            <a:avLst/>
+          </a:prstGeom>
+          <a:noFill/>
+        </p:spPr>
+        <p:txBody>
+          <a:bodyPr wrap="square" lIns="0" tIns="0" rIns="0" bIns="0" anchor="t">
+            <a:spAutoFit/>
+          </a:bodyPr>
+          <a:lstStyle/>
+          <a:p>
+            <a:pPr algn="l">
+              <a:lnSpc>
+                <a:spcPts val="2160"/>
+              </a:lnSpc>
+            </a:pPr>
+            <a:r>
+              <a:rPr sz="1350" b="1" i="0" u="none">
+                <a:solidFill>
+                  <a:srgbClr val="94A3B8"/>
+                </a:solidFill>
+                <a:latin typeface="Inter"/>
+              </a:rPr>
+              <a:t>Data Warehouse Design:</a:t>
+            </a:r>
+            <a:r>
+              <a:rPr sz="1350" b="0" i="0" u="none">
+                <a:solidFill>
+                  <a:srgbClr val="94A3B8"/>
+                </a:solidFill>
+                <a:latin typeface="Inter"/>
+              </a:rPr>
+              <a:t> Star schema design with fact and dimension table definitions.</a:t>
+            </a:r>
+          </a:p>
+        </p:txBody>
+      </p:sp>
+      <p:sp>
+        <p:nvSpPr>
+          <p:cNvPr id="21" name="TextBox 20"/>
+          <p:cNvSpPr txBox="1"/>
+          <p:nvPr/>
+        </p:nvSpPr>
+        <p:spPr>
+          <a:xfrm>
+            <a:off x="923925" y="4009060"/>
+            <a:ext cx="4714875" cy="548580"/>
+          </a:xfrm>
+          <a:prstGeom prst="rect">
+            <a:avLst/>
+          </a:prstGeom>
+          <a:noFill/>
+        </p:spPr>
+        <p:txBody>
+          <a:bodyPr wrap="square" lIns="0" tIns="0" rIns="0" bIns="0" anchor="t">
+            <a:spAutoFit/>
+          </a:bodyPr>
+          <a:lstStyle/>
+          <a:p>
+            <a:pPr algn="l">
+              <a:lnSpc>
+                <a:spcPts val="2160"/>
+              </a:lnSpc>
+            </a:pPr>
+            <a:r>
+              <a:rPr sz="1350" b="1" i="0" u="none">
+                <a:solidFill>
+                  <a:srgbClr val="94A3B8"/>
+                </a:solidFill>
+                <a:latin typeface="Inter"/>
+              </a:rPr>
+              <a:t>PostgreSQL Data Warehouse:</a:t>
+            </a:r>
+            <a:r>
+              <a:rPr sz="1350" b="0" i="0" u="none">
+                <a:solidFill>
+                  <a:srgbClr val="94A3B8"/>
+                </a:solidFill>
+                <a:latin typeface="Inter"/>
+              </a:rPr>
+              <a:t> Implementation of the data warehouse schema and tables in PostgreSQL.</a:t>
+            </a:r>
+          </a:p>
+        </p:txBody>
+      </p:sp>
+      <p:sp>
+        <p:nvSpPr>
+          <p:cNvPr id="22" name="TextBox 21"/>
+          <p:cNvSpPr txBox="1"/>
+          <p:nvPr/>
+        </p:nvSpPr>
+        <p:spPr>
+          <a:xfrm>
+            <a:off x="923925" y="4671940"/>
+            <a:ext cx="4714875" cy="548580"/>
+          </a:xfrm>
+          <a:prstGeom prst="rect">
+            <a:avLst/>
+          </a:prstGeom>
+          <a:noFill/>
+        </p:spPr>
+        <p:txBody>
+          <a:bodyPr wrap="square" lIns="0" tIns="0" rIns="0" bIns="0" anchor="t">
+            <a:spAutoFit/>
+          </a:bodyPr>
+          <a:lstStyle/>
+          <a:p>
+            <a:pPr algn="l">
+              <a:lnSpc>
+                <a:spcPts val="2160"/>
+              </a:lnSpc>
+            </a:pPr>
+            <a:r>
+              <a:rPr sz="1350" b="1" i="0" u="none">
+                <a:solidFill>
+                  <a:srgbClr val="94A3B8"/>
+                </a:solidFill>
+                <a:latin typeface="Inter"/>
+              </a:rPr>
+              <a:t>Warehouse ETL:</a:t>
+            </a:r>
+            <a:r>
+              <a:rPr sz="1350" b="0" i="0" u="none">
+                <a:solidFill>
+                  <a:srgbClr val="94A3B8"/>
+                </a:solidFill>
+                <a:latin typeface="Inter"/>
+              </a:rPr>
+              <a:t> Pentaho transformations and SQL scripts for loading data into the warehouse.</a:t>
+            </a:r>
+          </a:p>
+        </p:txBody>
+      </p:sp>
+      <p:sp>
+        <p:nvSpPr>
+          <p:cNvPr id="23" name="TextBox 22"/>
+          <p:cNvSpPr txBox="1"/>
+          <p:nvPr/>
+        </p:nvSpPr>
+        <p:spPr>
+          <a:xfrm>
+            <a:off x="923925" y="5334821"/>
+            <a:ext cx="4714875" cy="646360"/>
+          </a:xfrm>
+          <a:prstGeom prst="rect">
+            <a:avLst/>
+          </a:prstGeom>
+          <a:noFill/>
+        </p:spPr>
+        <p:txBody>
+          <a:bodyPr wrap="square" lIns="0" tIns="0" rIns="0" bIns="0" anchor="t">
+            <a:spAutoFit/>
+          </a:bodyPr>
+          <a:lstStyle/>
+          <a:p>
+            <a:pPr algn="l">
+              <a:lnSpc>
+                <a:spcPts val="2160"/>
+              </a:lnSpc>
+            </a:pPr>
+            <a:r>
+              <a:rPr sz="1350" b="1" i="0" u="none">
+                <a:solidFill>
+                  <a:srgbClr val="94A3B8"/>
+                </a:solidFill>
+                <a:latin typeface="Inter"/>
+              </a:rPr>
+              <a:t>Warehouse Validation:</a:t>
+            </a:r>
+            <a:r>
+              <a:rPr sz="1350" b="0" i="0" u="none">
+                <a:solidFill>
+                  <a:srgbClr val="94A3B8"/>
+                </a:solidFill>
+                <a:latin typeface="Inter"/>
+              </a:rPr>
+              <a:t> Validation results covering record counts, data integrity, and source-to-target consistency.</a:t>
+            </a:r>
+          </a:p>
+        </p:txBody>
+      </p:sp>
+      <p:sp>
+        <p:nvSpPr>
+          <p:cNvPr id="24" name="TextBox 23"/>
+          <p:cNvSpPr txBox="1"/>
+          <p:nvPr/>
+        </p:nvSpPr>
+        <p:spPr>
+          <a:xfrm>
+            <a:off x="923925" y="5981181"/>
+            <a:ext cx="4714875" cy="0"/>
+          </a:xfrm>
+          <a:prstGeom prst="rect">
+            <a:avLst/>
+          </a:prstGeom>
+          <a:noFill/>
+        </p:spPr>
+        <p:txBody>
+          <a:bodyPr wrap="square" lIns="0" tIns="0" rIns="0" bIns="0" anchor="t">
+            <a:spAutoFit/>
+          </a:bodyPr>
+          <a:lstStyle/>
+          <a:p>
+            <a:pPr algn="l">
+              <a:lnSpc>
+                <a:spcPts val="2160"/>
+              </a:lnSpc>
+            </a:pPr>
+            <a:r>
+              <a:rPr sz="1350" b="1" i="0" u="none" dirty="0">
+                <a:solidFill>
+                  <a:srgbClr val="94A3B8"/>
+                </a:solidFill>
+                <a:latin typeface="Inter"/>
+              </a:rPr>
+              <a:t>Git Repository Updates:</a:t>
+            </a:r>
+            <a:r>
+              <a:rPr sz="1350" b="0" i="0" u="none" dirty="0">
+                <a:solidFill>
+                  <a:srgbClr val="94A3B8"/>
+                </a:solidFill>
+                <a:latin typeface="Inter"/>
+              </a:rPr>
+              <a:t> Updated repository containing Sprint 2 scripts, configurations, datasets, and documentation.</a:t>
+            </a:r>
+          </a:p>
+        </p:txBody>
+      </p:sp>
+      <p:pic>
+        <p:nvPicPr>
+          <p:cNvPr id="26" name="Picture 25">
+            <a:extLst>
+              <a:ext uri="{FF2B5EF4-FFF2-40B4-BE49-F238E27FC236}">
+                <a16:creationId xmlns:a16="http://schemas.microsoft.com/office/drawing/2014/main" id="{B33EA4AF-8082-BCDB-F257-24D648237105}"/>
+              </a:ext>
+            </a:extLst>
+          </p:cNvPr>
+          <p:cNvPicPr>
+            <a:picLocks noChangeAspect="1"/>
+          </p:cNvPicPr>
+          <p:nvPr/>
+        </p:nvPicPr>
+        <p:blipFill>
+          <a:blip r:embed="rId5"/>
+          <a:srcRect b="1293"/>
+          <a:stretch>
+            <a:fillRect/>
+          </a:stretch>
+        </p:blipFill>
+        <p:spPr>
+          <a:xfrm>
+            <a:off x="7643812" y="58454"/>
+            <a:ext cx="3439716" cy="6799545"/>
+          </a:xfrm>
+          <a:prstGeom prst="rect">
+            <a:avLst/>
+          </a:prstGeom>
+        </p:spPr>
+      </p:pic>
+    </p:spTree>
+  </p:cSld>
+  <p:clrMapOvr>
+    <a:masterClrMapping/>
+  </p:clrMapOvr>
+</p:sld>
+</file>
+
+<file path=ppt/slides/slide17.xml><?xml version="1.0" encoding="utf-8"?>
+<p:sld xmlns:a="http://schemas.openxmlformats.org/drawingml/2006/main" xmlns:r="http://schemas.openxmlformats.org/officeDocument/2006/relationships" xmlns:p="http://schemas.openxmlformats.org/presentationml/2006/main">
+  <p:cSld>
+    <p:spTree>
+      <p:nvGrpSpPr>
+        <p:cNvPr id="1" name=""/>
+        <p:cNvGrpSpPr/>
+        <p:nvPr/>
+      </p:nvGrpSpPr>
+      <p:grpSpPr>
+        <a:xfrm>
+          <a:off x="0" y="0"/>
+          <a:ext cx="0" cy="0"/>
+          <a:chOff x="0" y="0"/>
+          <a:chExt cx="0" cy="0"/>
+        </a:xfrm>
+      </p:grpSpPr>
+      <p:pic>
+        <p:nvPicPr>
+          <p:cNvPr id="2" name="Picture 1" descr="image.png"/>
+          <p:cNvPicPr>
+            <a:picLocks noChangeAspect="1"/>
+          </p:cNvPicPr>
+          <p:nvPr/>
+        </p:nvPicPr>
+        <p:blipFill>
+          <a:blip r:embed="rId2"/>
+          <a:stretch>
+            <a:fillRect/>
+          </a:stretch>
+        </p:blipFill>
+        <p:spPr>
+          <a:xfrm>
+            <a:off x="0" y="0"/>
+            <a:ext cx="12192000" cy="6858000"/>
+          </a:xfrm>
+          <a:prstGeom prst="rect">
+            <a:avLst/>
+          </a:prstGeom>
+        </p:spPr>
+      </p:pic>
+      <p:pic>
+        <p:nvPicPr>
+          <p:cNvPr id="3" name="Picture 2" descr="image.png"/>
+          <p:cNvPicPr>
+            <a:picLocks noChangeAspect="1"/>
+          </p:cNvPicPr>
+          <p:nvPr/>
+        </p:nvPicPr>
+        <p:blipFill>
+          <a:blip r:embed="rId3"/>
+          <a:stretch>
+            <a:fillRect/>
+          </a:stretch>
+        </p:blipFill>
+        <p:spPr>
+          <a:xfrm>
+            <a:off x="571500" y="1950839"/>
+            <a:ext cx="3492400" cy="3840212"/>
+          </a:xfrm>
+          <a:prstGeom prst="rect">
+            <a:avLst/>
+          </a:prstGeom>
+        </p:spPr>
+      </p:pic>
+      <p:pic>
+        <p:nvPicPr>
+          <p:cNvPr id="4" name="Picture 3" descr="image.png"/>
+          <p:cNvPicPr>
+            <a:picLocks noChangeAspect="1"/>
+          </p:cNvPicPr>
+          <p:nvPr/>
+        </p:nvPicPr>
+        <p:blipFill>
+          <a:blip r:embed="rId4"/>
+          <a:stretch>
+            <a:fillRect/>
+          </a:stretch>
+        </p:blipFill>
+        <p:spPr>
+          <a:xfrm>
+            <a:off x="4349650" y="1950839"/>
+            <a:ext cx="3492549" cy="3840212"/>
+          </a:xfrm>
+          <a:prstGeom prst="rect">
+            <a:avLst/>
+          </a:prstGeom>
+        </p:spPr>
+      </p:pic>
+      <p:pic>
+        <p:nvPicPr>
+          <p:cNvPr id="5" name="Picture 4" descr="image.png"/>
+          <p:cNvPicPr>
+            <a:picLocks noChangeAspect="1"/>
+          </p:cNvPicPr>
+          <p:nvPr/>
+        </p:nvPicPr>
+        <p:blipFill>
+          <a:blip r:embed="rId5"/>
+          <a:stretch>
+            <a:fillRect/>
+          </a:stretch>
+        </p:blipFill>
+        <p:spPr>
+          <a:xfrm>
+            <a:off x="8127950" y="1950839"/>
+            <a:ext cx="3492400" cy="3840212"/>
+          </a:xfrm>
+          <a:prstGeom prst="rect">
+            <a:avLst/>
+          </a:prstGeom>
+        </p:spPr>
+      </p:pic>
+      <p:pic>
+        <p:nvPicPr>
+          <p:cNvPr id="6" name="Picture 5" descr="image.png"/>
+          <p:cNvPicPr>
+            <a:picLocks noChangeAspect="1"/>
+          </p:cNvPicPr>
+          <p:nvPr/>
+        </p:nvPicPr>
+        <p:blipFill>
+          <a:blip r:embed="rId6"/>
+          <a:stretch>
+            <a:fillRect/>
+          </a:stretch>
+        </p:blipFill>
+        <p:spPr>
+          <a:xfrm>
+            <a:off x="1936700" y="2341364"/>
+            <a:ext cx="762000" cy="762000"/>
+          </a:xfrm>
+          <a:prstGeom prst="rect">
+            <a:avLst/>
+          </a:prstGeom>
+        </p:spPr>
+      </p:pic>
+      <p:sp>
+        <p:nvSpPr>
+          <p:cNvPr id="7" name="TextBox 6"/>
+          <p:cNvSpPr txBox="1"/>
+          <p:nvPr/>
+        </p:nvSpPr>
+        <p:spPr>
+          <a:xfrm>
+            <a:off x="794228" y="3293864"/>
+            <a:ext cx="3046943" cy="319980"/>
+          </a:xfrm>
+          <a:prstGeom prst="rect">
+            <a:avLst/>
+          </a:prstGeom>
+          <a:noFill/>
+        </p:spPr>
+        <p:txBody>
+          <a:bodyPr wrap="square" lIns="0" tIns="0" rIns="0" bIns="0" anchor="ctr">
+            <a:spAutoFit/>
+          </a:bodyPr>
+          <a:lstStyle/>
+          <a:p>
+            <a:pPr algn="ctr">
+              <a:lnSpc>
+                <a:spcPts val="2520"/>
+              </a:lnSpc>
+            </a:pPr>
+            <a:r>
+              <a:rPr sz="2100" b="0" i="0" u="none" dirty="0">
+                <a:solidFill>
+                  <a:srgbClr val="F8FAFC"/>
+                </a:solidFill>
+                <a:latin typeface="Inter SemiBold"/>
+              </a:rPr>
+              <a:t>Perseus Mistry</a:t>
+            </a:r>
+          </a:p>
+        </p:txBody>
+      </p:sp>
+      <p:sp>
+        <p:nvSpPr>
+          <p:cNvPr id="8" name="TextBox 7"/>
+          <p:cNvSpPr txBox="1"/>
+          <p:nvPr/>
+        </p:nvSpPr>
+        <p:spPr>
+          <a:xfrm>
+            <a:off x="866775" y="3661469"/>
+            <a:ext cx="2901850" cy="213270"/>
+          </a:xfrm>
+          <a:prstGeom prst="rect">
+            <a:avLst/>
+          </a:prstGeom>
+          <a:noFill/>
+        </p:spPr>
+        <p:txBody>
+          <a:bodyPr wrap="square" lIns="0" tIns="0" rIns="0" bIns="0" anchor="t">
+            <a:spAutoFit/>
+          </a:bodyPr>
+          <a:lstStyle/>
+          <a:p>
+            <a:pPr algn="ctr">
+              <a:lnSpc>
+                <a:spcPts val="1679"/>
+              </a:lnSpc>
+            </a:pPr>
+            <a:r>
+              <a:rPr sz="1050" b="0" i="0" u="none" dirty="0">
+                <a:solidFill>
+                  <a:srgbClr val="0EA5E9"/>
+                </a:solidFill>
+                <a:latin typeface="Inter"/>
+              </a:rPr>
+              <a:t>26MML1027</a:t>
+            </a:r>
+          </a:p>
+        </p:txBody>
+      </p:sp>
+      <p:pic>
+        <p:nvPicPr>
+          <p:cNvPr id="9" name="Picture 8" descr="image.png"/>
+          <p:cNvPicPr>
+            <a:picLocks noChangeAspect="1"/>
+          </p:cNvPicPr>
+          <p:nvPr/>
+        </p:nvPicPr>
+        <p:blipFill>
+          <a:blip r:embed="rId7"/>
+          <a:stretch>
+            <a:fillRect/>
+          </a:stretch>
+        </p:blipFill>
+        <p:spPr>
+          <a:xfrm>
+            <a:off x="5714851" y="2341364"/>
+            <a:ext cx="762000" cy="762000"/>
+          </a:xfrm>
+          <a:prstGeom prst="rect">
+            <a:avLst/>
+          </a:prstGeom>
+        </p:spPr>
+      </p:pic>
+      <p:sp>
+        <p:nvSpPr>
+          <p:cNvPr id="10" name="TextBox 9"/>
+          <p:cNvSpPr txBox="1"/>
+          <p:nvPr/>
+        </p:nvSpPr>
+        <p:spPr>
+          <a:xfrm>
+            <a:off x="4572375" y="3293864"/>
+            <a:ext cx="3047099" cy="319980"/>
+          </a:xfrm>
+          <a:prstGeom prst="rect">
+            <a:avLst/>
+          </a:prstGeom>
+          <a:noFill/>
+        </p:spPr>
+        <p:txBody>
+          <a:bodyPr wrap="square" lIns="0" tIns="0" rIns="0" bIns="0" anchor="ctr">
+            <a:spAutoFit/>
+          </a:bodyPr>
+          <a:lstStyle/>
+          <a:p>
+            <a:pPr algn="ctr">
+              <a:lnSpc>
+                <a:spcPts val="2520"/>
+              </a:lnSpc>
+            </a:pPr>
+            <a:r>
+              <a:rPr sz="2100" b="0" i="0" u="none">
+                <a:solidFill>
+                  <a:srgbClr val="F8FAFC"/>
+                </a:solidFill>
+                <a:latin typeface="Inter SemiBold"/>
+              </a:rPr>
+              <a:t>Sai Skanda U</a:t>
+            </a:r>
+          </a:p>
+        </p:txBody>
+      </p:sp>
+      <p:sp>
+        <p:nvSpPr>
+          <p:cNvPr id="11" name="TextBox 10"/>
+          <p:cNvSpPr txBox="1"/>
+          <p:nvPr/>
+        </p:nvSpPr>
+        <p:spPr>
+          <a:xfrm>
+            <a:off x="4644925" y="3661469"/>
+            <a:ext cx="2901999" cy="213270"/>
+          </a:xfrm>
+          <a:prstGeom prst="rect">
+            <a:avLst/>
+          </a:prstGeom>
+          <a:noFill/>
+        </p:spPr>
+        <p:txBody>
+          <a:bodyPr wrap="square" lIns="0" tIns="0" rIns="0" bIns="0" anchor="t">
+            <a:spAutoFit/>
+          </a:bodyPr>
+          <a:lstStyle/>
+          <a:p>
+            <a:pPr algn="ctr">
+              <a:lnSpc>
+                <a:spcPts val="1679"/>
+              </a:lnSpc>
+            </a:pPr>
+            <a:r>
+              <a:rPr sz="1050" b="0" i="0" u="none">
+                <a:solidFill>
+                  <a:srgbClr val="10B981"/>
+                </a:solidFill>
+                <a:latin typeface="Inter"/>
+              </a:rPr>
+              <a:t>26MML1014</a:t>
+            </a:r>
+          </a:p>
+        </p:txBody>
+      </p:sp>
+      <p:pic>
+        <p:nvPicPr>
+          <p:cNvPr id="12" name="Picture 11" descr="image.png"/>
+          <p:cNvPicPr>
+            <a:picLocks noChangeAspect="1"/>
+          </p:cNvPicPr>
+          <p:nvPr/>
+        </p:nvPicPr>
+        <p:blipFill>
+          <a:blip r:embed="rId8"/>
+          <a:stretch>
+            <a:fillRect/>
+          </a:stretch>
+        </p:blipFill>
+        <p:spPr>
+          <a:xfrm>
+            <a:off x="9493150" y="2341364"/>
+            <a:ext cx="762000" cy="762000"/>
+          </a:xfrm>
+          <a:prstGeom prst="rect">
+            <a:avLst/>
+          </a:prstGeom>
+        </p:spPr>
+      </p:pic>
+      <p:sp>
+        <p:nvSpPr>
+          <p:cNvPr id="13" name="TextBox 12"/>
+          <p:cNvSpPr txBox="1"/>
+          <p:nvPr/>
+        </p:nvSpPr>
+        <p:spPr>
+          <a:xfrm>
+            <a:off x="8350679" y="3293864"/>
+            <a:ext cx="3046943" cy="319980"/>
+          </a:xfrm>
+          <a:prstGeom prst="rect">
+            <a:avLst/>
+          </a:prstGeom>
+          <a:noFill/>
+        </p:spPr>
+        <p:txBody>
+          <a:bodyPr wrap="square" lIns="0" tIns="0" rIns="0" bIns="0" anchor="ctr">
+            <a:spAutoFit/>
+          </a:bodyPr>
+          <a:lstStyle/>
+          <a:p>
+            <a:pPr algn="ctr">
+              <a:lnSpc>
+                <a:spcPts val="2520"/>
+              </a:lnSpc>
+            </a:pPr>
+            <a:r>
+              <a:rPr sz="2100" b="0" i="0" u="none">
+                <a:solidFill>
+                  <a:srgbClr val="F8FAFC"/>
+                </a:solidFill>
+                <a:latin typeface="Inter SemiBold"/>
+              </a:rPr>
+              <a:t>Jaikrishna</a:t>
+            </a:r>
+          </a:p>
+        </p:txBody>
+      </p:sp>
+      <p:sp>
+        <p:nvSpPr>
+          <p:cNvPr id="14" name="TextBox 13"/>
+          <p:cNvSpPr txBox="1"/>
+          <p:nvPr/>
+        </p:nvSpPr>
+        <p:spPr>
+          <a:xfrm>
+            <a:off x="8423225" y="3661469"/>
+            <a:ext cx="2901850" cy="213270"/>
+          </a:xfrm>
+          <a:prstGeom prst="rect">
+            <a:avLst/>
+          </a:prstGeom>
+          <a:noFill/>
+        </p:spPr>
+        <p:txBody>
+          <a:bodyPr wrap="square" lIns="0" tIns="0" rIns="0" bIns="0" anchor="t">
+            <a:spAutoFit/>
+          </a:bodyPr>
+          <a:lstStyle/>
+          <a:p>
+            <a:pPr algn="ctr">
+              <a:lnSpc>
+                <a:spcPts val="1679"/>
+              </a:lnSpc>
+            </a:pPr>
+            <a:r>
+              <a:rPr sz="1050" b="0" i="0" u="none">
+                <a:solidFill>
+                  <a:srgbClr val="0EA5E9"/>
+                </a:solidFill>
+                <a:latin typeface="Inter"/>
+              </a:rPr>
+              <a:t>26MML1003</a:t>
+            </a:r>
+          </a:p>
+        </p:txBody>
+      </p:sp>
+      <p:pic>
+        <p:nvPicPr>
+          <p:cNvPr id="15" name="Picture 14" descr="image.png"/>
+          <p:cNvPicPr>
+            <a:picLocks noChangeAspect="1"/>
+          </p:cNvPicPr>
+          <p:nvPr/>
+        </p:nvPicPr>
+        <p:blipFill>
+          <a:blip r:embed="rId9"/>
+          <a:stretch>
+            <a:fillRect/>
+          </a:stretch>
+        </p:blipFill>
+        <p:spPr>
+          <a:xfrm>
+            <a:off x="2165300" y="2550914"/>
+            <a:ext cx="304800" cy="342900"/>
+          </a:xfrm>
+          <a:prstGeom prst="rect">
+            <a:avLst/>
+          </a:prstGeom>
+        </p:spPr>
+      </p:pic>
+      <p:sp>
+        <p:nvSpPr>
+          <p:cNvPr id="16" name="TextBox 15"/>
+          <p:cNvSpPr txBox="1"/>
+          <p:nvPr/>
+        </p:nvSpPr>
+        <p:spPr>
+          <a:xfrm>
+            <a:off x="866775" y="4112865"/>
+            <a:ext cx="2901850" cy="274290"/>
+          </a:xfrm>
+          <a:prstGeom prst="rect">
+            <a:avLst/>
+          </a:prstGeom>
+          <a:noFill/>
+        </p:spPr>
+        <p:txBody>
+          <a:bodyPr wrap="square" lIns="161925" tIns="0" rIns="0" bIns="0" anchor="t">
+            <a:spAutoFit/>
+          </a:bodyPr>
+          <a:lstStyle/>
+          <a:p>
+            <a:pPr algn="l">
+              <a:lnSpc>
+                <a:spcPts val="2160"/>
+              </a:lnSpc>
+            </a:pPr>
+            <a:r>
+              <a:rPr sz="1350" b="0" i="0" u="none" dirty="0">
+                <a:solidFill>
+                  <a:srgbClr val="94A3B8"/>
+                </a:solidFill>
+                <a:latin typeface="Inter"/>
+              </a:rPr>
+              <a:t>Handling Documentation</a:t>
+            </a:r>
+          </a:p>
+        </p:txBody>
+      </p:sp>
+      <p:sp>
+        <p:nvSpPr>
+          <p:cNvPr id="17" name="TextBox 16"/>
+          <p:cNvSpPr txBox="1"/>
+          <p:nvPr/>
+        </p:nvSpPr>
+        <p:spPr>
+          <a:xfrm>
+            <a:off x="866775" y="4482405"/>
+            <a:ext cx="2901850" cy="274290"/>
+          </a:xfrm>
+          <a:prstGeom prst="rect">
+            <a:avLst/>
+          </a:prstGeom>
+          <a:noFill/>
+        </p:spPr>
+        <p:txBody>
+          <a:bodyPr wrap="square" lIns="161925" tIns="0" rIns="0" bIns="0" anchor="t">
+            <a:spAutoFit/>
+          </a:bodyPr>
+          <a:lstStyle/>
+          <a:p>
+            <a:pPr algn="l">
+              <a:lnSpc>
+                <a:spcPts val="2160"/>
+              </a:lnSpc>
+            </a:pPr>
+            <a:r>
+              <a:rPr sz="1350" b="0" i="0" u="none">
+                <a:solidFill>
+                  <a:srgbClr val="94A3B8"/>
+                </a:solidFill>
+                <a:latin typeface="Inter"/>
+              </a:rPr>
+              <a:t>GitHub Repository Mgmt</a:t>
+            </a:r>
+          </a:p>
+        </p:txBody>
+      </p:sp>
+      <p:sp>
+        <p:nvSpPr>
+          <p:cNvPr id="18" name="TextBox 17"/>
+          <p:cNvSpPr txBox="1"/>
+          <p:nvPr/>
+        </p:nvSpPr>
+        <p:spPr>
+          <a:xfrm>
+            <a:off x="866775" y="4851945"/>
+            <a:ext cx="2901850" cy="548580"/>
+          </a:xfrm>
+          <a:prstGeom prst="rect">
+            <a:avLst/>
+          </a:prstGeom>
+          <a:noFill/>
+        </p:spPr>
+        <p:txBody>
+          <a:bodyPr wrap="square" lIns="161925" tIns="0" rIns="0" bIns="0" anchor="t">
+            <a:spAutoFit/>
+          </a:bodyPr>
+          <a:lstStyle/>
+          <a:p>
+            <a:pPr algn="l">
+              <a:lnSpc>
+                <a:spcPts val="2160"/>
+              </a:lnSpc>
+            </a:pPr>
+            <a:r>
+              <a:rPr sz="1350" b="0" i="0" u="none">
+                <a:solidFill>
+                  <a:srgbClr val="94A3B8"/>
+                </a:solidFill>
+                <a:latin typeface="Inter"/>
+              </a:rPr>
+              <a:t>Pentaho Transformation Debugging/Supervising</a:t>
+            </a:r>
+          </a:p>
+        </p:txBody>
+      </p:sp>
+      <p:pic>
+        <p:nvPicPr>
+          <p:cNvPr id="19" name="Picture 18" descr="image.png"/>
+          <p:cNvPicPr>
+            <a:picLocks noChangeAspect="1"/>
+          </p:cNvPicPr>
+          <p:nvPr/>
+        </p:nvPicPr>
+        <p:blipFill>
+          <a:blip r:embed="rId10"/>
+          <a:stretch>
+            <a:fillRect/>
+          </a:stretch>
+        </p:blipFill>
+        <p:spPr>
+          <a:xfrm>
+            <a:off x="5881538" y="2550914"/>
+            <a:ext cx="428625" cy="342900"/>
+          </a:xfrm>
+          <a:prstGeom prst="rect">
+            <a:avLst/>
+          </a:prstGeom>
+        </p:spPr>
+      </p:pic>
+      <p:sp>
+        <p:nvSpPr>
+          <p:cNvPr id="20" name="TextBox 19"/>
+          <p:cNvSpPr txBox="1"/>
+          <p:nvPr/>
+        </p:nvSpPr>
+        <p:spPr>
+          <a:xfrm>
+            <a:off x="4644925" y="4112865"/>
+            <a:ext cx="2901999" cy="274290"/>
+          </a:xfrm>
+          <a:prstGeom prst="rect">
+            <a:avLst/>
+          </a:prstGeom>
+          <a:noFill/>
+        </p:spPr>
+        <p:txBody>
+          <a:bodyPr wrap="square" lIns="161925" tIns="0" rIns="0" bIns="0" anchor="t">
+            <a:spAutoFit/>
+          </a:bodyPr>
+          <a:lstStyle/>
+          <a:p>
+            <a:pPr algn="l">
+              <a:lnSpc>
+                <a:spcPts val="2160"/>
+              </a:lnSpc>
+            </a:pPr>
+            <a:r>
+              <a:rPr sz="1350" b="0" i="0" u="none">
+                <a:solidFill>
+                  <a:srgbClr val="94A3B8"/>
+                </a:solidFill>
+                <a:latin typeface="Inter"/>
+              </a:rPr>
+              <a:t>Finding Datasets</a:t>
+            </a:r>
+          </a:p>
+        </p:txBody>
+      </p:sp>
+      <p:sp>
+        <p:nvSpPr>
+          <p:cNvPr id="21" name="TextBox 20"/>
+          <p:cNvSpPr txBox="1"/>
+          <p:nvPr/>
+        </p:nvSpPr>
+        <p:spPr>
+          <a:xfrm>
+            <a:off x="4644925" y="4482405"/>
+            <a:ext cx="2901999" cy="274290"/>
+          </a:xfrm>
+          <a:prstGeom prst="rect">
+            <a:avLst/>
+          </a:prstGeom>
+          <a:noFill/>
+        </p:spPr>
+        <p:txBody>
+          <a:bodyPr wrap="square" lIns="161925" tIns="0" rIns="0" bIns="0" anchor="t">
+            <a:spAutoFit/>
+          </a:bodyPr>
+          <a:lstStyle/>
+          <a:p>
+            <a:pPr algn="l">
+              <a:lnSpc>
+                <a:spcPts val="2160"/>
+              </a:lnSpc>
+            </a:pPr>
+            <a:r>
+              <a:rPr sz="1350" b="0" i="0" u="none">
+                <a:solidFill>
+                  <a:srgbClr val="94A3B8"/>
+                </a:solidFill>
+                <a:latin typeface="Inter"/>
+              </a:rPr>
+              <a:t>Pentaho Transformations</a:t>
+            </a:r>
+          </a:p>
+        </p:txBody>
+      </p:sp>
+      <p:sp>
+        <p:nvSpPr>
+          <p:cNvPr id="22" name="TextBox 21"/>
+          <p:cNvSpPr txBox="1"/>
+          <p:nvPr/>
+        </p:nvSpPr>
+        <p:spPr>
+          <a:xfrm>
+            <a:off x="4644925" y="4851945"/>
+            <a:ext cx="2901999" cy="548580"/>
+          </a:xfrm>
+          <a:prstGeom prst="rect">
+            <a:avLst/>
+          </a:prstGeom>
+          <a:noFill/>
+        </p:spPr>
+        <p:txBody>
+          <a:bodyPr wrap="square" lIns="161925" tIns="0" rIns="0" bIns="0" anchor="t">
+            <a:spAutoFit/>
+          </a:bodyPr>
+          <a:lstStyle/>
+          <a:p>
+            <a:pPr algn="l">
+              <a:lnSpc>
+                <a:spcPts val="2160"/>
+              </a:lnSpc>
+            </a:pPr>
+            <a:r>
+              <a:rPr sz="1350" b="0" i="0" u="none">
+                <a:solidFill>
+                  <a:srgbClr val="94A3B8"/>
+                </a:solidFill>
+                <a:latin typeface="Inter"/>
+              </a:rPr>
+              <a:t>Mapping Data Sources (Documentation)</a:t>
+            </a:r>
+          </a:p>
+        </p:txBody>
+      </p:sp>
+      <p:pic>
+        <p:nvPicPr>
+          <p:cNvPr id="23" name="Picture 22" descr="image.png"/>
+          <p:cNvPicPr>
+            <a:picLocks noChangeAspect="1"/>
+          </p:cNvPicPr>
+          <p:nvPr/>
+        </p:nvPicPr>
+        <p:blipFill>
+          <a:blip r:embed="rId11"/>
+          <a:stretch>
+            <a:fillRect/>
+          </a:stretch>
+        </p:blipFill>
+        <p:spPr>
+          <a:xfrm>
+            <a:off x="9721750" y="2550914"/>
+            <a:ext cx="304800" cy="342900"/>
+          </a:xfrm>
+          <a:prstGeom prst="rect">
+            <a:avLst/>
+          </a:prstGeom>
+        </p:spPr>
+      </p:pic>
+      <p:sp>
+        <p:nvSpPr>
+          <p:cNvPr id="24" name="TextBox 23"/>
+          <p:cNvSpPr txBox="1"/>
+          <p:nvPr/>
+        </p:nvSpPr>
+        <p:spPr>
+          <a:xfrm>
+            <a:off x="8423225" y="4112865"/>
+            <a:ext cx="2901850" cy="274290"/>
+          </a:xfrm>
+          <a:prstGeom prst="rect">
+            <a:avLst/>
+          </a:prstGeom>
+          <a:noFill/>
+        </p:spPr>
+        <p:txBody>
+          <a:bodyPr wrap="square" lIns="161925" tIns="0" rIns="0" bIns="0" anchor="t">
+            <a:spAutoFit/>
+          </a:bodyPr>
+          <a:lstStyle/>
+          <a:p>
+            <a:pPr algn="l">
+              <a:lnSpc>
+                <a:spcPts val="2160"/>
+              </a:lnSpc>
+            </a:pPr>
+            <a:r>
+              <a:rPr sz="1350" b="0" i="0" u="none">
+                <a:solidFill>
+                  <a:srgbClr val="94A3B8"/>
+                </a:solidFill>
+                <a:latin typeface="Inter"/>
+              </a:rPr>
+              <a:t>Finding Datasets</a:t>
+            </a:r>
+          </a:p>
+        </p:txBody>
+      </p:sp>
+      <p:sp>
+        <p:nvSpPr>
+          <p:cNvPr id="25" name="TextBox 24"/>
+          <p:cNvSpPr txBox="1"/>
+          <p:nvPr/>
+        </p:nvSpPr>
+        <p:spPr>
+          <a:xfrm>
+            <a:off x="8423225" y="4482405"/>
+            <a:ext cx="2901850" cy="274290"/>
+          </a:xfrm>
+          <a:prstGeom prst="rect">
+            <a:avLst/>
+          </a:prstGeom>
+          <a:noFill/>
+        </p:spPr>
+        <p:txBody>
+          <a:bodyPr wrap="square" lIns="161925" tIns="0" rIns="0" bIns="0" anchor="t">
+            <a:spAutoFit/>
+          </a:bodyPr>
+          <a:lstStyle/>
+          <a:p>
+            <a:pPr algn="l">
+              <a:lnSpc>
+                <a:spcPts val="2160"/>
+              </a:lnSpc>
+            </a:pPr>
+            <a:r>
+              <a:rPr sz="1350" b="0" i="0" u="none">
+                <a:solidFill>
+                  <a:srgbClr val="94A3B8"/>
+                </a:solidFill>
+                <a:latin typeface="Inter"/>
+              </a:rPr>
+              <a:t>Pentaho Transformations</a:t>
+            </a:r>
+          </a:p>
+        </p:txBody>
+      </p:sp>
+      <p:sp>
+        <p:nvSpPr>
+          <p:cNvPr id="26" name="TextBox 25"/>
+          <p:cNvSpPr txBox="1"/>
+          <p:nvPr/>
+        </p:nvSpPr>
+        <p:spPr>
+          <a:xfrm>
+            <a:off x="8423225" y="4851945"/>
+            <a:ext cx="2901850" cy="274290"/>
+          </a:xfrm>
+          <a:prstGeom prst="rect">
+            <a:avLst/>
+          </a:prstGeom>
+          <a:noFill/>
+        </p:spPr>
+        <p:txBody>
+          <a:bodyPr wrap="square" lIns="161925" tIns="0" rIns="0" bIns="0" anchor="t">
+            <a:spAutoFit/>
+          </a:bodyPr>
+          <a:lstStyle/>
+          <a:p>
+            <a:pPr algn="l">
+              <a:lnSpc>
+                <a:spcPts val="2160"/>
+              </a:lnSpc>
+            </a:pPr>
+            <a:r>
+              <a:rPr sz="1350" b="0" i="0" u="none">
+                <a:solidFill>
+                  <a:srgbClr val="94A3B8"/>
+                </a:solidFill>
+                <a:latin typeface="Inter"/>
+              </a:rPr>
+              <a:t>Pentaho Jobs Integration</a:t>
+            </a:r>
+          </a:p>
+        </p:txBody>
+      </p:sp>
+      <p:pic>
+        <p:nvPicPr>
+          <p:cNvPr id="27" name="Picture 26" descr="image.png"/>
+          <p:cNvPicPr>
+            <a:picLocks noChangeAspect="1"/>
+          </p:cNvPicPr>
+          <p:nvPr/>
+        </p:nvPicPr>
+        <p:blipFill>
+          <a:blip r:embed="rId12"/>
+          <a:stretch>
+            <a:fillRect/>
+          </a:stretch>
+        </p:blipFill>
+        <p:spPr>
+          <a:xfrm>
+            <a:off x="866775" y="4155727"/>
+            <a:ext cx="85725" cy="180975"/>
+          </a:xfrm>
+          <a:prstGeom prst="rect">
+            <a:avLst/>
+          </a:prstGeom>
+        </p:spPr>
+      </p:pic>
+      <p:pic>
+        <p:nvPicPr>
+          <p:cNvPr id="28" name="Picture 27" descr="image.png"/>
+          <p:cNvPicPr>
+            <a:picLocks noChangeAspect="1"/>
+          </p:cNvPicPr>
+          <p:nvPr/>
+        </p:nvPicPr>
+        <p:blipFill>
+          <a:blip r:embed="rId12"/>
+          <a:stretch>
+            <a:fillRect/>
+          </a:stretch>
+        </p:blipFill>
+        <p:spPr>
+          <a:xfrm>
+            <a:off x="866775" y="4525267"/>
+            <a:ext cx="85725" cy="180975"/>
+          </a:xfrm>
+          <a:prstGeom prst="rect">
+            <a:avLst/>
+          </a:prstGeom>
+        </p:spPr>
+      </p:pic>
+      <p:pic>
+        <p:nvPicPr>
+          <p:cNvPr id="29" name="Picture 28" descr="image.png"/>
+          <p:cNvPicPr>
+            <a:picLocks noChangeAspect="1"/>
+          </p:cNvPicPr>
+          <p:nvPr/>
+        </p:nvPicPr>
+        <p:blipFill>
+          <a:blip r:embed="rId12"/>
+          <a:stretch>
+            <a:fillRect/>
+          </a:stretch>
+        </p:blipFill>
+        <p:spPr>
+          <a:xfrm>
+            <a:off x="866775" y="4894808"/>
+            <a:ext cx="85725" cy="180975"/>
+          </a:xfrm>
+          <a:prstGeom prst="rect">
+            <a:avLst/>
+          </a:prstGeom>
+        </p:spPr>
+      </p:pic>
+      <p:pic>
+        <p:nvPicPr>
+          <p:cNvPr id="30" name="Picture 29" descr="image.png"/>
+          <p:cNvPicPr>
+            <a:picLocks noChangeAspect="1"/>
+          </p:cNvPicPr>
+          <p:nvPr/>
+        </p:nvPicPr>
+        <p:blipFill>
+          <a:blip r:embed="rId13"/>
+          <a:stretch>
+            <a:fillRect/>
+          </a:stretch>
+        </p:blipFill>
+        <p:spPr>
+          <a:xfrm>
+            <a:off x="4644925" y="4155727"/>
+            <a:ext cx="85725" cy="180975"/>
+          </a:xfrm>
+          <a:prstGeom prst="rect">
+            <a:avLst/>
+          </a:prstGeom>
+        </p:spPr>
+      </p:pic>
+      <p:pic>
+        <p:nvPicPr>
+          <p:cNvPr id="31" name="Picture 30" descr="image.png"/>
+          <p:cNvPicPr>
+            <a:picLocks noChangeAspect="1"/>
+          </p:cNvPicPr>
+          <p:nvPr/>
+        </p:nvPicPr>
+        <p:blipFill>
+          <a:blip r:embed="rId13"/>
+          <a:stretch>
+            <a:fillRect/>
+          </a:stretch>
+        </p:blipFill>
+        <p:spPr>
+          <a:xfrm>
+            <a:off x="4644925" y="4525267"/>
+            <a:ext cx="85725" cy="180975"/>
+          </a:xfrm>
+          <a:prstGeom prst="rect">
+            <a:avLst/>
+          </a:prstGeom>
+        </p:spPr>
+      </p:pic>
+      <p:pic>
+        <p:nvPicPr>
+          <p:cNvPr id="32" name="Picture 31" descr="image.png"/>
+          <p:cNvPicPr>
+            <a:picLocks noChangeAspect="1"/>
+          </p:cNvPicPr>
+          <p:nvPr/>
+        </p:nvPicPr>
+        <p:blipFill>
+          <a:blip r:embed="rId13"/>
+          <a:stretch>
+            <a:fillRect/>
+          </a:stretch>
+        </p:blipFill>
+        <p:spPr>
+          <a:xfrm>
+            <a:off x="4644925" y="4894808"/>
+            <a:ext cx="85725" cy="180975"/>
+          </a:xfrm>
+          <a:prstGeom prst="rect">
+            <a:avLst/>
+          </a:prstGeom>
+        </p:spPr>
+      </p:pic>
+      <p:pic>
+        <p:nvPicPr>
+          <p:cNvPr id="33" name="Picture 32" descr="image.png"/>
+          <p:cNvPicPr>
+            <a:picLocks noChangeAspect="1"/>
+          </p:cNvPicPr>
+          <p:nvPr/>
+        </p:nvPicPr>
+        <p:blipFill>
+          <a:blip r:embed="rId12"/>
+          <a:stretch>
+            <a:fillRect/>
+          </a:stretch>
+        </p:blipFill>
+        <p:spPr>
+          <a:xfrm>
+            <a:off x="8423225" y="4155727"/>
+            <a:ext cx="85725" cy="180975"/>
+          </a:xfrm>
+          <a:prstGeom prst="rect">
+            <a:avLst/>
+          </a:prstGeom>
+        </p:spPr>
+      </p:pic>
+      <p:pic>
+        <p:nvPicPr>
+          <p:cNvPr id="34" name="Picture 33" descr="image.png"/>
+          <p:cNvPicPr>
+            <a:picLocks noChangeAspect="1"/>
+          </p:cNvPicPr>
+          <p:nvPr/>
+        </p:nvPicPr>
+        <p:blipFill>
+          <a:blip r:embed="rId12"/>
+          <a:stretch>
+            <a:fillRect/>
+          </a:stretch>
+        </p:blipFill>
+        <p:spPr>
+          <a:xfrm>
+            <a:off x="8423225" y="4525267"/>
+            <a:ext cx="85725" cy="180975"/>
+          </a:xfrm>
+          <a:prstGeom prst="rect">
+            <a:avLst/>
+          </a:prstGeom>
+        </p:spPr>
+      </p:pic>
+      <p:pic>
+        <p:nvPicPr>
+          <p:cNvPr id="35" name="Picture 34" descr="image.png"/>
+          <p:cNvPicPr>
+            <a:picLocks noChangeAspect="1"/>
+          </p:cNvPicPr>
+          <p:nvPr/>
+        </p:nvPicPr>
+        <p:blipFill>
+          <a:blip r:embed="rId12"/>
+          <a:stretch>
+            <a:fillRect/>
+          </a:stretch>
+        </p:blipFill>
+        <p:spPr>
+          <a:xfrm>
+            <a:off x="8423225" y="4894808"/>
+            <a:ext cx="85725" cy="180975"/>
+          </a:xfrm>
+          <a:prstGeom prst="rect">
+            <a:avLst/>
+          </a:prstGeom>
+        </p:spPr>
+      </p:pic>
+      <p:sp>
+        <p:nvSpPr>
+          <p:cNvPr id="36" name="TextBox 35"/>
+          <p:cNvSpPr txBox="1"/>
+          <p:nvPr/>
+        </p:nvSpPr>
+        <p:spPr>
+          <a:xfrm>
+            <a:off x="762000" y="476250"/>
+            <a:ext cx="11401425" cy="502890"/>
+          </a:xfrm>
+          <a:prstGeom prst="rect">
+            <a:avLst/>
+          </a:prstGeom>
+          <a:noFill/>
+        </p:spPr>
+        <p:txBody>
+          <a:bodyPr wrap="square" lIns="0" tIns="0" rIns="0" bIns="0" anchor="t">
+            <a:spAutoFit/>
+          </a:bodyPr>
+          <a:lstStyle/>
+          <a:p>
+            <a:pPr algn="l">
+              <a:lnSpc>
+                <a:spcPts val="3959"/>
+              </a:lnSpc>
+            </a:pPr>
+            <a:r>
+              <a:rPr sz="3300" b="1" i="0" u="none">
+                <a:solidFill>
+                  <a:srgbClr val="F8FAFC"/>
+                </a:solidFill>
+                <a:latin typeface="Inter"/>
+              </a:rPr>
+              <a:t>TEAM CONTRIBUTIONS</a:t>
+            </a:r>
+          </a:p>
+        </p:txBody>
+      </p:sp>
+      <p:sp>
+        <p:nvSpPr>
+          <p:cNvPr id="37" name="Rectangle 36"/>
+          <p:cNvSpPr/>
+          <p:nvPr/>
+        </p:nvSpPr>
+        <p:spPr>
+          <a:xfrm>
+            <a:off x="571500" y="476250"/>
+            <a:ext cx="57150" cy="502890"/>
+          </a:xfrm>
+          <a:prstGeom prst="rect">
+            <a:avLst/>
+          </a:prstGeom>
+          <a:solidFill>
+            <a:srgbClr val="0EA5E9"/>
+          </a:solidFill>
+          <a:ln>
+            <a:noFill/>
+          </a:ln>
+          <a:effectLst/>
+        </p:spPr>
+        <p:style>
+          <a:lnRef idx="1">
+            <a:schemeClr val="accent1"/>
+          </a:lnRef>
+          <a:fillRef idx="3">
+            <a:schemeClr val="accent1"/>
+          </a:fillRef>
+          <a:effectRef idx="2">
+            <a:schemeClr val="accent1"/>
+          </a:effectRef>
+          <a:fontRef idx="minor">
+            <a:schemeClr val="lt1"/>
+          </a:fontRef>
+        </p:style>
+        <p:txBody>
+          <a:bodyPr rtlCol="0" anchor="ctr"/>
+          <a:lstStyle/>
+          <a:p>
+            <a:pPr algn="ctr"/>
+            <a:endParaRPr/>
+          </a:p>
+        </p:txBody>
+      </p:sp>
+    </p:spTree>
+  </p:cSld>
+  <p:clrMapOvr>
+    <a:masterClrMapping/>
+  </p:clrMapOvr>
+</p:sld>
+</file>
+
+<file path=ppt/slides/slide18.xml><?xml version="1.0" encoding="utf-8"?>
 <p:sld xmlns:a="http://schemas.openxmlformats.org/drawingml/2006/main" xmlns:r="http://schemas.openxmlformats.org/officeDocument/2006/relationships" xmlns:p="http://schemas.openxmlformats.org/presentationml/2006/main">
   <p:cSld>
     <p:spTree>
@@ -6357,7 +11639,7 @@
         <p:spPr>
           <a:xfrm>
             <a:off x="571500" y="5734794"/>
-            <a:ext cx="5238750" cy="457200"/>
+            <a:ext cx="5238750" cy="442044"/>
           </a:xfrm>
           <a:prstGeom prst="rect">
             <a:avLst/>
@@ -6376,14 +11658,29 @@
               </a:lnSpc>
             </a:pPr>
             <a:r>
-              <a:rPr sz="1125" b="0" i="1" u="none">
+              <a:rPr sz="1125" b="0" i="1" u="none" dirty="0">
                 <a:solidFill>
                   <a:srgbClr val="94A3B8"/>
                 </a:solidFill>
                 <a:latin typeface="Inter"/>
               </a:rPr>
-              <a:t>Note: Sprints 0 &amp; 1 focus on foundational elements. Later sprints will extend to a complete data warehouse.</a:t>
-            </a:r>
+              <a:t>Note: Sprints 0 &amp; 1 focus on foundational elements. </a:t>
+            </a:r>
+            <a:r>
+              <a:rPr lang="en-IN" sz="1125" b="0" i="1" u="none" dirty="0">
+                <a:solidFill>
+                  <a:srgbClr val="94A3B8"/>
+                </a:solidFill>
+                <a:latin typeface="Inter"/>
+              </a:rPr>
+              <a:t>Sprint 2 focuses on data preprocessing and st</a:t>
+            </a:r>
+            <a:endParaRPr sz="1125" b="0" i="1" u="none" dirty="0">
+              <a:solidFill>
+                <a:srgbClr val="94A3B8"/>
+              </a:solidFill>
+              <a:latin typeface="Inter"/>
+            </a:endParaRPr>
           </a:p>
         </p:txBody>
       </p:sp>
@@ -6415,7 +11712,7 @@
               </a:lnSpc>
             </a:pPr>
             <a:r>
-              <a:rPr sz="1350" b="1" i="0" u="none">
+              <a:rPr sz="1350" b="1" i="0" u="none" dirty="0">
                 <a:solidFill>
                   <a:srgbClr val="94A3B8"/>
                 </a:solidFill>
@@ -6424,7 +11721,7 @@
               <a:t>Data Ingestion</a:t>
             </a:r>
             <a:r>
-              <a:rPr sz="1350" b="0" i="0" u="none">
+              <a:rPr sz="1350" b="0" i="0" u="none" dirty="0">
                 <a:solidFill>
                   <a:srgbClr val="94A3B8"/>
                 </a:solidFill>
@@ -6433,7 +11730,7 @@
               <a:t> </a:t>
             </a:r>
             <a:r>
-              <a:rPr sz="1350" b="0" i="0" u="none">
+              <a:rPr sz="1350" b="0" i="0" u="none" dirty="0">
                 <a:solidFill>
                   <a:srgbClr val="10B981"/>
                 </a:solidFill>
@@ -6453,7 +11750,7 @@
         <p:spPr>
           <a:xfrm>
             <a:off x="904875" y="3875633"/>
-            <a:ext cx="4905375" cy="274290"/>
+            <a:ext cx="4905375" cy="257315"/>
           </a:xfrm>
           <a:prstGeom prst="rect">
             <a:avLst/>
@@ -6466,13 +11763,13 @@
           </a:bodyPr>
           <a:lstStyle/>
           <a:p>
-            <a:pPr algn="l">
+            <a:pPr>
               <a:lnSpc>
                 <a:spcPts val="2160"/>
               </a:lnSpc>
             </a:pPr>
             <a:r>
-              <a:rPr sz="1350" b="1" i="0" u="none">
+              <a:rPr sz="1350" b="1" i="0" u="none" dirty="0">
                 <a:solidFill>
                   <a:srgbClr val="94A3B8"/>
                 </a:solidFill>
@@ -6480,6 +11777,30 @@
               </a:rPr>
               <a:t>Data Cleaning &amp; Validation</a:t>
             </a:r>
+            <a:r>
+              <a:rPr lang="en-IN" sz="1350" b="1" i="0" u="none" dirty="0">
+                <a:solidFill>
+                  <a:srgbClr val="94A3B8"/>
+                </a:solidFill>
+                <a:latin typeface="Inter"/>
+              </a:rPr>
+              <a:t> </a:t>
+            </a:r>
+            <a:r>
+              <a:rPr lang="en-IN" sz="1350" dirty="0">
+                <a:solidFill>
+                  <a:srgbClr val="10B981"/>
+                </a:solidFill>
+                <a:latin typeface="Inter"/>
+              </a:rPr>
+              <a:t>[Current Phase: Done]</a:t>
+            </a:r>
+            <a:endParaRPr sz="1350" b="1" i="0" u="none" dirty="0">
+              <a:solidFill>
+                <a:srgbClr val="94A3B8"/>
+              </a:solidFill>
+              <a:latin typeface="Inter"/>
+            </a:endParaRPr>
           </a:p>
         </p:txBody>
       </p:sp>
@@ -6492,7 +11813,7 @@
         <p:spPr>
           <a:xfrm>
             <a:off x="904875" y="4340423"/>
-            <a:ext cx="4905375" cy="274290"/>
+            <a:ext cx="4905375" cy="257315"/>
           </a:xfrm>
           <a:prstGeom prst="rect">
             <a:avLst/>
@@ -6505,13 +11826,13 @@
           </a:bodyPr>
           <a:lstStyle/>
           <a:p>
-            <a:pPr algn="l">
+            <a:pPr>
               <a:lnSpc>
                 <a:spcPts val="2160"/>
               </a:lnSpc>
             </a:pPr>
             <a:r>
-              <a:rPr sz="1350" b="1" i="0" u="none">
+              <a:rPr sz="1350" b="1" i="0" u="none" dirty="0">
                 <a:solidFill>
                   <a:srgbClr val="94A3B8"/>
                 </a:solidFill>
@@ -6519,6 +11840,30 @@
               </a:rPr>
               <a:t>Data Integration</a:t>
             </a:r>
+            <a:r>
+              <a:rPr lang="en-IN" sz="1350" b="1" i="0" u="none" dirty="0">
+                <a:solidFill>
+                  <a:srgbClr val="94A3B8"/>
+                </a:solidFill>
+                <a:latin typeface="Inter"/>
+              </a:rPr>
+              <a:t> </a:t>
+            </a:r>
+            <a:r>
+              <a:rPr lang="en-IN" sz="1350" dirty="0">
+                <a:solidFill>
+                  <a:srgbClr val="10B981"/>
+                </a:solidFill>
+                <a:latin typeface="Inter"/>
+              </a:rPr>
+              <a:t>[Current Phase: Done]</a:t>
+            </a:r>
+            <a:endParaRPr sz="1350" b="1" i="0" u="none" dirty="0">
+              <a:solidFill>
+                <a:srgbClr val="94A3B8"/>
+              </a:solidFill>
+              <a:latin typeface="Inter"/>
+            </a:endParaRPr>
           </a:p>
         </p:txBody>
       </p:sp>
@@ -6531,7 +11876,7 @@
         <p:spPr>
           <a:xfrm>
             <a:off x="904875" y="4805213"/>
-            <a:ext cx="4905375" cy="274290"/>
+            <a:ext cx="4905375" cy="257315"/>
           </a:xfrm>
           <a:prstGeom prst="rect">
             <a:avLst/>
@@ -6544,13 +11889,13 @@
           </a:bodyPr>
           <a:lstStyle/>
           <a:p>
-            <a:pPr algn="l">
+            <a:pPr>
               <a:lnSpc>
                 <a:spcPts val="2160"/>
               </a:lnSpc>
             </a:pPr>
             <a:r>
-              <a:rPr sz="1350" b="1" i="0" u="none">
+              <a:rPr sz="1350" b="1" i="0" u="none" dirty="0">
                 <a:solidFill>
                   <a:srgbClr val="94A3B8"/>
                 </a:solidFill>
@@ -6558,6 +11903,30 @@
               </a:rPr>
               <a:t>Data Storage</a:t>
             </a:r>
+            <a:r>
+              <a:rPr lang="en-IN" sz="1350" b="1" i="0" u="none" dirty="0">
+                <a:solidFill>
+                  <a:srgbClr val="94A3B8"/>
+                </a:solidFill>
+                <a:latin typeface="Inter"/>
+              </a:rPr>
+              <a:t> </a:t>
+            </a:r>
+            <a:r>
+              <a:rPr lang="en-IN" sz="1350" dirty="0">
+                <a:solidFill>
+                  <a:srgbClr val="10B981"/>
+                </a:solidFill>
+                <a:latin typeface="Inter"/>
+              </a:rPr>
+              <a:t>[Current Phase: Done]</a:t>
+            </a:r>
+            <a:endParaRPr sz="1350" b="1" i="0" u="none" dirty="0">
+              <a:solidFill>
+                <a:srgbClr val="94A3B8"/>
+              </a:solidFill>
+              <a:latin typeface="Inter"/>
+            </a:endParaRPr>
           </a:p>
         </p:txBody>
       </p:sp>
